--- a/docs/community/marketing/decks/architect-phase2a/OCM-Story-Architect-External.pptx
+++ b/docs/community/marketing/decks/architect-phase2a/OCM-Story-Architect-External.pptx
@@ -727,7 +727,7 @@
           </a:p>
           <a:p>
             <a:r>
-              <a:t>Q&amp;A backup: a fifth CR, `Replication`, sits alongside the chain (not within it) and mirrors a version from one repository to another - the controller-shaped equivalent of `ocm transfer cv`. Optional appendix slide if it comes up.</a:t>
+              <a:t>Q&amp;A backup: a fifth CR, `Replication`, sits alongside the chain (not within it) and transfers a version from one repository to another - the controller-shaped equivalent of `ocm transfer cv`. Optional appendix slide if it comes up.</a:t>
             </a:r>
           </a:p>
           <a:p>
@@ -1452,7 +1452,7 @@
           </a:p>
           <a:p>
             <a:r>
-              <a:t>• Any format - Helm stays Helm, OCI stays OCI, configs stay configs. The artifact `type:` is free-form; access types are pluggable. SBOMs and other formats slot in via the same mechanism.</a:t>
+              <a:t>• Any format - Helm stays Helm, OCI stays OCI, configs stay configs. The artifact `type:` is free-form, so an OCM component already carries SBOMs, npm packages, maven artifacts and anything else your team produces today - access is via `File/v1` or `LocalBlob/v1`. Dedicated `NPM/v1` and `Maven/v1` access types are on the roadmap (the v1 line shipped them; we're bringing them back to v2).</a:t>
             </a:r>
           </a:p>
           <a:p>
@@ -1742,12 +1742,17 @@
           <a:lstStyle/>
           <a:p>
             <a:r>
-              <a:t>Name the primitive, then frame the next four slides.</a:t>
-            </a:r>
-          </a:p>
-          <a:p>
-            <a:r>
-              <a:t>The signed descriptor is itself an OCI artifact - media type `application/vnd.ocm.software.component-descriptor.v2`. Lives in your registry next to the images. No new infrastructure.</a:t>
+              <a:t>Bridge from noun to verb. On slides 5 and 6 you saw the static artifact - what you write and what travels. Now four moves on that artifact.</a:t>
+            </a:r>
+          </a:p>
+          <a:p>
+            <a:r>
+              <a:t>We've covered the first half of two of them already: the constructor (slide 5) is the input to Pack; the descriptor (slide 6) is the output of Pack, the target of Sign, and the unit of Transport.</a:t>
+            </a:r>
+          </a:p>
+          <a:p>
+            <a:r>
+              <a:t>Name the primitive: the signed descriptor is itself an OCI artifact - media type `application/vnd.ocm.software.component-descriptor.v2`. Lives in your registry next to the images. No new infrastructure.</a:t>
             </a:r>
           </a:p>
           <a:p>
@@ -9914,7 +9919,7 @@
           <a:lstStyle/>
           <a:p>
             <a:r>
-              <a:t>OCI, Helm, configs, SBOMs, binaries.</a:t>
+              <a:t>OCI, Helm, configs, SBOMs, npm, maven, binaries.</a:t>
             </a:r>
           </a:p>
           <a:p>

--- a/docs/community/marketing/decks/architect-phase2a/OCM-Story-Architect-External.pptx
+++ b/docs/community/marketing/decks/architect-phase2a/OCM-Story-Architect-External.pptx
@@ -707,7 +707,7 @@
           </a:p>
           <a:p>
             <a:r>
-              <a:t>• Component - names a specific component version. Pulls the descriptor and verifies its signature.</a:t>
+              <a:t>• Component - names a specific component version. Pulls the descriptor and verifies its signature. If verification fails, nothing downstream sees a verified descriptor - the chain stops here.</a:t>
             </a:r>
           </a:p>
           <a:p>
@@ -717,22 +717,22 @@
           </a:p>
           <a:p>
             <a:r>
-              <a:t>• Deployer - applies the resource to the cluster. Resolves image refs from the verified descriptor at apply time - that is where localization happens. Built-in for raw manifests; Flux for HelmRelease; Argo for Application.</a:t>
-            </a:r>
-          </a:p>
-          <a:p>
-            <a:r>
-              <a:t>Anti-lock-in: the Deployer tier is pluggable - built-in, Flux, or Argo - so OCM doesn't fight the reconciliation engine you already run.</a:t>
-            </a:r>
-          </a:p>
-          <a:p>
-            <a:r>
-              <a:t>Q&amp;A backup: a fifth CR, `Replication`, sits alongside the chain (not within it) and transfers a version from one repository to another - the controller-shaped equivalent of `ocm transfer cv`. Optional appendix slide if it comes up.</a:t>
-            </a:r>
-          </a:p>
-          <a:p>
-            <a:r>
-              <a:t>Slide 14 flags the only real sharp edges that remain.</a:t>
+              <a:t>• Deployer - applies the resource to the cluster. Resolves image refs and other deploy-time pointers from the verified component descriptor at apply time - that is where localization happens in v2.</a:t>
+            </a:r>
+          </a:p>
+          <a:p>
+            <a:r>
+              <a:t>For the Helm-deploy reference flow, the chain feeds a `ResourceGraphDefinition` that kro reconciles, with Flux applying the resulting `HelmRelease`. The OCM controllers DON'T ship kro or Flux - bring your own. Slide 14 flags this as one of the three honest edges.</a:t>
+            </a:r>
+          </a:p>
+          <a:p>
+            <a:r>
+              <a:t>Q&amp;A backup if asked about Argo: Argo as an alternative to Flux is in flight (docs PR landing soon). Until merged, the documented Helm-deploy path is kro + Flux.</a:t>
+            </a:r>
+          </a:p>
+          <a:p>
+            <a:r>
+              <a:t>Q&amp;A backup on the controller-shaped `ocm transfer`: yes, there's a `Replication` CR for in-cluster repo-to-repo mirroring. Appendix slide 16 covers it.</a:t>
             </a:r>
           </a:p>
         </p:txBody>
@@ -807,22 +807,27 @@
           </a:p>
           <a:p>
             <a:r>
-              <a:t>The product is `acme.org/sovereign/product`. Day 1 references notes 1.0.0 and postgres 1.0.0. The notes team ships a patch - 1.0.0 -&gt; 1.1.0. The platform team raises the product to 1.1.0 and updates the notes reference. Postgres stays.</a:t>
-            </a:r>
-          </a:p>
-          <a:p>
-            <a:r>
-              <a:t>Commit. The controller pulls the new product descriptor, verifies the signature, resolves new digests for the notes artifacts. Notes rolls forward; postgres is untouched.</a:t>
-            </a:r>
-          </a:p>
-          <a:p>
-            <a:r>
-              <a:t>Differentiator for the security architect: every digest in 1.1.0 is pinned by the signature. Verified before the cluster is touched. `helm upgrade` cannot promise that.</a:t>
-            </a:r>
-          </a:p>
-          <a:p>
-            <a:r>
-              <a:t>Bump the product. The references follow.</a:t>
+              <a:t>The product is `acme.org/sovereign/product`. Day 1 references notes 1.0.0 and postgres 1.0.0, each with its descriptor digest pinned. The notes team ships a patch (1.0.0 -&gt; 1.1.0). The platform team raises the product to 1.1.0 and updates the notes reference (its version AND its digest, because the new notes descriptor hashes differently). Postgres stays - same version, same digest.</a:t>
+            </a:r>
+          </a:p>
+          <a:p>
+            <a:r>
+              <a:t>Commit. The controller pulls the new product descriptor, verifies the signature, resolves the new digests, applies. Notes rolls forward; postgres is untouched.</a:t>
+            </a:r>
+          </a:p>
+          <a:p>
+            <a:r>
+              <a:t>Differentiator framing for security architects: OCM is a release-level envelope. `helm upgrade` upgrades one chart; cosign signs one image. The OCM signature covers the whole release as one unit - every digest in every resource of every referenced component is pinned by the one parent signature. Drift would mean breaking that signature.</a:t>
+            </a:r>
+          </a:p>
+          <a:p>
+            <a:r>
+              <a:t>Q&amp;A backup on forged descriptors: nothing OCM-specific stops a malicious operator from committing a forged descriptor with bumped versions, an attacker's image references, and a re-signed signature using a stolen key. Same threat model as any signed-release system: rotate keys, dual-sign, audit. What OCM gives you is one signature to audit instead of N.</a:t>
+            </a:r>
+          </a:p>
+          <a:p>
+            <a:r>
+              <a:t>Bump the product. The references follow. The cluster cannot drift without breaking the envelope.</a:t>
             </a:r>
           </a:p>
         </p:txBody>
@@ -982,17 +987,17 @@
           </a:p>
           <a:p>
             <a:r>
-              <a:t>• Transfer defaults - copies only the descriptor. For air-gap, pass --copy-resources so the bytes travel too.</a:t>
-            </a:r>
-          </a:p>
-          <a:p>
-            <a:r>
-              <a:t>• Controllers v1alpha1 - CRD shapes for Repository/Component/Resource/Deployer are stabilising but still v1alpha1. Pin minor versions in your platform install.</a:t>
-            </a:r>
-          </a:p>
-          <a:p>
-            <a:r>
-              <a:t>• PEM-encoded RSA (X.509 cert chains) is experimental - the CLI prints `experimental` warnings on sign and verify. Plain RSA, GPG, and Sigstore are stable on the same v1alpha1 surface; PEM may still shift.</a:t>
+              <a:t>• Transfer defaults - copies only the descriptor. For air-gap, pass --copy-resources so the bytes travel too. Worth catching in a CI step the first time someone runs an air-gap export.</a:t>
+            </a:r>
+          </a:p>
+          <a:p>
+            <a:r>
+              <a:t>• Controllers v1alpha1 - CRD shapes for Repository/Component/Resource/Deployer are stabilising but still v1alpha1. Pin to specific release tags in your platform installs.</a:t>
+            </a:r>
+          </a:p>
+          <a:p>
+            <a:r>
+              <a:t>• Helm-deploy adds kro + Flux - the OCM controllers don't ship them. The reference Helm-deploy flow is OCM Controllers -&gt; ResourceGraphDefinition -&gt; kro -&gt; Flux/HelmRelease. Three installs, not one. Plan for it.</a:t>
             </a:r>
           </a:p>
           <a:p>
@@ -1447,12 +1452,12 @@
           </a:p>
           <a:p>
             <a:r>
-              <a:t>OCM is not a replacement for OCI, Helm, or your SBOM tooling. It composes around them and adds one new thing - the component.</a:t>
-            </a:r>
-          </a:p>
-          <a:p>
-            <a:r>
-              <a:t>• Any format - Helm stays Helm, OCI stays OCI, configs stay configs. The artifact `type:` is free-form, so an OCM component already carries SBOMs, npm packages, maven artifacts and anything else your team produces today - access is via `File/v1` or `LocalBlob/v1`. Dedicated `NPM/v1` and `Maven/v1` access types are on the roadmap (the v1 line shipped them; we're bringing them back to v2).</a:t>
+              <a:t>OCM is not a replacement for OCI, Helm, cosign, sigstore, or your SBOM tooling. It WRAPS them — adds one envelope signature over the whole release, sitting on top of whatever signatures the individual artifacts already carried.</a:t>
+            </a:r>
+          </a:p>
+          <a:p>
+            <a:r>
+              <a:t>• Any format - Helm stays Helm, OCI stays OCI, configs stay configs. The artifact `type:` is free-form, so an OCM component already carries SBOMs, npm packages, maven artifacts and anything else your team produces today - access is via `File/v1` or `LocalBlob/v1`. Dedicated `NPM/v1` and `Maven/v1` access types are roadmap (Maven epic ocm-project#836; NPM targeted before first GA at end of 2026).</a:t>
             </a:r>
           </a:p>
           <a:p>
@@ -1463,6 +1468,11 @@
           <a:p>
             <a:r>
               <a:t>• One signature - covers every digest in the component. The whole release is one signed unit.</a:t>
+            </a:r>
+          </a:p>
+          <a:p>
+            <a:r>
+              <a:t>Q&amp;A backup on cosign / sigstore / OCI 1.1 referrers: We don't replace per-artifact signatures - they travel inside the component. OCM adds a release-level envelope: one signature over the canonicalized component descriptor that covers the digests of every resource. If you cosign-sign every image and ship a sigstore bundle per chart today, keep doing that - OCM signs the wrapper above them.</a:t>
             </a:r>
           </a:p>
           <a:p>
@@ -1942,32 +1952,32 @@
           <a:lstStyle/>
           <a:p>
             <a:r>
-              <a:t>Signature shape is separated from trust model. Descriptor signed one canonical way; how you prove the key is what varies. All three are stable on the v1alpha1 API surface today:</a:t>
-            </a:r>
-          </a:p>
-          <a:p>
-            <a:r>
-              <a:t>• RSA / RSASSA-PSS - bare public-key pinning. The key you already rotate. No PKI required.</a:t>
-            </a:r>
-          </a:p>
-          <a:p>
-            <a:r>
-              <a:t>• GPG - fits OSS maintainers and orgs already running web-of-trust keyrings.</a:t>
-            </a:r>
-          </a:p>
-          <a:p>
-            <a:r>
-              <a:t>• Sigstore - keyless via OIDC + Rekor transparency log; fits CI like GitHub Actions with no long-lived keys.</a:t>
-            </a:r>
-          </a:p>
-          <a:p>
-            <a:r>
-              <a:t>Three things to land. Same signed object - the canonical descriptor digest - in all three. Verifiers can require multiple in parallel: RSA from the release team and Sigstore from CI. Pick what your org already runs.</a:t>
-            </a:r>
-          </a:p>
-          <a:p>
-            <a:r>
-              <a:t>On PEM-encoded RSA (X.509 certificate chains): not on this slide because it's still experimental - the CLI prints `experimental` warnings on sign and verify. Slide 14 names that.</a:t>
+              <a:t>Same signed object - the canonical descriptor digest - in all three. How you prove the key is what varies. All three are stable on the v1alpha1 API surface today:</a:t>
+            </a:r>
+          </a:p>
+          <a:p>
+            <a:r>
+              <a:t>• RSA / RSASSA-PSS - bare public-key pinning. The key you already rotate. No PKI required. Trust model: key pinning.</a:t>
+            </a:r>
+          </a:p>
+          <a:p>
+            <a:r>
+              <a:t>• GPG - OpenPGP key material; trust model is the same as RSA Plain (key pinning), just with a different key format. Fits orgs already running web-of-trust keyrings.</a:t>
+            </a:r>
+          </a:p>
+          <a:p>
+            <a:r>
+              <a:t>• Sigstore - keyless via OIDC + Rekor transparency log; trust anchor is your OIDC issuer. Fits CI workloads and any signer that can present an OIDC identity.</a:t>
+            </a:r>
+          </a:p>
+          <a:p>
+            <a:r>
+              <a:t>Three things to land. Same signed object - the canonical descriptor digest. Verifiers can require multiple in parallel (RSA from release team + Sigstore from CI). Pick what your org already runs.</a:t>
+            </a:r>
+          </a:p>
+          <a:p>
+            <a:r>
+              <a:t>Q&amp;A backup on PEM / cert chains: A fourth option exists - RSA with X.509 certificate chain, PEM encoding. Still experimental: the CLI prints `experimental` warnings on every sign and verify. Watch the docs; we'll promote it when the encoding stabilizes.</a:t>
             </a:r>
           </a:p>
           <a:p>
@@ -6304,6 +6314,76 @@
           </a:p>
         </p:txBody>
       </p:sp>
+      <p:sp>
+        <p:nvSpPr>
+          <p:cNvPr id="10" name="TextBox 9"/>
+          <p:cNvSpPr txBox="1"/>
+          <p:nvPr/>
+        </p:nvSpPr>
+        <p:spPr>
+          <a:xfrm>
+            <a:off x="1143000" y="9334500"/>
+            <a:ext cx="16002000" cy="571500"/>
+          </a:xfrm>
+          <a:prstGeom prst="rect">
+            <a:avLst/>
+          </a:prstGeom>
+          <a:noFill/>
+        </p:spPr>
+        <p:txBody>
+          <a:bodyPr wrap="square" lIns="0" rIns="0" tIns="0" bIns="0">
+            <a:spAutoFit/>
+          </a:bodyPr>
+          <a:lstStyle/>
+          <a:p>
+            <a:pPr algn="l"/>
+            <a:r>
+              <a:rPr sz="2000">
+                <a:solidFill>
+                  <a:srgbClr val="6B7280"/>
+                </a:solidFill>
+                <a:latin typeface="Aptos"/>
+              </a:rPr>
+              <a:t>CTF = Common Transport Format — a filesystem-based OCM repository, portable via any transfer mechanism.</a:t>
+            </a:r>
+          </a:p>
+        </p:txBody>
+      </p:sp>
+      <p:sp>
+        <p:nvSpPr>
+          <p:cNvPr id="11" name="TextBox 10"/>
+          <p:cNvSpPr txBox="1"/>
+          <p:nvPr/>
+        </p:nvSpPr>
+        <p:spPr>
+          <a:xfrm>
+            <a:off x="12573000" y="4953000"/>
+            <a:ext cx="3048000" cy="381000"/>
+          </a:xfrm>
+          <a:prstGeom prst="rect">
+            <a:avLst/>
+          </a:prstGeom>
+          <a:noFill/>
+        </p:spPr>
+        <p:txBody>
+          <a:bodyPr wrap="square" lIns="0" rIns="0" tIns="0" bIns="0">
+            <a:spAutoFit/>
+          </a:bodyPr>
+          <a:lstStyle/>
+          <a:p>
+            <a:pPr algn="ctr"/>
+            <a:r>
+              <a:rPr sz="2200" b="1">
+                <a:solidFill>
+                  <a:srgbClr val="0F6BFF"/>
+                </a:solidFill>
+                <a:latin typeface="Aptos"/>
+              </a:rPr>
+              <a:t>AIR-GAP</a:t>
+            </a:r>
+          </a:p>
+        </p:txBody>
+      </p:sp>
     </p:spTree>
   </p:cSld>
   <p:clrMapOvr>
@@ -6372,20 +6452,27 @@
         </p:nvSpPr>
         <p:spPr>
           <a:xfrm>
-            <a:off x="619125" y="5334000"/>
-            <a:ext cx="3905250" cy="2095500"/>
+            <a:off x="1181100" y="5143500"/>
+            <a:ext cx="3438525" cy="2524125"/>
           </a:xfrm>
           <a:prstGeom prst="roundRect">
-            <a:avLst/>
+            <a:avLst>
+              <a:gd name="adj" fmla="val 5283"/>
+            </a:avLst>
           </a:prstGeom>
           <a:solidFill>
             <a:srgbClr val="F3F4F6"/>
           </a:solidFill>
-          <a:ln w="19050">
-            <a:solidFill>
-              <a:srgbClr val="0F6BFF"/>
-            </a:solidFill>
+          <a:ln>
+            <a:noFill/>
           </a:ln>
+          <a:effectLst>
+            <a:outerShdw blurRad="28575" dist="28575" dir="5400000" rotWithShape="0">
+              <a:srgbClr val="000000">
+                <a:alpha val="30000"/>
+              </a:srgbClr>
+            </a:outerShdw>
+          </a:effectLst>
         </p:spPr>
         <p:style>
           <a:lnRef idx="1">
@@ -6402,50 +6489,25 @@
           </a:fontRef>
         </p:style>
         <p:txBody>
-          <a:bodyPr rtlCol="0" anchor="ctr" lIns="180000" rIns="180000" tIns="180000" bIns="180000" wrap="square"/>
+          <a:bodyPr rtlCol="0" anchor="ctr"/>
           <a:lstStyle/>
           <a:p>
             <a:pPr algn="ctr"/>
-            <a:r>
-              <a:rPr sz="2800" b="1">
-                <a:solidFill>
-                  <a:srgbClr val="0F6BFF"/>
-                </a:solidFill>
-                <a:latin typeface="Aptos"/>
-              </a:rPr>
-              <a:t>Repository</a:t>
-            </a:r>
-          </a:p>
-          <a:p>
-            <a:pPr algn="ctr">
-              <a:spcBef>
-                <a:spcPts val="800"/>
-              </a:spcBef>
-            </a:pPr>
-            <a:r>
-              <a:rPr sz="2200">
-                <a:solidFill>
-                  <a:srgbClr val="000000"/>
-                </a:solidFill>
-                <a:latin typeface="Aptos"/>
-              </a:rPr>
-              <a:t>Where component versions live.</a:t>
-            </a:r>
-          </a:p>
-        </p:txBody>
-      </p:sp>
-      <p:sp>
-        <p:nvSpPr>
-          <p:cNvPr id="5" name="Right Arrow 4"/>
+          </a:p>
+        </p:txBody>
+      </p:sp>
+      <p:sp>
+        <p:nvSpPr>
+          <p:cNvPr id="5" name="Rectangle 4"/>
           <p:cNvSpPr/>
           <p:nvPr/>
         </p:nvSpPr>
         <p:spPr>
           <a:xfrm>
-            <a:off x="4581525" y="6305550"/>
-            <a:ext cx="361950" cy="171450"/>
-          </a:xfrm>
-          <a:prstGeom prst="rightArrow">
+            <a:off x="1181100" y="5143500"/>
+            <a:ext cx="3438525" cy="47625"/>
+          </a:xfrm>
+          <a:prstGeom prst="rect">
             <a:avLst/>
           </a:prstGeom>
           <a:solidFill>
@@ -6479,86 +6541,90 @@
       </p:sp>
       <p:sp>
         <p:nvSpPr>
-          <p:cNvPr id="6" name="Rounded Rectangle 5"/>
+          <p:cNvPr id="6" name="TextBox 5"/>
+          <p:cNvSpPr txBox="1"/>
+          <p:nvPr/>
+        </p:nvSpPr>
+        <p:spPr>
+          <a:xfrm>
+            <a:off x="1466850" y="5543550"/>
+            <a:ext cx="2867025" cy="476250"/>
+          </a:xfrm>
+          <a:prstGeom prst="rect">
+            <a:avLst/>
+          </a:prstGeom>
+          <a:noFill/>
+        </p:spPr>
+        <p:txBody>
+          <a:bodyPr wrap="square" lIns="0" rIns="0" tIns="0" bIns="0">
+            <a:spAutoFit/>
+          </a:bodyPr>
+          <a:lstStyle/>
+          <a:p>
+            <a:pPr algn="l"/>
+            <a:r>
+              <a:rPr sz="3000" b="1">
+                <a:solidFill>
+                  <a:srgbClr val="0A3A99"/>
+                </a:solidFill>
+                <a:latin typeface="Aptos"/>
+              </a:rPr>
+              <a:t>REPOSITORY</a:t>
+            </a:r>
+          </a:p>
+        </p:txBody>
+      </p:sp>
+      <p:sp>
+        <p:nvSpPr>
+          <p:cNvPr id="7" name="TextBox 6"/>
+          <p:cNvSpPr txBox="1"/>
+          <p:nvPr/>
+        </p:nvSpPr>
+        <p:spPr>
+          <a:xfrm>
+            <a:off x="1466850" y="6191250"/>
+            <a:ext cx="2867025" cy="1285875"/>
+          </a:xfrm>
+          <a:prstGeom prst="rect">
+            <a:avLst/>
+          </a:prstGeom>
+          <a:noFill/>
+        </p:spPr>
+        <p:txBody>
+          <a:bodyPr wrap="square" lIns="0" rIns="0" tIns="0" bIns="0">
+            <a:spAutoFit/>
+          </a:bodyPr>
+          <a:lstStyle/>
+          <a:p>
+            <a:pPr algn="l">
+              <a:lnSpc>
+                <a:spcPct val="125000"/>
+              </a:lnSpc>
+            </a:pPr>
+            <a:r>
+              <a:rPr sz="2200">
+                <a:solidFill>
+                  <a:srgbClr val="333333"/>
+                </a:solidFill>
+                <a:latin typeface="Aptos"/>
+              </a:rPr>
+              <a:t>Where component versions live.</a:t>
+            </a:r>
+          </a:p>
+        </p:txBody>
+      </p:sp>
+      <p:sp>
+        <p:nvSpPr>
+          <p:cNvPr id="8" name="Rectangle 7"/>
           <p:cNvSpPr/>
           <p:nvPr/>
         </p:nvSpPr>
         <p:spPr>
           <a:xfrm>
-            <a:off x="5000625" y="5334000"/>
-            <a:ext cx="3905250" cy="2095500"/>
-          </a:xfrm>
-          <a:prstGeom prst="roundRect">
-            <a:avLst/>
-          </a:prstGeom>
-          <a:solidFill>
-            <a:srgbClr val="F3F4F6"/>
-          </a:solidFill>
-          <a:ln w="19050">
-            <a:solidFill>
-              <a:srgbClr val="0F6BFF"/>
-            </a:solidFill>
-          </a:ln>
-        </p:spPr>
-        <p:style>
-          <a:lnRef idx="1">
-            <a:schemeClr val="accent1"/>
-          </a:lnRef>
-          <a:fillRef idx="3">
-            <a:schemeClr val="accent1"/>
-          </a:fillRef>
-          <a:effectRef idx="2">
-            <a:schemeClr val="accent1"/>
-          </a:effectRef>
-          <a:fontRef idx="minor">
-            <a:schemeClr val="lt1"/>
-          </a:fontRef>
-        </p:style>
-        <p:txBody>
-          <a:bodyPr rtlCol="0" anchor="ctr" lIns="180000" rIns="180000" tIns="180000" bIns="180000" wrap="square"/>
-          <a:lstStyle/>
-          <a:p>
-            <a:pPr algn="ctr"/>
-            <a:r>
-              <a:rPr sz="2800" b="1">
-                <a:solidFill>
-                  <a:srgbClr val="0F6BFF"/>
-                </a:solidFill>
-                <a:latin typeface="Aptos"/>
-              </a:rPr>
-              <a:t>Component</a:t>
-            </a:r>
-          </a:p>
-          <a:p>
-            <a:pPr algn="ctr">
-              <a:spcBef>
-                <a:spcPts val="800"/>
-              </a:spcBef>
-            </a:pPr>
-            <a:r>
-              <a:rPr sz="2200">
-                <a:solidFill>
-                  <a:srgbClr val="000000"/>
-                </a:solidFill>
-                <a:latin typeface="Aptos"/>
-              </a:rPr>
-              <a:t>Pulls one version. Verifies its signature.</a:t>
-            </a:r>
-          </a:p>
-        </p:txBody>
-      </p:sp>
-      <p:sp>
-        <p:nvSpPr>
-          <p:cNvPr id="7" name="Right Arrow 6"/>
-          <p:cNvSpPr/>
-          <p:nvPr/>
-        </p:nvSpPr>
-        <p:spPr>
-          <a:xfrm>
-            <a:off x="8963025" y="6305550"/>
-            <a:ext cx="361950" cy="171450"/>
-          </a:xfrm>
-          <a:prstGeom prst="rightArrow">
+            <a:off x="4714875" y="6392227"/>
+            <a:ext cx="390525" cy="17145"/>
+          </a:xfrm>
+          <a:prstGeom prst="rect">
             <a:avLst/>
           </a:prstGeom>
           <a:solidFill>
@@ -6592,88 +6658,36 @@
       </p:sp>
       <p:sp>
         <p:nvSpPr>
-          <p:cNvPr id="8" name="Rounded Rectangle 7"/>
+          <p:cNvPr id="9" name="Freeform 8"/>
           <p:cNvSpPr/>
           <p:nvPr/>
         </p:nvSpPr>
         <p:spPr>
           <a:xfrm>
-            <a:off x="9382125" y="5334000"/>
-            <a:ext cx="3905250" cy="2095500"/>
-          </a:xfrm>
-          <a:prstGeom prst="roundRect">
-            <a:avLst/>
-          </a:prstGeom>
-          <a:solidFill>
-            <a:srgbClr val="F3F4F6"/>
-          </a:solidFill>
-          <a:ln w="19050">
-            <a:solidFill>
-              <a:srgbClr val="0F6BFF"/>
-            </a:solidFill>
-          </a:ln>
-        </p:spPr>
-        <p:style>
-          <a:lnRef idx="1">
-            <a:schemeClr val="accent1"/>
-          </a:lnRef>
-          <a:fillRef idx="3">
-            <a:schemeClr val="accent1"/>
-          </a:fillRef>
-          <a:effectRef idx="2">
-            <a:schemeClr val="accent1"/>
-          </a:effectRef>
-          <a:fontRef idx="minor">
-            <a:schemeClr val="lt1"/>
-          </a:fontRef>
-        </p:style>
-        <p:txBody>
-          <a:bodyPr rtlCol="0" anchor="ctr" lIns="180000" rIns="180000" tIns="180000" bIns="180000" wrap="square"/>
-          <a:lstStyle/>
-          <a:p>
-            <a:pPr algn="ctr"/>
-            <a:r>
-              <a:rPr sz="2800" b="1">
-                <a:solidFill>
-                  <a:srgbClr val="0F6BFF"/>
-                </a:solidFill>
-                <a:latin typeface="Aptos"/>
-              </a:rPr>
-              <a:t>Resource</a:t>
-            </a:r>
-          </a:p>
-          <a:p>
-            <a:pPr algn="ctr">
-              <a:spcBef>
-                <a:spcPts val="800"/>
-              </a:spcBef>
-            </a:pPr>
-            <a:r>
-              <a:rPr sz="2200">
-                <a:solidFill>
-                  <a:srgbClr val="000000"/>
-                </a:solidFill>
-                <a:latin typeface="Aptos"/>
-              </a:rPr>
-              <a:t>One artifact, by digest.</a:t>
-            </a:r>
-          </a:p>
-        </p:txBody>
-      </p:sp>
-      <p:sp>
-        <p:nvSpPr>
-          <p:cNvPr id="9" name="Right Arrow 8"/>
-          <p:cNvSpPr/>
-          <p:nvPr/>
-        </p:nvSpPr>
-        <p:spPr>
-          <a:xfrm>
-            <a:off x="13344525" y="6305550"/>
-            <a:ext cx="361950" cy="171450"/>
-          </a:xfrm>
-          <a:prstGeom prst="rightArrow">
-            <a:avLst/>
-          </a:prstGeom>
+            <a:off x="5095875" y="6334125"/>
+            <a:ext cx="152400" cy="133350"/>
+          </a:xfrm>
+          <a:custGeom>
+            <a:avLst/>
+            <a:gdLst/>
+            <a:ahLst/>
+            <a:cxnLst/>
+            <a:rect l="l" t="t" r="r" b="b"/>
+            <a:pathLst>
+              <a:path w="152400" h="133350">
+                <a:moveTo>
+                  <a:pt x="0" y="66675"/>
+                </a:moveTo>
+                <a:lnTo>
+                  <a:pt x="152400" y="0"/>
+                </a:lnTo>
+                <a:lnTo>
+                  <a:pt x="152400" y="133350"/>
+                </a:lnTo>
+                <a:close/>
+              </a:path>
+            </a:pathLst>
+          </a:custGeom>
           <a:solidFill>
             <a:srgbClr val="0F6BFF"/>
           </a:solidFill>
@@ -6711,20 +6725,27 @@
         </p:nvSpPr>
         <p:spPr>
           <a:xfrm>
-            <a:off x="13763625" y="5334000"/>
-            <a:ext cx="3905250" cy="2095500"/>
+            <a:off x="5343525" y="5143500"/>
+            <a:ext cx="3438525" cy="2524125"/>
           </a:xfrm>
           <a:prstGeom prst="roundRect">
-            <a:avLst/>
+            <a:avLst>
+              <a:gd name="adj" fmla="val 5283"/>
+            </a:avLst>
           </a:prstGeom>
           <a:solidFill>
             <a:srgbClr val="F3F4F6"/>
           </a:solidFill>
-          <a:ln w="19050">
-            <a:solidFill>
-              <a:srgbClr val="0F6BFF"/>
-            </a:solidFill>
+          <a:ln>
+            <a:noFill/>
           </a:ln>
+          <a:effectLst>
+            <a:outerShdw blurRad="28575" dist="28575" dir="5400000" rotWithShape="0">
+              <a:srgbClr val="000000">
+                <a:alpha val="30000"/>
+              </a:srgbClr>
+            </a:outerShdw>
+          </a:effectLst>
         </p:spPr>
         <p:style>
           <a:lnRef idx="1">
@@ -6741,50 +6762,688 @@
           </a:fontRef>
         </p:style>
         <p:txBody>
-          <a:bodyPr rtlCol="0" anchor="ctr" lIns="180000" rIns="180000" tIns="180000" bIns="180000" wrap="square"/>
+          <a:bodyPr rtlCol="0" anchor="ctr"/>
           <a:lstStyle/>
           <a:p>
             <a:pPr algn="ctr"/>
-            <a:r>
-              <a:rPr sz="2800" b="1">
-                <a:solidFill>
-                  <a:srgbClr val="0F6BFF"/>
+          </a:p>
+        </p:txBody>
+      </p:sp>
+      <p:sp>
+        <p:nvSpPr>
+          <p:cNvPr id="11" name="Rectangle 10"/>
+          <p:cNvSpPr/>
+          <p:nvPr/>
+        </p:nvSpPr>
+        <p:spPr>
+          <a:xfrm>
+            <a:off x="5343525" y="5143500"/>
+            <a:ext cx="3438525" cy="47625"/>
+          </a:xfrm>
+          <a:prstGeom prst="rect">
+            <a:avLst/>
+          </a:prstGeom>
+          <a:solidFill>
+            <a:srgbClr val="0F6BFF"/>
+          </a:solidFill>
+          <a:ln>
+            <a:noFill/>
+          </a:ln>
+        </p:spPr>
+        <p:style>
+          <a:lnRef idx="1">
+            <a:schemeClr val="accent1"/>
+          </a:lnRef>
+          <a:fillRef idx="3">
+            <a:schemeClr val="accent1"/>
+          </a:fillRef>
+          <a:effectRef idx="2">
+            <a:schemeClr val="accent1"/>
+          </a:effectRef>
+          <a:fontRef idx="minor">
+            <a:schemeClr val="lt1"/>
+          </a:fontRef>
+        </p:style>
+        <p:txBody>
+          <a:bodyPr rtlCol="0" anchor="ctr"/>
+          <a:lstStyle/>
+          <a:p>
+            <a:pPr algn="ctr"/>
+          </a:p>
+        </p:txBody>
+      </p:sp>
+      <p:sp>
+        <p:nvSpPr>
+          <p:cNvPr id="12" name="TextBox 11"/>
+          <p:cNvSpPr txBox="1"/>
+          <p:nvPr/>
+        </p:nvSpPr>
+        <p:spPr>
+          <a:xfrm>
+            <a:off x="5629275" y="5543550"/>
+            <a:ext cx="2867025" cy="476250"/>
+          </a:xfrm>
+          <a:prstGeom prst="rect">
+            <a:avLst/>
+          </a:prstGeom>
+          <a:noFill/>
+        </p:spPr>
+        <p:txBody>
+          <a:bodyPr wrap="square" lIns="0" rIns="0" tIns="0" bIns="0">
+            <a:spAutoFit/>
+          </a:bodyPr>
+          <a:lstStyle/>
+          <a:p>
+            <a:pPr algn="l"/>
+            <a:r>
+              <a:rPr sz="3000" b="1">
+                <a:solidFill>
+                  <a:srgbClr val="0A3A99"/>
                 </a:solidFill>
                 <a:latin typeface="Aptos"/>
               </a:rPr>
-              <a:t>Deployer</a:t>
-            </a:r>
-          </a:p>
-          <a:p>
-            <a:pPr algn="ctr">
-              <a:spcBef>
-                <a:spcPts val="800"/>
-              </a:spcBef>
+              <a:t>COMPONENT</a:t>
+            </a:r>
+          </a:p>
+        </p:txBody>
+      </p:sp>
+      <p:sp>
+        <p:nvSpPr>
+          <p:cNvPr id="13" name="TextBox 12"/>
+          <p:cNvSpPr txBox="1"/>
+          <p:nvPr/>
+        </p:nvSpPr>
+        <p:spPr>
+          <a:xfrm>
+            <a:off x="5629275" y="6191250"/>
+            <a:ext cx="2867025" cy="1285875"/>
+          </a:xfrm>
+          <a:prstGeom prst="rect">
+            <a:avLst/>
+          </a:prstGeom>
+          <a:noFill/>
+        </p:spPr>
+        <p:txBody>
+          <a:bodyPr wrap="square" lIns="0" rIns="0" tIns="0" bIns="0">
+            <a:spAutoFit/>
+          </a:bodyPr>
+          <a:lstStyle/>
+          <a:p>
+            <a:pPr algn="l">
+              <a:lnSpc>
+                <a:spcPct val="125000"/>
+              </a:lnSpc>
             </a:pPr>
             <a:r>
               <a:rPr sz="2200">
                 <a:solidFill>
-                  <a:srgbClr val="000000"/>
+                  <a:srgbClr val="333333"/>
                 </a:solidFill>
                 <a:latin typeface="Aptos"/>
               </a:rPr>
-              <a:t>Applies it. Resolves image refs from</a:t>
-            </a:r>
-          </a:p>
-          <a:p>
-            <a:pPr algn="ctr">
-              <a:spcBef>
-                <a:spcPts val="200"/>
-              </a:spcBef>
+              <a:t>Pulls one version.</a:t>
+            </a:r>
+          </a:p>
+          <a:p>
+            <a:pPr algn="l">
+              <a:lnSpc>
+                <a:spcPct val="125000"/>
+              </a:lnSpc>
             </a:pPr>
             <a:r>
+              <a:rPr sz="2200" b="1">
+                <a:solidFill>
+                  <a:srgbClr val="333333"/>
+                </a:solidFill>
+                <a:latin typeface="Aptos"/>
+              </a:rPr>
+              <a:t>Verifies its signature.</a:t>
+            </a:r>
+          </a:p>
+        </p:txBody>
+      </p:sp>
+      <p:sp>
+        <p:nvSpPr>
+          <p:cNvPr id="14" name="Rectangle 13"/>
+          <p:cNvSpPr/>
+          <p:nvPr/>
+        </p:nvSpPr>
+        <p:spPr>
+          <a:xfrm>
+            <a:off x="8877300" y="6392227"/>
+            <a:ext cx="390525" cy="17145"/>
+          </a:xfrm>
+          <a:prstGeom prst="rect">
+            <a:avLst/>
+          </a:prstGeom>
+          <a:solidFill>
+            <a:srgbClr val="0F6BFF"/>
+          </a:solidFill>
+          <a:ln>
+            <a:noFill/>
+          </a:ln>
+        </p:spPr>
+        <p:style>
+          <a:lnRef idx="1">
+            <a:schemeClr val="accent1"/>
+          </a:lnRef>
+          <a:fillRef idx="3">
+            <a:schemeClr val="accent1"/>
+          </a:fillRef>
+          <a:effectRef idx="2">
+            <a:schemeClr val="accent1"/>
+          </a:effectRef>
+          <a:fontRef idx="minor">
+            <a:schemeClr val="lt1"/>
+          </a:fontRef>
+        </p:style>
+        <p:txBody>
+          <a:bodyPr rtlCol="0" anchor="ctr"/>
+          <a:lstStyle/>
+          <a:p>
+            <a:pPr algn="ctr"/>
+          </a:p>
+        </p:txBody>
+      </p:sp>
+      <p:sp>
+        <p:nvSpPr>
+          <p:cNvPr id="15" name="Freeform 14"/>
+          <p:cNvSpPr/>
+          <p:nvPr/>
+        </p:nvSpPr>
+        <p:spPr>
+          <a:xfrm>
+            <a:off x="9258300" y="6334125"/>
+            <a:ext cx="152400" cy="133350"/>
+          </a:xfrm>
+          <a:custGeom>
+            <a:avLst/>
+            <a:gdLst/>
+            <a:ahLst/>
+            <a:cxnLst/>
+            <a:rect l="l" t="t" r="r" b="b"/>
+            <a:pathLst>
+              <a:path w="152400" h="133350">
+                <a:moveTo>
+                  <a:pt x="0" y="66675"/>
+                </a:moveTo>
+                <a:lnTo>
+                  <a:pt x="152400" y="0"/>
+                </a:lnTo>
+                <a:lnTo>
+                  <a:pt x="152400" y="133350"/>
+                </a:lnTo>
+                <a:close/>
+              </a:path>
+            </a:pathLst>
+          </a:custGeom>
+          <a:solidFill>
+            <a:srgbClr val="0F6BFF"/>
+          </a:solidFill>
+          <a:ln>
+            <a:noFill/>
+          </a:ln>
+        </p:spPr>
+        <p:style>
+          <a:lnRef idx="1">
+            <a:schemeClr val="accent1"/>
+          </a:lnRef>
+          <a:fillRef idx="3">
+            <a:schemeClr val="accent1"/>
+          </a:fillRef>
+          <a:effectRef idx="2">
+            <a:schemeClr val="accent1"/>
+          </a:effectRef>
+          <a:fontRef idx="minor">
+            <a:schemeClr val="lt1"/>
+          </a:fontRef>
+        </p:style>
+        <p:txBody>
+          <a:bodyPr rtlCol="0" anchor="ctr"/>
+          <a:lstStyle/>
+          <a:p>
+            <a:pPr algn="ctr"/>
+          </a:p>
+        </p:txBody>
+      </p:sp>
+      <p:sp>
+        <p:nvSpPr>
+          <p:cNvPr id="16" name="Rounded Rectangle 15"/>
+          <p:cNvSpPr/>
+          <p:nvPr/>
+        </p:nvSpPr>
+        <p:spPr>
+          <a:xfrm>
+            <a:off x="9505950" y="5143500"/>
+            <a:ext cx="3438525" cy="2524125"/>
+          </a:xfrm>
+          <a:prstGeom prst="roundRect">
+            <a:avLst>
+              <a:gd name="adj" fmla="val 5283"/>
+            </a:avLst>
+          </a:prstGeom>
+          <a:solidFill>
+            <a:srgbClr val="F3F4F6"/>
+          </a:solidFill>
+          <a:ln>
+            <a:noFill/>
+          </a:ln>
+          <a:effectLst>
+            <a:outerShdw blurRad="28575" dist="28575" dir="5400000" rotWithShape="0">
+              <a:srgbClr val="000000">
+                <a:alpha val="30000"/>
+              </a:srgbClr>
+            </a:outerShdw>
+          </a:effectLst>
+        </p:spPr>
+        <p:style>
+          <a:lnRef idx="1">
+            <a:schemeClr val="accent1"/>
+          </a:lnRef>
+          <a:fillRef idx="3">
+            <a:schemeClr val="accent1"/>
+          </a:fillRef>
+          <a:effectRef idx="2">
+            <a:schemeClr val="accent1"/>
+          </a:effectRef>
+          <a:fontRef idx="minor">
+            <a:schemeClr val="lt1"/>
+          </a:fontRef>
+        </p:style>
+        <p:txBody>
+          <a:bodyPr rtlCol="0" anchor="ctr"/>
+          <a:lstStyle/>
+          <a:p>
+            <a:pPr algn="ctr"/>
+          </a:p>
+        </p:txBody>
+      </p:sp>
+      <p:sp>
+        <p:nvSpPr>
+          <p:cNvPr id="17" name="Rectangle 16"/>
+          <p:cNvSpPr/>
+          <p:nvPr/>
+        </p:nvSpPr>
+        <p:spPr>
+          <a:xfrm>
+            <a:off x="9505950" y="5143500"/>
+            <a:ext cx="3438525" cy="47625"/>
+          </a:xfrm>
+          <a:prstGeom prst="rect">
+            <a:avLst/>
+          </a:prstGeom>
+          <a:solidFill>
+            <a:srgbClr val="0F6BFF"/>
+          </a:solidFill>
+          <a:ln>
+            <a:noFill/>
+          </a:ln>
+        </p:spPr>
+        <p:style>
+          <a:lnRef idx="1">
+            <a:schemeClr val="accent1"/>
+          </a:lnRef>
+          <a:fillRef idx="3">
+            <a:schemeClr val="accent1"/>
+          </a:fillRef>
+          <a:effectRef idx="2">
+            <a:schemeClr val="accent1"/>
+          </a:effectRef>
+          <a:fontRef idx="minor">
+            <a:schemeClr val="lt1"/>
+          </a:fontRef>
+        </p:style>
+        <p:txBody>
+          <a:bodyPr rtlCol="0" anchor="ctr"/>
+          <a:lstStyle/>
+          <a:p>
+            <a:pPr algn="ctr"/>
+          </a:p>
+        </p:txBody>
+      </p:sp>
+      <p:sp>
+        <p:nvSpPr>
+          <p:cNvPr id="18" name="TextBox 17"/>
+          <p:cNvSpPr txBox="1"/>
+          <p:nvPr/>
+        </p:nvSpPr>
+        <p:spPr>
+          <a:xfrm>
+            <a:off x="9791700" y="5543550"/>
+            <a:ext cx="2867025" cy="476250"/>
+          </a:xfrm>
+          <a:prstGeom prst="rect">
+            <a:avLst/>
+          </a:prstGeom>
+          <a:noFill/>
+        </p:spPr>
+        <p:txBody>
+          <a:bodyPr wrap="square" lIns="0" rIns="0" tIns="0" bIns="0">
+            <a:spAutoFit/>
+          </a:bodyPr>
+          <a:lstStyle/>
+          <a:p>
+            <a:pPr algn="l"/>
+            <a:r>
+              <a:rPr sz="3000" b="1">
+                <a:solidFill>
+                  <a:srgbClr val="0A3A99"/>
+                </a:solidFill>
+                <a:latin typeface="Aptos"/>
+              </a:rPr>
+              <a:t>RESOURCE</a:t>
+            </a:r>
+          </a:p>
+        </p:txBody>
+      </p:sp>
+      <p:sp>
+        <p:nvSpPr>
+          <p:cNvPr id="19" name="TextBox 18"/>
+          <p:cNvSpPr txBox="1"/>
+          <p:nvPr/>
+        </p:nvSpPr>
+        <p:spPr>
+          <a:xfrm>
+            <a:off x="9791700" y="6191250"/>
+            <a:ext cx="2867025" cy="1285875"/>
+          </a:xfrm>
+          <a:prstGeom prst="rect">
+            <a:avLst/>
+          </a:prstGeom>
+          <a:noFill/>
+        </p:spPr>
+        <p:txBody>
+          <a:bodyPr wrap="square" lIns="0" rIns="0" tIns="0" bIns="0">
+            <a:spAutoFit/>
+          </a:bodyPr>
+          <a:lstStyle/>
+          <a:p>
+            <a:pPr algn="l">
+              <a:lnSpc>
+                <a:spcPct val="125000"/>
+              </a:lnSpc>
+            </a:pPr>
+            <a:r>
               <a:rPr sz="2200">
                 <a:solidFill>
-                  <a:srgbClr val="000000"/>
+                  <a:srgbClr val="333333"/>
                 </a:solidFill>
                 <a:latin typeface="Aptos"/>
               </a:rPr>
-              <a:t>the verified descriptor.</a:t>
+              <a:t>One artifact, by digest.</a:t>
+            </a:r>
+          </a:p>
+        </p:txBody>
+      </p:sp>
+      <p:sp>
+        <p:nvSpPr>
+          <p:cNvPr id="20" name="Rectangle 19"/>
+          <p:cNvSpPr/>
+          <p:nvPr/>
+        </p:nvSpPr>
+        <p:spPr>
+          <a:xfrm>
+            <a:off x="13039725" y="6392227"/>
+            <a:ext cx="390525" cy="17145"/>
+          </a:xfrm>
+          <a:prstGeom prst="rect">
+            <a:avLst/>
+          </a:prstGeom>
+          <a:solidFill>
+            <a:srgbClr val="0F6BFF"/>
+          </a:solidFill>
+          <a:ln>
+            <a:noFill/>
+          </a:ln>
+        </p:spPr>
+        <p:style>
+          <a:lnRef idx="1">
+            <a:schemeClr val="accent1"/>
+          </a:lnRef>
+          <a:fillRef idx="3">
+            <a:schemeClr val="accent1"/>
+          </a:fillRef>
+          <a:effectRef idx="2">
+            <a:schemeClr val="accent1"/>
+          </a:effectRef>
+          <a:fontRef idx="minor">
+            <a:schemeClr val="lt1"/>
+          </a:fontRef>
+        </p:style>
+        <p:txBody>
+          <a:bodyPr rtlCol="0" anchor="ctr"/>
+          <a:lstStyle/>
+          <a:p>
+            <a:pPr algn="ctr"/>
+          </a:p>
+        </p:txBody>
+      </p:sp>
+      <p:sp>
+        <p:nvSpPr>
+          <p:cNvPr id="21" name="Freeform 20"/>
+          <p:cNvSpPr/>
+          <p:nvPr/>
+        </p:nvSpPr>
+        <p:spPr>
+          <a:xfrm>
+            <a:off x="13420725" y="6334125"/>
+            <a:ext cx="152400" cy="133350"/>
+          </a:xfrm>
+          <a:custGeom>
+            <a:avLst/>
+            <a:gdLst/>
+            <a:ahLst/>
+            <a:cxnLst/>
+            <a:rect l="l" t="t" r="r" b="b"/>
+            <a:pathLst>
+              <a:path w="152400" h="133350">
+                <a:moveTo>
+                  <a:pt x="0" y="66675"/>
+                </a:moveTo>
+                <a:lnTo>
+                  <a:pt x="152400" y="0"/>
+                </a:lnTo>
+                <a:lnTo>
+                  <a:pt x="152400" y="133350"/>
+                </a:lnTo>
+                <a:close/>
+              </a:path>
+            </a:pathLst>
+          </a:custGeom>
+          <a:solidFill>
+            <a:srgbClr val="0F6BFF"/>
+          </a:solidFill>
+          <a:ln>
+            <a:noFill/>
+          </a:ln>
+        </p:spPr>
+        <p:style>
+          <a:lnRef idx="1">
+            <a:schemeClr val="accent1"/>
+          </a:lnRef>
+          <a:fillRef idx="3">
+            <a:schemeClr val="accent1"/>
+          </a:fillRef>
+          <a:effectRef idx="2">
+            <a:schemeClr val="accent1"/>
+          </a:effectRef>
+          <a:fontRef idx="minor">
+            <a:schemeClr val="lt1"/>
+          </a:fontRef>
+        </p:style>
+        <p:txBody>
+          <a:bodyPr rtlCol="0" anchor="ctr"/>
+          <a:lstStyle/>
+          <a:p>
+            <a:pPr algn="ctr"/>
+          </a:p>
+        </p:txBody>
+      </p:sp>
+      <p:sp>
+        <p:nvSpPr>
+          <p:cNvPr id="22" name="Rounded Rectangle 21"/>
+          <p:cNvSpPr/>
+          <p:nvPr/>
+        </p:nvSpPr>
+        <p:spPr>
+          <a:xfrm>
+            <a:off x="13668375" y="5143500"/>
+            <a:ext cx="3438525" cy="2524125"/>
+          </a:xfrm>
+          <a:prstGeom prst="roundRect">
+            <a:avLst>
+              <a:gd name="adj" fmla="val 5283"/>
+            </a:avLst>
+          </a:prstGeom>
+          <a:solidFill>
+            <a:srgbClr val="F3F4F6"/>
+          </a:solidFill>
+          <a:ln>
+            <a:noFill/>
+          </a:ln>
+          <a:effectLst>
+            <a:outerShdw blurRad="28575" dist="28575" dir="5400000" rotWithShape="0">
+              <a:srgbClr val="000000">
+                <a:alpha val="30000"/>
+              </a:srgbClr>
+            </a:outerShdw>
+          </a:effectLst>
+        </p:spPr>
+        <p:style>
+          <a:lnRef idx="1">
+            <a:schemeClr val="accent1"/>
+          </a:lnRef>
+          <a:fillRef idx="3">
+            <a:schemeClr val="accent1"/>
+          </a:fillRef>
+          <a:effectRef idx="2">
+            <a:schemeClr val="accent1"/>
+          </a:effectRef>
+          <a:fontRef idx="minor">
+            <a:schemeClr val="lt1"/>
+          </a:fontRef>
+        </p:style>
+        <p:txBody>
+          <a:bodyPr rtlCol="0" anchor="ctr"/>
+          <a:lstStyle/>
+          <a:p>
+            <a:pPr algn="ctr"/>
+          </a:p>
+        </p:txBody>
+      </p:sp>
+      <p:sp>
+        <p:nvSpPr>
+          <p:cNvPr id="23" name="Rectangle 22"/>
+          <p:cNvSpPr/>
+          <p:nvPr/>
+        </p:nvSpPr>
+        <p:spPr>
+          <a:xfrm>
+            <a:off x="13668375" y="5143500"/>
+            <a:ext cx="3438525" cy="47625"/>
+          </a:xfrm>
+          <a:prstGeom prst="rect">
+            <a:avLst/>
+          </a:prstGeom>
+          <a:solidFill>
+            <a:srgbClr val="0F6BFF"/>
+          </a:solidFill>
+          <a:ln>
+            <a:noFill/>
+          </a:ln>
+        </p:spPr>
+        <p:style>
+          <a:lnRef idx="1">
+            <a:schemeClr val="accent1"/>
+          </a:lnRef>
+          <a:fillRef idx="3">
+            <a:schemeClr val="accent1"/>
+          </a:fillRef>
+          <a:effectRef idx="2">
+            <a:schemeClr val="accent1"/>
+          </a:effectRef>
+          <a:fontRef idx="minor">
+            <a:schemeClr val="lt1"/>
+          </a:fontRef>
+        </p:style>
+        <p:txBody>
+          <a:bodyPr rtlCol="0" anchor="ctr"/>
+          <a:lstStyle/>
+          <a:p>
+            <a:pPr algn="ctr"/>
+          </a:p>
+        </p:txBody>
+      </p:sp>
+      <p:sp>
+        <p:nvSpPr>
+          <p:cNvPr id="24" name="TextBox 23"/>
+          <p:cNvSpPr txBox="1"/>
+          <p:nvPr/>
+        </p:nvSpPr>
+        <p:spPr>
+          <a:xfrm>
+            <a:off x="13954125" y="5543550"/>
+            <a:ext cx="2867025" cy="476250"/>
+          </a:xfrm>
+          <a:prstGeom prst="rect">
+            <a:avLst/>
+          </a:prstGeom>
+          <a:noFill/>
+        </p:spPr>
+        <p:txBody>
+          <a:bodyPr wrap="square" lIns="0" rIns="0" tIns="0" bIns="0">
+            <a:spAutoFit/>
+          </a:bodyPr>
+          <a:lstStyle/>
+          <a:p>
+            <a:pPr algn="l"/>
+            <a:r>
+              <a:rPr sz="3000" b="1">
+                <a:solidFill>
+                  <a:srgbClr val="0A3A99"/>
+                </a:solidFill>
+                <a:latin typeface="Aptos"/>
+              </a:rPr>
+              <a:t>DEPLOYER</a:t>
+            </a:r>
+          </a:p>
+        </p:txBody>
+      </p:sp>
+      <p:sp>
+        <p:nvSpPr>
+          <p:cNvPr id="25" name="TextBox 24"/>
+          <p:cNvSpPr txBox="1"/>
+          <p:nvPr/>
+        </p:nvSpPr>
+        <p:spPr>
+          <a:xfrm>
+            <a:off x="13954125" y="6191250"/>
+            <a:ext cx="2867025" cy="1285875"/>
+          </a:xfrm>
+          <a:prstGeom prst="rect">
+            <a:avLst/>
+          </a:prstGeom>
+          <a:noFill/>
+        </p:spPr>
+        <p:txBody>
+          <a:bodyPr wrap="square" lIns="0" rIns="0" tIns="0" bIns="0">
+            <a:spAutoFit/>
+          </a:bodyPr>
+          <a:lstStyle/>
+          <a:p>
+            <a:pPr algn="l">
+              <a:lnSpc>
+                <a:spcPct val="125000"/>
+              </a:lnSpc>
+            </a:pPr>
+            <a:r>
+              <a:rPr sz="2200">
+                <a:solidFill>
+                  <a:srgbClr val="333333"/>
+                </a:solidFill>
+                <a:latin typeface="Aptos"/>
+              </a:rPr>
+              <a:t>Applies it to the cluster.</a:t>
             </a:r>
           </a:p>
         </p:txBody>
@@ -6862,8 +7521,8 @@
         </p:nvSpPr>
         <p:spPr>
           <a:xfrm>
-            <a:off x="1333500" y="3619500"/>
-            <a:ext cx="7048500" cy="5334000"/>
+            <a:off x="1333500" y="3524250"/>
+            <a:ext cx="7048500" cy="5715000"/>
           </a:xfrm>
           <a:prstGeom prst="roundRect">
             <a:avLst/>
@@ -6907,7 +7566,7 @@
               </a:spcAft>
             </a:pPr>
             <a:r>
-              <a:rPr sz="2000">
+              <a:rPr sz="1700">
                 <a:solidFill>
                   <a:srgbClr val="0A3A99"/>
                 </a:solidFill>
@@ -6929,7 +7588,7 @@
               </a:spcAft>
             </a:pPr>
             <a:r>
-              <a:rPr sz="2000">
+              <a:rPr sz="1700">
                 <a:solidFill>
                   <a:srgbClr val="000000"/>
                 </a:solidFill>
@@ -6951,7 +7610,7 @@
               </a:spcAft>
             </a:pPr>
             <a:r>
-              <a:rPr sz="2000">
+              <a:rPr sz="1700">
                 <a:solidFill>
                   <a:srgbClr val="000000"/>
                 </a:solidFill>
@@ -6973,7 +7632,7 @@
               </a:spcAft>
             </a:pPr>
             <a:r>
-              <a:rPr sz="2000">
+              <a:rPr sz="1700">
                 <a:solidFill>
                   <a:srgbClr val="0A3A99"/>
                 </a:solidFill>
@@ -6995,7 +7654,7 @@
               </a:spcAft>
             </a:pPr>
             <a:r>
-              <a:rPr sz="2000">
+              <a:rPr sz="1700">
                 <a:solidFill>
                   <a:srgbClr val="000000"/>
                 </a:solidFill>
@@ -7017,7 +7676,7 @@
               </a:spcAft>
             </a:pPr>
             <a:r>
-              <a:rPr sz="2000">
+              <a:rPr sz="1700">
                 <a:solidFill>
                   <a:srgbClr val="000000"/>
                 </a:solidFill>
@@ -7039,7 +7698,7 @@
               </a:spcAft>
             </a:pPr>
             <a:r>
-              <a:rPr sz="2000">
+              <a:rPr sz="1700">
                 <a:solidFill>
                   <a:srgbClr val="000000"/>
                 </a:solidFill>
@@ -7061,13 +7720,13 @@
               </a:spcAft>
             </a:pPr>
             <a:r>
-              <a:rPr sz="2000">
-                <a:solidFill>
-                  <a:srgbClr val="000000"/>
+              <a:rPr sz="1700">
+                <a:solidFill>
+                  <a:srgbClr val="6B7280"/>
                 </a:solidFill>
                 <a:latin typeface="Consolas"/>
               </a:rPr>
-              <a:t>    - name: postgres</a:t>
+              <a:t>      digest:                                               # of the child descriptor</a:t>
             </a:r>
           </a:p>
           <a:p>
@@ -7083,13 +7742,13 @@
               </a:spcAft>
             </a:pPr>
             <a:r>
-              <a:rPr sz="2000">
+              <a:rPr sz="1700">
                 <a:solidFill>
                   <a:srgbClr val="000000"/>
                 </a:solidFill>
                 <a:latin typeface="Consolas"/>
               </a:rPr>
-              <a:t>      componentName: acme.org/sovereign/postgres</a:t>
+              <a:t>        hashAlgorithm: SHA-256</a:t>
             </a:r>
           </a:p>
           <a:p>
@@ -7105,13 +7764,13 @@
               </a:spcAft>
             </a:pPr>
             <a:r>
-              <a:rPr sz="2000">
+              <a:rPr sz="1700">
                 <a:solidFill>
                   <a:srgbClr val="000000"/>
                 </a:solidFill>
                 <a:latin typeface="Consolas"/>
               </a:rPr>
-              <a:t>      version: 1.0.0</a:t>
+              <a:t>        value: 7a1b2c3d4e...</a:t>
             </a:r>
           </a:p>
           <a:p>
@@ -7127,13 +7786,13 @@
               </a:spcAft>
             </a:pPr>
             <a:r>
-              <a:rPr sz="2000">
-                <a:solidFill>
-                  <a:srgbClr val="0A3A99"/>
+              <a:rPr sz="1700">
+                <a:solidFill>
+                  <a:srgbClr val="000000"/>
                 </a:solidFill>
                 <a:latin typeface="Consolas"/>
               </a:rPr>
-              <a:t>signatures:</a:t>
+              <a:t>    - name: postgres</a:t>
             </a:r>
           </a:p>
           <a:p>
@@ -7149,13 +7808,13 @@
               </a:spcAft>
             </a:pPr>
             <a:r>
-              <a:rPr sz="2000">
+              <a:rPr sz="1700">
                 <a:solidFill>
                   <a:srgbClr val="000000"/>
                 </a:solidFill>
                 <a:latin typeface="Consolas"/>
               </a:rPr>
-              <a:t>  - name: acme-release-key</a:t>
+              <a:t>      componentName: acme.org/sovereign/postgres</a:t>
             </a:r>
           </a:p>
           <a:p>
@@ -7171,13 +7830,13 @@
               </a:spcAft>
             </a:pPr>
             <a:r>
-              <a:rPr sz="2000">
-                <a:solidFill>
-                  <a:srgbClr val="0A3A99"/>
+              <a:rPr sz="1700">
+                <a:solidFill>
+                  <a:srgbClr val="000000"/>
                 </a:solidFill>
                 <a:latin typeface="Consolas"/>
               </a:rPr>
-              <a:t>    signature:</a:t>
+              <a:t>      version: 1.0.0</a:t>
             </a:r>
           </a:p>
           <a:p>
@@ -7193,13 +7852,13 @@
               </a:spcAft>
             </a:pPr>
             <a:r>
-              <a:rPr sz="2000">
-                <a:solidFill>
-                  <a:srgbClr val="000000"/>
+              <a:rPr sz="1700">
+                <a:solidFill>
+                  <a:srgbClr val="6B7280"/>
                 </a:solidFill>
                 <a:latin typeface="Consolas"/>
               </a:rPr>
-              <a:t>      algorithm: RSASSA-PSS</a:t>
+              <a:t>      digest:</a:t>
             </a:r>
           </a:p>
           <a:p>
@@ -7215,7 +7874,139 @@
               </a:spcAft>
             </a:pPr>
             <a:r>
-              <a:rPr sz="2000">
+              <a:rPr sz="1700">
+                <a:solidFill>
+                  <a:srgbClr val="000000"/>
+                </a:solidFill>
+                <a:latin typeface="Consolas"/>
+              </a:rPr>
+              <a:t>        hashAlgorithm: SHA-256</a:t>
+            </a:r>
+          </a:p>
+          <a:p>
+            <a:pPr algn="l">
+              <a:lnSpc>
+                <a:spcPct val="115000"/>
+              </a:lnSpc>
+              <a:spcBef>
+                <a:spcPts val="0"/>
+              </a:spcBef>
+              <a:spcAft>
+                <a:spcPts val="0"/>
+              </a:spcAft>
+            </a:pPr>
+            <a:r>
+              <a:rPr sz="1700">
+                <a:solidFill>
+                  <a:srgbClr val="000000"/>
+                </a:solidFill>
+                <a:latin typeface="Consolas"/>
+              </a:rPr>
+              <a:t>        value: f5e4d3c2b1...</a:t>
+            </a:r>
+          </a:p>
+          <a:p>
+            <a:pPr algn="l">
+              <a:lnSpc>
+                <a:spcPct val="115000"/>
+              </a:lnSpc>
+              <a:spcBef>
+                <a:spcPts val="0"/>
+              </a:spcBef>
+              <a:spcAft>
+                <a:spcPts val="0"/>
+              </a:spcAft>
+            </a:pPr>
+            <a:r>
+              <a:rPr sz="1700">
+                <a:solidFill>
+                  <a:srgbClr val="0A3A99"/>
+                </a:solidFill>
+                <a:latin typeface="Consolas"/>
+              </a:rPr>
+              <a:t>signatures:</a:t>
+            </a:r>
+          </a:p>
+          <a:p>
+            <a:pPr algn="l">
+              <a:lnSpc>
+                <a:spcPct val="115000"/>
+              </a:lnSpc>
+              <a:spcBef>
+                <a:spcPts val="0"/>
+              </a:spcBef>
+              <a:spcAft>
+                <a:spcPts val="0"/>
+              </a:spcAft>
+            </a:pPr>
+            <a:r>
+              <a:rPr sz="1700">
+                <a:solidFill>
+                  <a:srgbClr val="000000"/>
+                </a:solidFill>
+                <a:latin typeface="Consolas"/>
+              </a:rPr>
+              <a:t>  - name: acme-release-key</a:t>
+            </a:r>
+          </a:p>
+          <a:p>
+            <a:pPr algn="l">
+              <a:lnSpc>
+                <a:spcPct val="115000"/>
+              </a:lnSpc>
+              <a:spcBef>
+                <a:spcPts val="0"/>
+              </a:spcBef>
+              <a:spcAft>
+                <a:spcPts val="0"/>
+              </a:spcAft>
+            </a:pPr>
+            <a:r>
+              <a:rPr sz="1700">
+                <a:solidFill>
+                  <a:srgbClr val="0A3A99"/>
+                </a:solidFill>
+                <a:latin typeface="Consolas"/>
+              </a:rPr>
+              <a:t>    signature:</a:t>
+            </a:r>
+          </a:p>
+          <a:p>
+            <a:pPr algn="l">
+              <a:lnSpc>
+                <a:spcPct val="115000"/>
+              </a:lnSpc>
+              <a:spcBef>
+                <a:spcPts val="0"/>
+              </a:spcBef>
+              <a:spcAft>
+                <a:spcPts val="0"/>
+              </a:spcAft>
+            </a:pPr>
+            <a:r>
+              <a:rPr sz="1700">
+                <a:solidFill>
+                  <a:srgbClr val="000000"/>
+                </a:solidFill>
+                <a:latin typeface="Consolas"/>
+              </a:rPr>
+              <a:t>      algorithm: RSASSA-PSS</a:t>
+            </a:r>
+          </a:p>
+          <a:p>
+            <a:pPr algn="l">
+              <a:lnSpc>
+                <a:spcPct val="115000"/>
+              </a:lnSpc>
+              <a:spcBef>
+                <a:spcPts val="0"/>
+              </a:spcBef>
+              <a:spcAft>
+                <a:spcPts val="0"/>
+              </a:spcAft>
+            </a:pPr>
+            <a:r>
+              <a:rPr sz="1700">
                 <a:solidFill>
                   <a:srgbClr val="000000"/>
                 </a:solidFill>
@@ -7234,8 +8025,8 @@
         </p:nvSpPr>
         <p:spPr>
           <a:xfrm>
-            <a:off x="9906000" y="3619500"/>
-            <a:ext cx="7048500" cy="5334000"/>
+            <a:off x="9906000" y="3524250"/>
+            <a:ext cx="7048500" cy="5715000"/>
           </a:xfrm>
           <a:prstGeom prst="roundRect">
             <a:avLst/>
@@ -7279,7 +8070,7 @@
               </a:spcAft>
             </a:pPr>
             <a:r>
-              <a:rPr sz="2000">
+              <a:rPr sz="1700">
                 <a:solidFill>
                   <a:srgbClr val="0A3A99"/>
                 </a:solidFill>
@@ -7301,7 +8092,7 @@
               </a:spcAft>
             </a:pPr>
             <a:r>
-              <a:rPr sz="2000">
+              <a:rPr sz="1700">
                 <a:solidFill>
                   <a:srgbClr val="000000"/>
                 </a:solidFill>
@@ -7323,7 +8114,7 @@
               </a:spcAft>
             </a:pPr>
             <a:r>
-              <a:rPr sz="2000">
+              <a:rPr sz="1700">
                 <a:solidFill>
                   <a:srgbClr val="0F6BFF"/>
                 </a:solidFill>
@@ -7345,7 +8136,7 @@
               </a:spcAft>
             </a:pPr>
             <a:r>
-              <a:rPr sz="2000">
+              <a:rPr sz="1700">
                 <a:solidFill>
                   <a:srgbClr val="0A3A99"/>
                 </a:solidFill>
@@ -7367,7 +8158,7 @@
               </a:spcAft>
             </a:pPr>
             <a:r>
-              <a:rPr sz="2000">
+              <a:rPr sz="1700">
                 <a:solidFill>
                   <a:srgbClr val="000000"/>
                 </a:solidFill>
@@ -7389,7 +8180,7 @@
               </a:spcAft>
             </a:pPr>
             <a:r>
-              <a:rPr sz="2000">
+              <a:rPr sz="1700">
                 <a:solidFill>
                   <a:srgbClr val="000000"/>
                 </a:solidFill>
@@ -7411,7 +8202,7 @@
               </a:spcAft>
             </a:pPr>
             <a:r>
-              <a:rPr sz="2000">
+              <a:rPr sz="1700">
                 <a:solidFill>
                   <a:srgbClr val="0F6BFF"/>
                 </a:solidFill>
@@ -7433,13 +8224,13 @@
               </a:spcAft>
             </a:pPr>
             <a:r>
-              <a:rPr sz="2000">
-                <a:solidFill>
-                  <a:srgbClr val="000000"/>
+              <a:rPr sz="1700">
+                <a:solidFill>
+                  <a:srgbClr val="6B7280"/>
                 </a:solidFill>
                 <a:latin typeface="Consolas"/>
               </a:rPr>
-              <a:t>    - name: postgres</a:t>
+              <a:t>      digest:                                               # of the child descriptor</a:t>
             </a:r>
           </a:p>
           <a:p>
@@ -7455,13 +8246,13 @@
               </a:spcAft>
             </a:pPr>
             <a:r>
-              <a:rPr sz="2000">
+              <a:rPr sz="1700">
                 <a:solidFill>
                   <a:srgbClr val="000000"/>
                 </a:solidFill>
                 <a:latin typeface="Consolas"/>
               </a:rPr>
-              <a:t>      componentName: acme.org/sovereign/postgres</a:t>
+              <a:t>        hashAlgorithm: SHA-256</a:t>
             </a:r>
           </a:p>
           <a:p>
@@ -7477,13 +8268,13 @@
               </a:spcAft>
             </a:pPr>
             <a:r>
-              <a:rPr sz="2000">
-                <a:solidFill>
-                  <a:srgbClr val="000000"/>
+              <a:rPr sz="1700">
+                <a:solidFill>
+                  <a:srgbClr val="0F6BFF"/>
                 </a:solidFill>
                 <a:latin typeface="Consolas"/>
               </a:rPr>
-              <a:t>      version: 1.0.0</a:t>
+              <a:t>        value: 9b8a7c6d5e...</a:t>
             </a:r>
           </a:p>
           <a:p>
@@ -7499,13 +8290,13 @@
               </a:spcAft>
             </a:pPr>
             <a:r>
-              <a:rPr sz="2000">
-                <a:solidFill>
-                  <a:srgbClr val="0A3A99"/>
+              <a:rPr sz="1700">
+                <a:solidFill>
+                  <a:srgbClr val="000000"/>
                 </a:solidFill>
                 <a:latin typeface="Consolas"/>
               </a:rPr>
-              <a:t>signatures:</a:t>
+              <a:t>    - name: postgres</a:t>
             </a:r>
           </a:p>
           <a:p>
@@ -7521,13 +8312,13 @@
               </a:spcAft>
             </a:pPr>
             <a:r>
-              <a:rPr sz="2000">
+              <a:rPr sz="1700">
                 <a:solidFill>
                   <a:srgbClr val="000000"/>
                 </a:solidFill>
                 <a:latin typeface="Consolas"/>
               </a:rPr>
-              <a:t>  - name: acme-release-key</a:t>
+              <a:t>      componentName: acme.org/sovereign/postgres</a:t>
             </a:r>
           </a:p>
           <a:p>
@@ -7543,13 +8334,13 @@
               </a:spcAft>
             </a:pPr>
             <a:r>
-              <a:rPr sz="2000">
-                <a:solidFill>
-                  <a:srgbClr val="0A3A99"/>
+              <a:rPr sz="1700">
+                <a:solidFill>
+                  <a:srgbClr val="000000"/>
                 </a:solidFill>
                 <a:latin typeface="Consolas"/>
               </a:rPr>
-              <a:t>    signature:</a:t>
+              <a:t>      version: 1.0.0</a:t>
             </a:r>
           </a:p>
           <a:p>
@@ -7565,13 +8356,13 @@
               </a:spcAft>
             </a:pPr>
             <a:r>
-              <a:rPr sz="2000">
-                <a:solidFill>
-                  <a:srgbClr val="000000"/>
+              <a:rPr sz="1700">
+                <a:solidFill>
+                  <a:srgbClr val="6B7280"/>
                 </a:solidFill>
                 <a:latin typeface="Consolas"/>
               </a:rPr>
-              <a:t>      algorithm: RSASSA-PSS</a:t>
+              <a:t>      digest:</a:t>
             </a:r>
           </a:p>
           <a:p>
@@ -7587,7 +8378,139 @@
               </a:spcAft>
             </a:pPr>
             <a:r>
-              <a:rPr sz="2000">
+              <a:rPr sz="1700">
+                <a:solidFill>
+                  <a:srgbClr val="000000"/>
+                </a:solidFill>
+                <a:latin typeface="Consolas"/>
+              </a:rPr>
+              <a:t>        hashAlgorithm: SHA-256</a:t>
+            </a:r>
+          </a:p>
+          <a:p>
+            <a:pPr algn="l">
+              <a:lnSpc>
+                <a:spcPct val="115000"/>
+              </a:lnSpc>
+              <a:spcBef>
+                <a:spcPts val="0"/>
+              </a:spcBef>
+              <a:spcAft>
+                <a:spcPts val="0"/>
+              </a:spcAft>
+            </a:pPr>
+            <a:r>
+              <a:rPr sz="1700">
+                <a:solidFill>
+                  <a:srgbClr val="000000"/>
+                </a:solidFill>
+                <a:latin typeface="Consolas"/>
+              </a:rPr>
+              <a:t>        value: f5e4d3c2b1...</a:t>
+            </a:r>
+          </a:p>
+          <a:p>
+            <a:pPr algn="l">
+              <a:lnSpc>
+                <a:spcPct val="115000"/>
+              </a:lnSpc>
+              <a:spcBef>
+                <a:spcPts val="0"/>
+              </a:spcBef>
+              <a:spcAft>
+                <a:spcPts val="0"/>
+              </a:spcAft>
+            </a:pPr>
+            <a:r>
+              <a:rPr sz="1700">
+                <a:solidFill>
+                  <a:srgbClr val="0A3A99"/>
+                </a:solidFill>
+                <a:latin typeface="Consolas"/>
+              </a:rPr>
+              <a:t>signatures:</a:t>
+            </a:r>
+          </a:p>
+          <a:p>
+            <a:pPr algn="l">
+              <a:lnSpc>
+                <a:spcPct val="115000"/>
+              </a:lnSpc>
+              <a:spcBef>
+                <a:spcPts val="0"/>
+              </a:spcBef>
+              <a:spcAft>
+                <a:spcPts val="0"/>
+              </a:spcAft>
+            </a:pPr>
+            <a:r>
+              <a:rPr sz="1700">
+                <a:solidFill>
+                  <a:srgbClr val="000000"/>
+                </a:solidFill>
+                <a:latin typeface="Consolas"/>
+              </a:rPr>
+              <a:t>  - name: acme-release-key</a:t>
+            </a:r>
+          </a:p>
+          <a:p>
+            <a:pPr algn="l">
+              <a:lnSpc>
+                <a:spcPct val="115000"/>
+              </a:lnSpc>
+              <a:spcBef>
+                <a:spcPts val="0"/>
+              </a:spcBef>
+              <a:spcAft>
+                <a:spcPts val="0"/>
+              </a:spcAft>
+            </a:pPr>
+            <a:r>
+              <a:rPr sz="1700">
+                <a:solidFill>
+                  <a:srgbClr val="0A3A99"/>
+                </a:solidFill>
+                <a:latin typeface="Consolas"/>
+              </a:rPr>
+              <a:t>    signature:</a:t>
+            </a:r>
+          </a:p>
+          <a:p>
+            <a:pPr algn="l">
+              <a:lnSpc>
+                <a:spcPct val="115000"/>
+              </a:lnSpc>
+              <a:spcBef>
+                <a:spcPts val="0"/>
+              </a:spcBef>
+              <a:spcAft>
+                <a:spcPts val="0"/>
+              </a:spcAft>
+            </a:pPr>
+            <a:r>
+              <a:rPr sz="1700">
+                <a:solidFill>
+                  <a:srgbClr val="000000"/>
+                </a:solidFill>
+                <a:latin typeface="Consolas"/>
+              </a:rPr>
+              <a:t>      algorithm: RSASSA-PSS</a:t>
+            </a:r>
+          </a:p>
+          <a:p>
+            <a:pPr algn="l">
+              <a:lnSpc>
+                <a:spcPct val="115000"/>
+              </a:lnSpc>
+              <a:spcBef>
+                <a:spcPts val="0"/>
+              </a:spcBef>
+              <a:spcAft>
+                <a:spcPts val="0"/>
+              </a:spcAft>
+            </a:pPr>
+            <a:r>
+              <a:rPr sz="1700">
                 <a:solidFill>
                   <a:srgbClr val="0F6BFF"/>
                 </a:solidFill>
@@ -7606,7 +8529,7 @@
         </p:nvSpPr>
         <p:spPr>
           <a:xfrm>
-            <a:off x="8572500" y="5810250"/>
+            <a:off x="8572500" y="5905500"/>
             <a:ext cx="1143000" cy="952500"/>
           </a:xfrm>
           <a:prstGeom prst="rightArrow">
@@ -7649,7 +8572,7 @@
         </p:nvSpPr>
         <p:spPr>
           <a:xfrm>
-            <a:off x="8286750" y="5238750"/>
+            <a:off x="8286750" y="5334000"/>
             <a:ext cx="1714500" cy="476250"/>
           </a:xfrm>
           <a:prstGeom prst="rect">
@@ -7684,7 +8607,7 @@
         </p:nvSpPr>
         <p:spPr>
           <a:xfrm>
-            <a:off x="1143000" y="9239250"/>
+            <a:off x="1143000" y="9382125"/>
             <a:ext cx="16002000" cy="571500"/>
           </a:xfrm>
           <a:prstGeom prst="rect">
@@ -7702,7 +8625,7 @@
             <a:r>
               <a:rPr sz="2400">
                 <a:solidFill>
-                  <a:srgbClr val="0A3A99"/>
+                  <a:srgbClr val="0F6BFF"/>
                 </a:solidFill>
                 <a:latin typeface="Aptos"/>
               </a:rPr>
@@ -7923,7 +8846,7 @@
                 </a:solidFill>
                 <a:latin typeface="Aptos"/>
               </a:rPr>
-              <a:t>Thirty minutes. One afternoon.</a:t>
+              <a:t>Thirty minutes on a laptop.</a:t>
             </a:r>
           </a:p>
         </p:txBody>
@@ -8080,7 +9003,7 @@
                 </a:solidFill>
                 <a:latin typeface="Aptos"/>
               </a:rPr>
-              <a:t>Thirty minutes. One reconciling cluster.</a:t>
+              <a:t>Thirty minutes on any cluster.</a:t>
             </a:r>
           </a:p>
         </p:txBody>
@@ -8224,7 +9147,7 @@
                   <a:srgbClr val="000000"/>
                 </a:solidFill>
               </a:rPr>
-              <a:t> — the CRD surface can move. Pin minor versions in your platform installs.</a:t>
+              <a:t> — the CRD surface can move. Pin to specific release tags in your platform installs.</a:t>
             </a:r>
           </a:p>
           <a:p>
@@ -8250,7 +9173,7 @@
                   <a:srgbClr val="0F6BFF"/>
                 </a:solidFill>
               </a:rPr>
-              <a:t>PEM-encoded RSA (cert chains) is experimental</a:t>
+              <a:t>Helm-deploy adds kro + Flux</a:t>
             </a:r>
             <a:r>
               <a:rPr sz="2600">
@@ -8258,7 +9181,7 @@
                   <a:srgbClr val="000000"/>
                 </a:solidFill>
               </a:rPr>
-              <a:t> — the CLI prints `experimental` warnings on sign/verify. Plain RSA, GPG, and Sigstore are stable on the same v1alpha1 surface; PEM may still shift.</a:t>
+              <a:t> — the OCM controllers don't ship them. Bring your existing GitOps engine.</a:t>
             </a:r>
           </a:p>
         </p:txBody>
@@ -8493,20 +9416,27 @@
         </p:nvSpPr>
         <p:spPr>
           <a:xfrm>
-            <a:off x="619125" y="5143500"/>
-            <a:ext cx="3905250" cy="2095500"/>
+            <a:off x="2000250" y="4953000"/>
+            <a:ext cx="3143250" cy="1905000"/>
           </a:xfrm>
           <a:prstGeom prst="roundRect">
-            <a:avLst/>
+            <a:avLst>
+              <a:gd name="adj" fmla="val 7000"/>
+            </a:avLst>
           </a:prstGeom>
           <a:solidFill>
             <a:srgbClr val="F3F4F6"/>
           </a:solidFill>
-          <a:ln w="12700">
-            <a:solidFill>
-              <a:srgbClr val="6B7280"/>
-            </a:solidFill>
+          <a:ln>
+            <a:noFill/>
           </a:ln>
+          <a:effectLst>
+            <a:outerShdw blurRad="28575" dist="28575" dir="5400000" rotWithShape="0">
+              <a:srgbClr val="000000">
+                <a:alpha val="30000"/>
+              </a:srgbClr>
+            </a:outerShdw>
+          </a:effectLst>
         </p:spPr>
         <p:style>
           <a:lnRef idx="1">
@@ -8523,50 +9453,25 @@
           </a:fontRef>
         </p:style>
         <p:txBody>
-          <a:bodyPr rtlCol="0" anchor="ctr" lIns="180000" rIns="180000" tIns="180000" bIns="180000" wrap="square"/>
+          <a:bodyPr rtlCol="0" anchor="ctr"/>
           <a:lstStyle/>
           <a:p>
             <a:pPr algn="ctr"/>
-            <a:r>
-              <a:rPr sz="2400" b="1">
-                <a:solidFill>
-                  <a:srgbClr val="6B7280"/>
-                </a:solidFill>
-                <a:latin typeface="Aptos"/>
-              </a:rPr>
-              <a:t>Repository</a:t>
-            </a:r>
-          </a:p>
-          <a:p>
-            <a:pPr algn="ctr">
-              <a:spcBef>
-                <a:spcPts val="800"/>
-              </a:spcBef>
-            </a:pPr>
-            <a:r>
-              <a:rPr sz="1800">
-                <a:solidFill>
-                  <a:srgbClr val="6B7280"/>
-                </a:solidFill>
-                <a:latin typeface="Aptos"/>
-              </a:rPr>
-              <a:t>Where versions live.</a:t>
-            </a:r>
-          </a:p>
-        </p:txBody>
-      </p:sp>
-      <p:sp>
-        <p:nvSpPr>
-          <p:cNvPr id="5" name="Right Arrow 4"/>
+          </a:p>
+        </p:txBody>
+      </p:sp>
+      <p:sp>
+        <p:nvSpPr>
+          <p:cNvPr id="5" name="Rectangle 4"/>
           <p:cNvSpPr/>
           <p:nvPr/>
         </p:nvSpPr>
         <p:spPr>
           <a:xfrm>
-            <a:off x="4581525" y="6115050"/>
-            <a:ext cx="361950" cy="171450"/>
-          </a:xfrm>
-          <a:prstGeom prst="rightArrow">
+            <a:off x="2000250" y="4953000"/>
+            <a:ext cx="3143250" cy="38100"/>
+          </a:xfrm>
+          <a:prstGeom prst="rect">
             <a:avLst/>
           </a:prstGeom>
           <a:solidFill>
@@ -8600,86 +9505,90 @@
       </p:sp>
       <p:sp>
         <p:nvSpPr>
-          <p:cNvPr id="6" name="Rounded Rectangle 5"/>
+          <p:cNvPr id="6" name="TextBox 5"/>
+          <p:cNvSpPr txBox="1"/>
+          <p:nvPr/>
+        </p:nvSpPr>
+        <p:spPr>
+          <a:xfrm>
+            <a:off x="2228850" y="5257800"/>
+            <a:ext cx="2686050" cy="476250"/>
+          </a:xfrm>
+          <a:prstGeom prst="rect">
+            <a:avLst/>
+          </a:prstGeom>
+          <a:noFill/>
+        </p:spPr>
+        <p:txBody>
+          <a:bodyPr wrap="square" lIns="0" rIns="0" tIns="0" bIns="0">
+            <a:spAutoFit/>
+          </a:bodyPr>
+          <a:lstStyle/>
+          <a:p>
+            <a:pPr algn="l"/>
+            <a:r>
+              <a:rPr sz="2200" b="1">
+                <a:solidFill>
+                  <a:srgbClr val="6B7280"/>
+                </a:solidFill>
+                <a:latin typeface="Aptos"/>
+              </a:rPr>
+              <a:t>REPOSITORY</a:t>
+            </a:r>
+          </a:p>
+        </p:txBody>
+      </p:sp>
+      <p:sp>
+        <p:nvSpPr>
+          <p:cNvPr id="7" name="TextBox 6"/>
+          <p:cNvSpPr txBox="1"/>
+          <p:nvPr/>
+        </p:nvSpPr>
+        <p:spPr>
+          <a:xfrm>
+            <a:off x="2228850" y="5810250"/>
+            <a:ext cx="2686050" cy="857250"/>
+          </a:xfrm>
+          <a:prstGeom prst="rect">
+            <a:avLst/>
+          </a:prstGeom>
+          <a:noFill/>
+        </p:spPr>
+        <p:txBody>
+          <a:bodyPr wrap="square" lIns="0" rIns="0" tIns="0" bIns="0">
+            <a:spAutoFit/>
+          </a:bodyPr>
+          <a:lstStyle/>
+          <a:p>
+            <a:pPr algn="l">
+              <a:lnSpc>
+                <a:spcPct val="125000"/>
+              </a:lnSpc>
+            </a:pPr>
+            <a:r>
+              <a:rPr sz="1600">
+                <a:solidFill>
+                  <a:srgbClr val="6B7280"/>
+                </a:solidFill>
+                <a:latin typeface="Aptos"/>
+              </a:rPr>
+              <a:t>Where component versions live.</a:t>
+            </a:r>
+          </a:p>
+        </p:txBody>
+      </p:sp>
+      <p:sp>
+        <p:nvSpPr>
+          <p:cNvPr id="8" name="Rectangle 7"/>
           <p:cNvSpPr/>
           <p:nvPr/>
         </p:nvSpPr>
         <p:spPr>
           <a:xfrm>
-            <a:off x="5000625" y="5143500"/>
-            <a:ext cx="3905250" cy="2095500"/>
-          </a:xfrm>
-          <a:prstGeom prst="roundRect">
-            <a:avLst/>
-          </a:prstGeom>
-          <a:solidFill>
-            <a:srgbClr val="F3F4F6"/>
-          </a:solidFill>
-          <a:ln w="12700">
-            <a:solidFill>
-              <a:srgbClr val="6B7280"/>
-            </a:solidFill>
-          </a:ln>
-        </p:spPr>
-        <p:style>
-          <a:lnRef idx="1">
-            <a:schemeClr val="accent1"/>
-          </a:lnRef>
-          <a:fillRef idx="3">
-            <a:schemeClr val="accent1"/>
-          </a:fillRef>
-          <a:effectRef idx="2">
-            <a:schemeClr val="accent1"/>
-          </a:effectRef>
-          <a:fontRef idx="minor">
-            <a:schemeClr val="lt1"/>
-          </a:fontRef>
-        </p:style>
-        <p:txBody>
-          <a:bodyPr rtlCol="0" anchor="ctr" lIns="180000" rIns="180000" tIns="180000" bIns="180000" wrap="square"/>
-          <a:lstStyle/>
-          <a:p>
-            <a:pPr algn="ctr"/>
-            <a:r>
-              <a:rPr sz="2400" b="1">
-                <a:solidFill>
-                  <a:srgbClr val="6B7280"/>
-                </a:solidFill>
-                <a:latin typeface="Aptos"/>
-              </a:rPr>
-              <a:t>Component</a:t>
-            </a:r>
-          </a:p>
-          <a:p>
-            <a:pPr algn="ctr">
-              <a:spcBef>
-                <a:spcPts val="800"/>
-              </a:spcBef>
-            </a:pPr>
-            <a:r>
-              <a:rPr sz="1800">
-                <a:solidFill>
-                  <a:srgbClr val="6B7280"/>
-                </a:solidFill>
-                <a:latin typeface="Aptos"/>
-              </a:rPr>
-              <a:t>Pulls + verifies.</a:t>
-            </a:r>
-          </a:p>
-        </p:txBody>
-      </p:sp>
-      <p:sp>
-        <p:nvSpPr>
-          <p:cNvPr id="7" name="Right Arrow 6"/>
-          <p:cNvSpPr/>
-          <p:nvPr/>
-        </p:nvSpPr>
-        <p:spPr>
-          <a:xfrm>
-            <a:off x="8963025" y="6115050"/>
-            <a:ext cx="361950" cy="171450"/>
-          </a:xfrm>
-          <a:prstGeom prst="rightArrow">
+            <a:off x="5238750" y="5897784"/>
+            <a:ext cx="238125" cy="15430"/>
+          </a:xfrm>
+          <a:prstGeom prst="rect">
             <a:avLst/>
           </a:prstGeom>
           <a:solidFill>
@@ -8713,88 +9622,36 @@
       </p:sp>
       <p:sp>
         <p:nvSpPr>
-          <p:cNvPr id="8" name="Rounded Rectangle 7"/>
+          <p:cNvPr id="9" name="Freeform 8"/>
           <p:cNvSpPr/>
           <p:nvPr/>
         </p:nvSpPr>
         <p:spPr>
           <a:xfrm>
-            <a:off x="9382125" y="5143500"/>
-            <a:ext cx="3905250" cy="2095500"/>
-          </a:xfrm>
-          <a:prstGeom prst="roundRect">
-            <a:avLst/>
-          </a:prstGeom>
-          <a:solidFill>
-            <a:srgbClr val="F3F4F6"/>
-          </a:solidFill>
-          <a:ln w="12700">
-            <a:solidFill>
-              <a:srgbClr val="6B7280"/>
-            </a:solidFill>
-          </a:ln>
-        </p:spPr>
-        <p:style>
-          <a:lnRef idx="1">
-            <a:schemeClr val="accent1"/>
-          </a:lnRef>
-          <a:fillRef idx="3">
-            <a:schemeClr val="accent1"/>
-          </a:fillRef>
-          <a:effectRef idx="2">
-            <a:schemeClr val="accent1"/>
-          </a:effectRef>
-          <a:fontRef idx="minor">
-            <a:schemeClr val="lt1"/>
-          </a:fontRef>
-        </p:style>
-        <p:txBody>
-          <a:bodyPr rtlCol="0" anchor="ctr" lIns="180000" rIns="180000" tIns="180000" bIns="180000" wrap="square"/>
-          <a:lstStyle/>
-          <a:p>
-            <a:pPr algn="ctr"/>
-            <a:r>
-              <a:rPr sz="2400" b="1">
-                <a:solidFill>
-                  <a:srgbClr val="6B7280"/>
-                </a:solidFill>
-                <a:latin typeface="Aptos"/>
-              </a:rPr>
-              <a:t>Resource</a:t>
-            </a:r>
-          </a:p>
-          <a:p>
-            <a:pPr algn="ctr">
-              <a:spcBef>
-                <a:spcPts val="800"/>
-              </a:spcBef>
-            </a:pPr>
-            <a:r>
-              <a:rPr sz="1800">
-                <a:solidFill>
-                  <a:srgbClr val="6B7280"/>
-                </a:solidFill>
-                <a:latin typeface="Aptos"/>
-              </a:rPr>
-              <a:t>One artifact, by digest.</a:t>
-            </a:r>
-          </a:p>
-        </p:txBody>
-      </p:sp>
-      <p:sp>
-        <p:nvSpPr>
-          <p:cNvPr id="9" name="Right Arrow 8"/>
-          <p:cNvSpPr/>
-          <p:nvPr/>
-        </p:nvSpPr>
-        <p:spPr>
-          <a:xfrm>
-            <a:off x="13344525" y="6115050"/>
-            <a:ext cx="361950" cy="171450"/>
-          </a:xfrm>
-          <a:prstGeom prst="rightArrow">
-            <a:avLst/>
-          </a:prstGeom>
+            <a:off x="5467350" y="5838825"/>
+            <a:ext cx="152400" cy="133350"/>
+          </a:xfrm>
+          <a:custGeom>
+            <a:avLst/>
+            <a:gdLst/>
+            <a:ahLst/>
+            <a:cxnLst/>
+            <a:rect l="l" t="t" r="r" b="b"/>
+            <a:pathLst>
+              <a:path w="152400" h="133350">
+                <a:moveTo>
+                  <a:pt x="0" y="66675"/>
+                </a:moveTo>
+                <a:lnTo>
+                  <a:pt x="152400" y="0"/>
+                </a:lnTo>
+                <a:lnTo>
+                  <a:pt x="152400" y="133350"/>
+                </a:lnTo>
+                <a:close/>
+              </a:path>
+            </a:pathLst>
+          </a:custGeom>
           <a:solidFill>
             <a:srgbClr val="6B7280"/>
           </a:solidFill>
@@ -8832,20 +9689,27 @@
         </p:nvSpPr>
         <p:spPr>
           <a:xfrm>
-            <a:off x="13763625" y="5143500"/>
-            <a:ext cx="3905250" cy="2095500"/>
+            <a:off x="5715000" y="4953000"/>
+            <a:ext cx="3143250" cy="1905000"/>
           </a:xfrm>
           <a:prstGeom prst="roundRect">
-            <a:avLst/>
+            <a:avLst>
+              <a:gd name="adj" fmla="val 7000"/>
+            </a:avLst>
           </a:prstGeom>
           <a:solidFill>
             <a:srgbClr val="F3F4F6"/>
           </a:solidFill>
-          <a:ln w="12700">
-            <a:solidFill>
-              <a:srgbClr val="6B7280"/>
-            </a:solidFill>
+          <a:ln>
+            <a:noFill/>
           </a:ln>
+          <a:effectLst>
+            <a:outerShdw blurRad="28575" dist="28575" dir="5400000" rotWithShape="0">
+              <a:srgbClr val="000000">
+                <a:alpha val="30000"/>
+              </a:srgbClr>
+            </a:outerShdw>
+          </a:effectLst>
         </p:spPr>
         <p:style>
           <a:lnRef idx="1">
@@ -8862,59 +9726,32 @@
           </a:fontRef>
         </p:style>
         <p:txBody>
-          <a:bodyPr rtlCol="0" anchor="ctr" lIns="180000" rIns="180000" tIns="180000" bIns="180000" wrap="square"/>
+          <a:bodyPr rtlCol="0" anchor="ctr"/>
           <a:lstStyle/>
           <a:p>
             <a:pPr algn="ctr"/>
-            <a:r>
-              <a:rPr sz="2400" b="1">
-                <a:solidFill>
-                  <a:srgbClr val="6B7280"/>
-                </a:solidFill>
-                <a:latin typeface="Aptos"/>
-              </a:rPr>
-              <a:t>Deployer</a:t>
-            </a:r>
-          </a:p>
-          <a:p>
-            <a:pPr algn="ctr">
-              <a:spcBef>
-                <a:spcPts val="800"/>
-              </a:spcBef>
-            </a:pPr>
-            <a:r>
-              <a:rPr sz="1800">
-                <a:solidFill>
-                  <a:srgbClr val="6B7280"/>
-                </a:solidFill>
-                <a:latin typeface="Aptos"/>
-              </a:rPr>
-              <a:t>Applies. Resolves refs.</a:t>
-            </a:r>
-          </a:p>
-        </p:txBody>
-      </p:sp>
-      <p:sp>
-        <p:nvSpPr>
-          <p:cNvPr id="11" name="Rounded Rectangle 10"/>
+          </a:p>
+        </p:txBody>
+      </p:sp>
+      <p:sp>
+        <p:nvSpPr>
+          <p:cNvPr id="11" name="Rectangle 10"/>
           <p:cNvSpPr/>
           <p:nvPr/>
         </p:nvSpPr>
         <p:spPr>
           <a:xfrm>
-            <a:off x="5810250" y="7620000"/>
-            <a:ext cx="6667500" cy="2476500"/>
-          </a:xfrm>
-          <a:prstGeom prst="roundRect">
+            <a:off x="5715000" y="4953000"/>
+            <a:ext cx="3143250" cy="38100"/>
+          </a:xfrm>
+          <a:prstGeom prst="rect">
             <a:avLst/>
           </a:prstGeom>
           <a:solidFill>
-            <a:srgbClr val="F3F4F6"/>
+            <a:srgbClr val="6B7280"/>
           </a:solidFill>
-          <a:ln w="25400">
-            <a:solidFill>
-              <a:srgbClr val="0F6BFF"/>
-            </a:solidFill>
+          <a:ln>
+            <a:noFill/>
           </a:ln>
         </p:spPr>
         <p:style>
@@ -8932,51 +9769,10 @@
           </a:fontRef>
         </p:style>
         <p:txBody>
-          <a:bodyPr rtlCol="0" anchor="ctr" lIns="220000" rIns="220000" tIns="180000" bIns="180000" wrap="square"/>
+          <a:bodyPr rtlCol="0" anchor="ctr"/>
           <a:lstStyle/>
           <a:p>
             <a:pPr algn="ctr"/>
-            <a:r>
-              <a:rPr sz="3000" b="1">
-                <a:solidFill>
-                  <a:srgbClr val="0F6BFF"/>
-                </a:solidFill>
-                <a:latin typeface="Aptos"/>
-              </a:rPr>
-              <a:t>Replication</a:t>
-            </a:r>
-          </a:p>
-          <a:p>
-            <a:pPr algn="ctr">
-              <a:spcBef>
-                <a:spcPts val="1000"/>
-              </a:spcBef>
-            </a:pPr>
-            <a:r>
-              <a:rPr sz="2000">
-                <a:solidFill>
-                  <a:srgbClr val="000000"/>
-                </a:solidFill>
-                <a:latin typeface="Aptos"/>
-              </a:rPr>
-              <a:t>Transfers a resolved component version from one OCM repository to another.</a:t>
-            </a:r>
-          </a:p>
-          <a:p>
-            <a:pPr algn="ctr">
-              <a:spcBef>
-                <a:spcPts val="600"/>
-              </a:spcBef>
-            </a:pPr>
-            <a:r>
-              <a:rPr sz="2000">
-                <a:solidFill>
-                  <a:srgbClr val="000000"/>
-                </a:solidFill>
-                <a:latin typeface="Aptos"/>
-              </a:rPr>
-              <a:t>Records status.lastTransferredDigest. Same digest → no-op.</a:t>
-            </a:r>
           </a:p>
         </p:txBody>
       </p:sp>
@@ -8988,8 +9784,8 @@
         </p:nvSpPr>
         <p:spPr>
           <a:xfrm>
-            <a:off x="1143000" y="10382250"/>
-            <a:ext cx="16002000" cy="476250"/>
+            <a:off x="5943600" y="5257800"/>
+            <a:ext cx="2686050" cy="476250"/>
           </a:xfrm>
           <a:prstGeom prst="rect">
             <a:avLst/>
@@ -9002,7 +9798,812 @@
           </a:bodyPr>
           <a:lstStyle/>
           <a:p>
+            <a:pPr algn="l"/>
+            <a:r>
+              <a:rPr sz="2200" b="1">
+                <a:solidFill>
+                  <a:srgbClr val="6B7280"/>
+                </a:solidFill>
+                <a:latin typeface="Aptos"/>
+              </a:rPr>
+              <a:t>COMPONENT</a:t>
+            </a:r>
+          </a:p>
+        </p:txBody>
+      </p:sp>
+      <p:sp>
+        <p:nvSpPr>
+          <p:cNvPr id="13" name="TextBox 12"/>
+          <p:cNvSpPr txBox="1"/>
+          <p:nvPr/>
+        </p:nvSpPr>
+        <p:spPr>
+          <a:xfrm>
+            <a:off x="5943600" y="5810250"/>
+            <a:ext cx="2686050" cy="857250"/>
+          </a:xfrm>
+          <a:prstGeom prst="rect">
+            <a:avLst/>
+          </a:prstGeom>
+          <a:noFill/>
+        </p:spPr>
+        <p:txBody>
+          <a:bodyPr wrap="square" lIns="0" rIns="0" tIns="0" bIns="0">
+            <a:spAutoFit/>
+          </a:bodyPr>
+          <a:lstStyle/>
+          <a:p>
+            <a:pPr algn="l">
+              <a:lnSpc>
+                <a:spcPct val="125000"/>
+              </a:lnSpc>
+            </a:pPr>
+            <a:r>
+              <a:rPr sz="1600">
+                <a:solidFill>
+                  <a:srgbClr val="6B7280"/>
+                </a:solidFill>
+                <a:latin typeface="Aptos"/>
+              </a:rPr>
+              <a:t>Pulls + verifies.</a:t>
+            </a:r>
+          </a:p>
+        </p:txBody>
+      </p:sp>
+      <p:sp>
+        <p:nvSpPr>
+          <p:cNvPr id="14" name="Rectangle 13"/>
+          <p:cNvSpPr/>
+          <p:nvPr/>
+        </p:nvSpPr>
+        <p:spPr>
+          <a:xfrm>
+            <a:off x="8953500" y="5897784"/>
+            <a:ext cx="238125" cy="15430"/>
+          </a:xfrm>
+          <a:prstGeom prst="rect">
+            <a:avLst/>
+          </a:prstGeom>
+          <a:solidFill>
+            <a:srgbClr val="6B7280"/>
+          </a:solidFill>
+          <a:ln>
+            <a:noFill/>
+          </a:ln>
+        </p:spPr>
+        <p:style>
+          <a:lnRef idx="1">
+            <a:schemeClr val="accent1"/>
+          </a:lnRef>
+          <a:fillRef idx="3">
+            <a:schemeClr val="accent1"/>
+          </a:fillRef>
+          <a:effectRef idx="2">
+            <a:schemeClr val="accent1"/>
+          </a:effectRef>
+          <a:fontRef idx="minor">
+            <a:schemeClr val="lt1"/>
+          </a:fontRef>
+        </p:style>
+        <p:txBody>
+          <a:bodyPr rtlCol="0" anchor="ctr"/>
+          <a:lstStyle/>
+          <a:p>
             <a:pPr algn="ctr"/>
+          </a:p>
+        </p:txBody>
+      </p:sp>
+      <p:sp>
+        <p:nvSpPr>
+          <p:cNvPr id="15" name="Freeform 14"/>
+          <p:cNvSpPr/>
+          <p:nvPr/>
+        </p:nvSpPr>
+        <p:spPr>
+          <a:xfrm>
+            <a:off x="9182100" y="5838825"/>
+            <a:ext cx="152400" cy="133350"/>
+          </a:xfrm>
+          <a:custGeom>
+            <a:avLst/>
+            <a:gdLst/>
+            <a:ahLst/>
+            <a:cxnLst/>
+            <a:rect l="l" t="t" r="r" b="b"/>
+            <a:pathLst>
+              <a:path w="152400" h="133350">
+                <a:moveTo>
+                  <a:pt x="0" y="66675"/>
+                </a:moveTo>
+                <a:lnTo>
+                  <a:pt x="152400" y="0"/>
+                </a:lnTo>
+                <a:lnTo>
+                  <a:pt x="152400" y="133350"/>
+                </a:lnTo>
+                <a:close/>
+              </a:path>
+            </a:pathLst>
+          </a:custGeom>
+          <a:solidFill>
+            <a:srgbClr val="6B7280"/>
+          </a:solidFill>
+          <a:ln>
+            <a:noFill/>
+          </a:ln>
+        </p:spPr>
+        <p:style>
+          <a:lnRef idx="1">
+            <a:schemeClr val="accent1"/>
+          </a:lnRef>
+          <a:fillRef idx="3">
+            <a:schemeClr val="accent1"/>
+          </a:fillRef>
+          <a:effectRef idx="2">
+            <a:schemeClr val="accent1"/>
+          </a:effectRef>
+          <a:fontRef idx="minor">
+            <a:schemeClr val="lt1"/>
+          </a:fontRef>
+        </p:style>
+        <p:txBody>
+          <a:bodyPr rtlCol="0" anchor="ctr"/>
+          <a:lstStyle/>
+          <a:p>
+            <a:pPr algn="ctr"/>
+          </a:p>
+        </p:txBody>
+      </p:sp>
+      <p:sp>
+        <p:nvSpPr>
+          <p:cNvPr id="16" name="Rounded Rectangle 15"/>
+          <p:cNvSpPr/>
+          <p:nvPr/>
+        </p:nvSpPr>
+        <p:spPr>
+          <a:xfrm>
+            <a:off x="9429750" y="4953000"/>
+            <a:ext cx="3143250" cy="1905000"/>
+          </a:xfrm>
+          <a:prstGeom prst="roundRect">
+            <a:avLst>
+              <a:gd name="adj" fmla="val 7000"/>
+            </a:avLst>
+          </a:prstGeom>
+          <a:solidFill>
+            <a:srgbClr val="F3F4F6"/>
+          </a:solidFill>
+          <a:ln>
+            <a:noFill/>
+          </a:ln>
+          <a:effectLst>
+            <a:outerShdw blurRad="28575" dist="28575" dir="5400000" rotWithShape="0">
+              <a:srgbClr val="000000">
+                <a:alpha val="30000"/>
+              </a:srgbClr>
+            </a:outerShdw>
+          </a:effectLst>
+        </p:spPr>
+        <p:style>
+          <a:lnRef idx="1">
+            <a:schemeClr val="accent1"/>
+          </a:lnRef>
+          <a:fillRef idx="3">
+            <a:schemeClr val="accent1"/>
+          </a:fillRef>
+          <a:effectRef idx="2">
+            <a:schemeClr val="accent1"/>
+          </a:effectRef>
+          <a:fontRef idx="minor">
+            <a:schemeClr val="lt1"/>
+          </a:fontRef>
+        </p:style>
+        <p:txBody>
+          <a:bodyPr rtlCol="0" anchor="ctr"/>
+          <a:lstStyle/>
+          <a:p>
+            <a:pPr algn="ctr"/>
+          </a:p>
+        </p:txBody>
+      </p:sp>
+      <p:sp>
+        <p:nvSpPr>
+          <p:cNvPr id="17" name="Rectangle 16"/>
+          <p:cNvSpPr/>
+          <p:nvPr/>
+        </p:nvSpPr>
+        <p:spPr>
+          <a:xfrm>
+            <a:off x="9429750" y="4953000"/>
+            <a:ext cx="3143250" cy="38100"/>
+          </a:xfrm>
+          <a:prstGeom prst="rect">
+            <a:avLst/>
+          </a:prstGeom>
+          <a:solidFill>
+            <a:srgbClr val="6B7280"/>
+          </a:solidFill>
+          <a:ln>
+            <a:noFill/>
+          </a:ln>
+        </p:spPr>
+        <p:style>
+          <a:lnRef idx="1">
+            <a:schemeClr val="accent1"/>
+          </a:lnRef>
+          <a:fillRef idx="3">
+            <a:schemeClr val="accent1"/>
+          </a:fillRef>
+          <a:effectRef idx="2">
+            <a:schemeClr val="accent1"/>
+          </a:effectRef>
+          <a:fontRef idx="minor">
+            <a:schemeClr val="lt1"/>
+          </a:fontRef>
+        </p:style>
+        <p:txBody>
+          <a:bodyPr rtlCol="0" anchor="ctr"/>
+          <a:lstStyle/>
+          <a:p>
+            <a:pPr algn="ctr"/>
+          </a:p>
+        </p:txBody>
+      </p:sp>
+      <p:sp>
+        <p:nvSpPr>
+          <p:cNvPr id="18" name="TextBox 17"/>
+          <p:cNvSpPr txBox="1"/>
+          <p:nvPr/>
+        </p:nvSpPr>
+        <p:spPr>
+          <a:xfrm>
+            <a:off x="9658350" y="5257800"/>
+            <a:ext cx="2686050" cy="476250"/>
+          </a:xfrm>
+          <a:prstGeom prst="rect">
+            <a:avLst/>
+          </a:prstGeom>
+          <a:noFill/>
+        </p:spPr>
+        <p:txBody>
+          <a:bodyPr wrap="square" lIns="0" rIns="0" tIns="0" bIns="0">
+            <a:spAutoFit/>
+          </a:bodyPr>
+          <a:lstStyle/>
+          <a:p>
+            <a:pPr algn="l"/>
+            <a:r>
+              <a:rPr sz="2200" b="1">
+                <a:solidFill>
+                  <a:srgbClr val="6B7280"/>
+                </a:solidFill>
+                <a:latin typeface="Aptos"/>
+              </a:rPr>
+              <a:t>RESOURCE</a:t>
+            </a:r>
+          </a:p>
+        </p:txBody>
+      </p:sp>
+      <p:sp>
+        <p:nvSpPr>
+          <p:cNvPr id="19" name="TextBox 18"/>
+          <p:cNvSpPr txBox="1"/>
+          <p:nvPr/>
+        </p:nvSpPr>
+        <p:spPr>
+          <a:xfrm>
+            <a:off x="9658350" y="5810250"/>
+            <a:ext cx="2686050" cy="857250"/>
+          </a:xfrm>
+          <a:prstGeom prst="rect">
+            <a:avLst/>
+          </a:prstGeom>
+          <a:noFill/>
+        </p:spPr>
+        <p:txBody>
+          <a:bodyPr wrap="square" lIns="0" rIns="0" tIns="0" bIns="0">
+            <a:spAutoFit/>
+          </a:bodyPr>
+          <a:lstStyle/>
+          <a:p>
+            <a:pPr algn="l">
+              <a:lnSpc>
+                <a:spcPct val="125000"/>
+              </a:lnSpc>
+            </a:pPr>
+            <a:r>
+              <a:rPr sz="1600">
+                <a:solidFill>
+                  <a:srgbClr val="6B7280"/>
+                </a:solidFill>
+                <a:latin typeface="Aptos"/>
+              </a:rPr>
+              <a:t>One artifact, by digest.</a:t>
+            </a:r>
+          </a:p>
+        </p:txBody>
+      </p:sp>
+      <p:sp>
+        <p:nvSpPr>
+          <p:cNvPr id="20" name="Rectangle 19"/>
+          <p:cNvSpPr/>
+          <p:nvPr/>
+        </p:nvSpPr>
+        <p:spPr>
+          <a:xfrm>
+            <a:off x="12668250" y="5897784"/>
+            <a:ext cx="238125" cy="15430"/>
+          </a:xfrm>
+          <a:prstGeom prst="rect">
+            <a:avLst/>
+          </a:prstGeom>
+          <a:solidFill>
+            <a:srgbClr val="6B7280"/>
+          </a:solidFill>
+          <a:ln>
+            <a:noFill/>
+          </a:ln>
+        </p:spPr>
+        <p:style>
+          <a:lnRef idx="1">
+            <a:schemeClr val="accent1"/>
+          </a:lnRef>
+          <a:fillRef idx="3">
+            <a:schemeClr val="accent1"/>
+          </a:fillRef>
+          <a:effectRef idx="2">
+            <a:schemeClr val="accent1"/>
+          </a:effectRef>
+          <a:fontRef idx="minor">
+            <a:schemeClr val="lt1"/>
+          </a:fontRef>
+        </p:style>
+        <p:txBody>
+          <a:bodyPr rtlCol="0" anchor="ctr"/>
+          <a:lstStyle/>
+          <a:p>
+            <a:pPr algn="ctr"/>
+          </a:p>
+        </p:txBody>
+      </p:sp>
+      <p:sp>
+        <p:nvSpPr>
+          <p:cNvPr id="21" name="Freeform 20"/>
+          <p:cNvSpPr/>
+          <p:nvPr/>
+        </p:nvSpPr>
+        <p:spPr>
+          <a:xfrm>
+            <a:off x="12896850" y="5838825"/>
+            <a:ext cx="152400" cy="133350"/>
+          </a:xfrm>
+          <a:custGeom>
+            <a:avLst/>
+            <a:gdLst/>
+            <a:ahLst/>
+            <a:cxnLst/>
+            <a:rect l="l" t="t" r="r" b="b"/>
+            <a:pathLst>
+              <a:path w="152400" h="133350">
+                <a:moveTo>
+                  <a:pt x="0" y="66675"/>
+                </a:moveTo>
+                <a:lnTo>
+                  <a:pt x="152400" y="0"/>
+                </a:lnTo>
+                <a:lnTo>
+                  <a:pt x="152400" y="133350"/>
+                </a:lnTo>
+                <a:close/>
+              </a:path>
+            </a:pathLst>
+          </a:custGeom>
+          <a:solidFill>
+            <a:srgbClr val="6B7280"/>
+          </a:solidFill>
+          <a:ln>
+            <a:noFill/>
+          </a:ln>
+        </p:spPr>
+        <p:style>
+          <a:lnRef idx="1">
+            <a:schemeClr val="accent1"/>
+          </a:lnRef>
+          <a:fillRef idx="3">
+            <a:schemeClr val="accent1"/>
+          </a:fillRef>
+          <a:effectRef idx="2">
+            <a:schemeClr val="accent1"/>
+          </a:effectRef>
+          <a:fontRef idx="minor">
+            <a:schemeClr val="lt1"/>
+          </a:fontRef>
+        </p:style>
+        <p:txBody>
+          <a:bodyPr rtlCol="0" anchor="ctr"/>
+          <a:lstStyle/>
+          <a:p>
+            <a:pPr algn="ctr"/>
+          </a:p>
+        </p:txBody>
+      </p:sp>
+      <p:sp>
+        <p:nvSpPr>
+          <p:cNvPr id="22" name="Rounded Rectangle 21"/>
+          <p:cNvSpPr/>
+          <p:nvPr/>
+        </p:nvSpPr>
+        <p:spPr>
+          <a:xfrm>
+            <a:off x="13144500" y="4953000"/>
+            <a:ext cx="3143250" cy="1905000"/>
+          </a:xfrm>
+          <a:prstGeom prst="roundRect">
+            <a:avLst>
+              <a:gd name="adj" fmla="val 7000"/>
+            </a:avLst>
+          </a:prstGeom>
+          <a:solidFill>
+            <a:srgbClr val="F3F4F6"/>
+          </a:solidFill>
+          <a:ln>
+            <a:noFill/>
+          </a:ln>
+          <a:effectLst>
+            <a:outerShdw blurRad="28575" dist="28575" dir="5400000" rotWithShape="0">
+              <a:srgbClr val="000000">
+                <a:alpha val="30000"/>
+              </a:srgbClr>
+            </a:outerShdw>
+          </a:effectLst>
+        </p:spPr>
+        <p:style>
+          <a:lnRef idx="1">
+            <a:schemeClr val="accent1"/>
+          </a:lnRef>
+          <a:fillRef idx="3">
+            <a:schemeClr val="accent1"/>
+          </a:fillRef>
+          <a:effectRef idx="2">
+            <a:schemeClr val="accent1"/>
+          </a:effectRef>
+          <a:fontRef idx="minor">
+            <a:schemeClr val="lt1"/>
+          </a:fontRef>
+        </p:style>
+        <p:txBody>
+          <a:bodyPr rtlCol="0" anchor="ctr"/>
+          <a:lstStyle/>
+          <a:p>
+            <a:pPr algn="ctr"/>
+          </a:p>
+        </p:txBody>
+      </p:sp>
+      <p:sp>
+        <p:nvSpPr>
+          <p:cNvPr id="23" name="Rectangle 22"/>
+          <p:cNvSpPr/>
+          <p:nvPr/>
+        </p:nvSpPr>
+        <p:spPr>
+          <a:xfrm>
+            <a:off x="13144500" y="4953000"/>
+            <a:ext cx="3143250" cy="38100"/>
+          </a:xfrm>
+          <a:prstGeom prst="rect">
+            <a:avLst/>
+          </a:prstGeom>
+          <a:solidFill>
+            <a:srgbClr val="6B7280"/>
+          </a:solidFill>
+          <a:ln>
+            <a:noFill/>
+          </a:ln>
+        </p:spPr>
+        <p:style>
+          <a:lnRef idx="1">
+            <a:schemeClr val="accent1"/>
+          </a:lnRef>
+          <a:fillRef idx="3">
+            <a:schemeClr val="accent1"/>
+          </a:fillRef>
+          <a:effectRef idx="2">
+            <a:schemeClr val="accent1"/>
+          </a:effectRef>
+          <a:fontRef idx="minor">
+            <a:schemeClr val="lt1"/>
+          </a:fontRef>
+        </p:style>
+        <p:txBody>
+          <a:bodyPr rtlCol="0" anchor="ctr"/>
+          <a:lstStyle/>
+          <a:p>
+            <a:pPr algn="ctr"/>
+          </a:p>
+        </p:txBody>
+      </p:sp>
+      <p:sp>
+        <p:nvSpPr>
+          <p:cNvPr id="24" name="TextBox 23"/>
+          <p:cNvSpPr txBox="1"/>
+          <p:nvPr/>
+        </p:nvSpPr>
+        <p:spPr>
+          <a:xfrm>
+            <a:off x="13373100" y="5257800"/>
+            <a:ext cx="2686050" cy="476250"/>
+          </a:xfrm>
+          <a:prstGeom prst="rect">
+            <a:avLst/>
+          </a:prstGeom>
+          <a:noFill/>
+        </p:spPr>
+        <p:txBody>
+          <a:bodyPr wrap="square" lIns="0" rIns="0" tIns="0" bIns="0">
+            <a:spAutoFit/>
+          </a:bodyPr>
+          <a:lstStyle/>
+          <a:p>
+            <a:pPr algn="l"/>
+            <a:r>
+              <a:rPr sz="2200" b="1">
+                <a:solidFill>
+                  <a:srgbClr val="6B7280"/>
+                </a:solidFill>
+                <a:latin typeface="Aptos"/>
+              </a:rPr>
+              <a:t>DEPLOYER</a:t>
+            </a:r>
+          </a:p>
+        </p:txBody>
+      </p:sp>
+      <p:sp>
+        <p:nvSpPr>
+          <p:cNvPr id="25" name="TextBox 24"/>
+          <p:cNvSpPr txBox="1"/>
+          <p:nvPr/>
+        </p:nvSpPr>
+        <p:spPr>
+          <a:xfrm>
+            <a:off x="13373100" y="5810250"/>
+            <a:ext cx="2686050" cy="857250"/>
+          </a:xfrm>
+          <a:prstGeom prst="rect">
+            <a:avLst/>
+          </a:prstGeom>
+          <a:noFill/>
+        </p:spPr>
+        <p:txBody>
+          <a:bodyPr wrap="square" lIns="0" rIns="0" tIns="0" bIns="0">
+            <a:spAutoFit/>
+          </a:bodyPr>
+          <a:lstStyle/>
+          <a:p>
+            <a:pPr algn="l">
+              <a:lnSpc>
+                <a:spcPct val="125000"/>
+              </a:lnSpc>
+            </a:pPr>
+            <a:r>
+              <a:rPr sz="1600">
+                <a:solidFill>
+                  <a:srgbClr val="6B7280"/>
+                </a:solidFill>
+                <a:latin typeface="Aptos"/>
+              </a:rPr>
+              <a:t>Applies it to the cluster.</a:t>
+            </a:r>
+          </a:p>
+        </p:txBody>
+      </p:sp>
+      <p:sp>
+        <p:nvSpPr>
+          <p:cNvPr id="26" name="Rounded Rectangle 25"/>
+          <p:cNvSpPr/>
+          <p:nvPr/>
+        </p:nvSpPr>
+        <p:spPr>
+          <a:xfrm>
+            <a:off x="5810250" y="7429500"/>
+            <a:ext cx="6667500" cy="2476500"/>
+          </a:xfrm>
+          <a:prstGeom prst="roundRect">
+            <a:avLst>
+              <a:gd name="adj" fmla="val 5384"/>
+            </a:avLst>
+          </a:prstGeom>
+          <a:solidFill>
+            <a:srgbClr val="F3F4F6"/>
+          </a:solidFill>
+          <a:ln>
+            <a:noFill/>
+          </a:ln>
+          <a:effectLst>
+            <a:outerShdw blurRad="28575" dist="28575" dir="5400000" rotWithShape="0">
+              <a:srgbClr val="000000">
+                <a:alpha val="30000"/>
+              </a:srgbClr>
+            </a:outerShdw>
+          </a:effectLst>
+        </p:spPr>
+        <p:style>
+          <a:lnRef idx="1">
+            <a:schemeClr val="accent1"/>
+          </a:lnRef>
+          <a:fillRef idx="3">
+            <a:schemeClr val="accent1"/>
+          </a:fillRef>
+          <a:effectRef idx="2">
+            <a:schemeClr val="accent1"/>
+          </a:effectRef>
+          <a:fontRef idx="minor">
+            <a:schemeClr val="lt1"/>
+          </a:fontRef>
+        </p:style>
+        <p:txBody>
+          <a:bodyPr rtlCol="0" anchor="ctr"/>
+          <a:lstStyle/>
+          <a:p>
+            <a:pPr algn="ctr"/>
+          </a:p>
+        </p:txBody>
+      </p:sp>
+      <p:sp>
+        <p:nvSpPr>
+          <p:cNvPr id="27" name="Rectangle 26"/>
+          <p:cNvSpPr/>
+          <p:nvPr/>
+        </p:nvSpPr>
+        <p:spPr>
+          <a:xfrm>
+            <a:off x="5810250" y="7429500"/>
+            <a:ext cx="6667500" cy="47625"/>
+          </a:xfrm>
+          <a:prstGeom prst="rect">
+            <a:avLst/>
+          </a:prstGeom>
+          <a:solidFill>
+            <a:srgbClr val="0F6BFF"/>
+          </a:solidFill>
+          <a:ln>
+            <a:noFill/>
+          </a:ln>
+        </p:spPr>
+        <p:style>
+          <a:lnRef idx="1">
+            <a:schemeClr val="accent1"/>
+          </a:lnRef>
+          <a:fillRef idx="3">
+            <a:schemeClr val="accent1"/>
+          </a:fillRef>
+          <a:effectRef idx="2">
+            <a:schemeClr val="accent1"/>
+          </a:effectRef>
+          <a:fontRef idx="minor">
+            <a:schemeClr val="lt1"/>
+          </a:fontRef>
+        </p:style>
+        <p:txBody>
+          <a:bodyPr rtlCol="0" anchor="ctr"/>
+          <a:lstStyle/>
+          <a:p>
+            <a:pPr algn="ctr"/>
+          </a:p>
+        </p:txBody>
+      </p:sp>
+      <p:sp>
+        <p:nvSpPr>
+          <p:cNvPr id="28" name="TextBox 27"/>
+          <p:cNvSpPr txBox="1"/>
+          <p:nvPr/>
+        </p:nvSpPr>
+        <p:spPr>
+          <a:xfrm>
+            <a:off x="6096000" y="7829550"/>
+            <a:ext cx="6096000" cy="476250"/>
+          </a:xfrm>
+          <a:prstGeom prst="rect">
+            <a:avLst/>
+          </a:prstGeom>
+          <a:noFill/>
+        </p:spPr>
+        <p:txBody>
+          <a:bodyPr wrap="square" lIns="0" rIns="0" tIns="0" bIns="0">
+            <a:spAutoFit/>
+          </a:bodyPr>
+          <a:lstStyle/>
+          <a:p>
+            <a:pPr algn="l"/>
+            <a:r>
+              <a:rPr sz="3000" b="1">
+                <a:solidFill>
+                  <a:srgbClr val="0A3A99"/>
+                </a:solidFill>
+                <a:latin typeface="Aptos"/>
+              </a:rPr>
+              <a:t>REPLICATION</a:t>
+            </a:r>
+          </a:p>
+        </p:txBody>
+      </p:sp>
+      <p:sp>
+        <p:nvSpPr>
+          <p:cNvPr id="29" name="TextBox 28"/>
+          <p:cNvSpPr txBox="1"/>
+          <p:nvPr/>
+        </p:nvSpPr>
+        <p:spPr>
+          <a:xfrm>
+            <a:off x="6096000" y="8477250"/>
+            <a:ext cx="6096000" cy="1238250"/>
+          </a:xfrm>
+          <a:prstGeom prst="rect">
+            <a:avLst/>
+          </a:prstGeom>
+          <a:noFill/>
+        </p:spPr>
+        <p:txBody>
+          <a:bodyPr wrap="square" lIns="0" rIns="0" tIns="0" bIns="0">
+            <a:spAutoFit/>
+          </a:bodyPr>
+          <a:lstStyle/>
+          <a:p>
+            <a:pPr algn="l">
+              <a:lnSpc>
+                <a:spcPct val="125000"/>
+              </a:lnSpc>
+            </a:pPr>
+            <a:r>
+              <a:rPr sz="2200">
+                <a:solidFill>
+                  <a:srgbClr val="333333"/>
+                </a:solidFill>
+                <a:latin typeface="Aptos"/>
+              </a:rPr>
+              <a:t>Transfers a resolved component version from one OCM repository to another.</a:t>
+            </a:r>
+          </a:p>
+          <a:p>
+            <a:pPr algn="l">
+              <a:lnSpc>
+                <a:spcPct val="125000"/>
+              </a:lnSpc>
+            </a:pPr>
+            <a:r>
+              <a:rPr sz="2200">
+                <a:solidFill>
+                  <a:srgbClr val="333333"/>
+                </a:solidFill>
+                <a:latin typeface="Aptos"/>
+              </a:rPr>
+              <a:t>Records status.lastTransferredDigest. Same digest → no-op.</a:t>
+            </a:r>
+          </a:p>
+        </p:txBody>
+      </p:sp>
+      <p:sp>
+        <p:nvSpPr>
+          <p:cNvPr id="30" name="TextBox 29"/>
+          <p:cNvSpPr txBox="1"/>
+          <p:nvPr/>
+        </p:nvSpPr>
+        <p:spPr>
+          <a:xfrm>
+            <a:off x="1143000" y="9620250"/>
+            <a:ext cx="16002000" cy="476250"/>
+          </a:xfrm>
+          <a:prstGeom prst="rect">
+            <a:avLst/>
+          </a:prstGeom>
+          <a:noFill/>
+        </p:spPr>
+        <p:txBody>
+          <a:bodyPr wrap="square" lIns="0" rIns="0" tIns="0" bIns="0">
+            <a:spAutoFit/>
+          </a:bodyPr>
+          <a:lstStyle/>
+          <a:p>
+            <a:pPr algn="ctr"/>
             <a:r>
               <a:rPr sz="2000">
                 <a:solidFill>
@@ -9010,7 +10611,7 @@
                 </a:solidFill>
                 <a:latin typeface="Aptos"/>
               </a:rPr>
-              <a:t>Controller-shaped equivalent of `ocm transfer cv` — mirroring, promotion, in-cluster air-gap.</a:t>
+              <a:t>Controller-shaped equivalent of the OCM CLI's `ocm transfer cv` — point it at a source `Component` and a target `Repository`, and it keeps them in sync.</a:t>
             </a:r>
           </a:p>
         </p:txBody>
@@ -9822,6 +11423,41 @@
           </a:fontRef>
         </p:style>
       </p:cxnSp>
+      <p:sp>
+        <p:nvSpPr>
+          <p:cNvPr id="15" name="TextBox 14"/>
+          <p:cNvSpPr txBox="1"/>
+          <p:nvPr/>
+        </p:nvSpPr>
+        <p:spPr>
+          <a:xfrm>
+            <a:off x="1143000" y="9429750"/>
+            <a:ext cx="16002000" cy="571500"/>
+          </a:xfrm>
+          <a:prstGeom prst="rect">
+            <a:avLst/>
+          </a:prstGeom>
+          <a:noFill/>
+        </p:spPr>
+        <p:txBody>
+          <a:bodyPr wrap="square" lIns="0" rIns="0" tIns="0" bIns="0">
+            <a:spAutoFit/>
+          </a:bodyPr>
+          <a:lstStyle/>
+          <a:p>
+            <a:pPr algn="ctr"/>
+            <a:r>
+              <a:rPr sz="2400">
+                <a:solidFill>
+                  <a:srgbClr val="0F6BFF"/>
+                </a:solidFill>
+                <a:latin typeface="Aptos"/>
+              </a:rPr>
+              <a:t>Move the artifact. The digest stays. Only the access changes.</a:t>
+            </a:r>
+          </a:p>
+        </p:txBody>
+      </p:sp>
     </p:spTree>
   </p:cSld>
   <p:clrMapOvr>
@@ -9877,7 +11513,7 @@
           <a:lstStyle/>
           <a:p>
             <a:r>
-              <a:t>One component wraps every artifact, signed once.</a:t>
+              <a:t>Wraps every artifact. Signs the whole release.</a:t>
             </a:r>
           </a:p>
         </p:txBody>
@@ -10499,194 +12135,6 @@
           </a:p>
         </p:txBody>
       </p:sp>
-      <p:sp>
-        <p:nvSpPr>
-          <p:cNvPr id="5" name="Rectangle 4"/>
-          <p:cNvSpPr/>
-          <p:nvPr/>
-        </p:nvSpPr>
-        <p:spPr>
-          <a:xfrm>
-            <a:off x="12763500" y="4714875"/>
-            <a:ext cx="57150" cy="809625"/>
-          </a:xfrm>
-          <a:prstGeom prst="rect">
-            <a:avLst/>
-          </a:prstGeom>
-          <a:solidFill>
-            <a:srgbClr val="0F6BFF"/>
-          </a:solidFill>
-          <a:ln>
-            <a:noFill/>
-          </a:ln>
-        </p:spPr>
-        <p:style>
-          <a:lnRef idx="1">
-            <a:schemeClr val="accent1"/>
-          </a:lnRef>
-          <a:fillRef idx="3">
-            <a:schemeClr val="accent1"/>
-          </a:fillRef>
-          <a:effectRef idx="2">
-            <a:schemeClr val="accent1"/>
-          </a:effectRef>
-          <a:fontRef idx="minor">
-            <a:schemeClr val="lt1"/>
-          </a:fontRef>
-        </p:style>
-        <p:txBody>
-          <a:bodyPr rtlCol="0" anchor="ctr"/>
-          <a:lstStyle/>
-          <a:p>
-            <a:pPr algn="ctr"/>
-          </a:p>
-        </p:txBody>
-      </p:sp>
-      <p:sp>
-        <p:nvSpPr>
-          <p:cNvPr id="6" name="TextBox 5"/>
-          <p:cNvSpPr txBox="1"/>
-          <p:nvPr/>
-        </p:nvSpPr>
-        <p:spPr>
-          <a:xfrm>
-            <a:off x="12934950" y="4714875"/>
-            <a:ext cx="4210050" cy="809625"/>
-          </a:xfrm>
-          <a:prstGeom prst="rect">
-            <a:avLst/>
-          </a:prstGeom>
-          <a:noFill/>
-        </p:spPr>
-        <p:txBody>
-          <a:bodyPr wrap="square" lIns="0" rIns="0" tIns="0" bIns="0" anchor="t">
-            <a:spAutoFit/>
-          </a:bodyPr>
-          <a:lstStyle/>
-          <a:p>
-            <a:pPr algn="l"/>
-            <a:r>
-              <a:rPr sz="1600" b="1">
-                <a:solidFill>
-                  <a:srgbClr val="0F6BFF"/>
-                </a:solidFill>
-                <a:latin typeface="Aptos"/>
-              </a:rPr>
-              <a:t>input:  by value</a:t>
-            </a:r>
-          </a:p>
-          <a:p>
-            <a:pPr algn="l">
-              <a:spcBef>
-                <a:spcPts val="400"/>
-              </a:spcBef>
-            </a:pPr>
-            <a:r>
-              <a:rPr sz="1500">
-                <a:solidFill>
-                  <a:srgbClr val="6B7280"/>
-                </a:solidFill>
-                <a:latin typeface="Aptos"/>
-              </a:rPr>
-              <a:t>Embed bytes at pack time.</a:t>
-            </a:r>
-          </a:p>
-        </p:txBody>
-      </p:sp>
-      <p:sp>
-        <p:nvSpPr>
-          <p:cNvPr id="7" name="Rectangle 6"/>
-          <p:cNvSpPr/>
-          <p:nvPr/>
-        </p:nvSpPr>
-        <p:spPr>
-          <a:xfrm>
-            <a:off x="12763500" y="6191250"/>
-            <a:ext cx="57150" cy="809625"/>
-          </a:xfrm>
-          <a:prstGeom prst="rect">
-            <a:avLst/>
-          </a:prstGeom>
-          <a:solidFill>
-            <a:srgbClr val="0F6BFF"/>
-          </a:solidFill>
-          <a:ln>
-            <a:noFill/>
-          </a:ln>
-        </p:spPr>
-        <p:style>
-          <a:lnRef idx="1">
-            <a:schemeClr val="accent1"/>
-          </a:lnRef>
-          <a:fillRef idx="3">
-            <a:schemeClr val="accent1"/>
-          </a:fillRef>
-          <a:effectRef idx="2">
-            <a:schemeClr val="accent1"/>
-          </a:effectRef>
-          <a:fontRef idx="minor">
-            <a:schemeClr val="lt1"/>
-          </a:fontRef>
-        </p:style>
-        <p:txBody>
-          <a:bodyPr rtlCol="0" anchor="ctr"/>
-          <a:lstStyle/>
-          <a:p>
-            <a:pPr algn="ctr"/>
-          </a:p>
-        </p:txBody>
-      </p:sp>
-      <p:sp>
-        <p:nvSpPr>
-          <p:cNvPr id="8" name="TextBox 7"/>
-          <p:cNvSpPr txBox="1"/>
-          <p:nvPr/>
-        </p:nvSpPr>
-        <p:spPr>
-          <a:xfrm>
-            <a:off x="12934950" y="6191250"/>
-            <a:ext cx="4210050" cy="809625"/>
-          </a:xfrm>
-          <a:prstGeom prst="rect">
-            <a:avLst/>
-          </a:prstGeom>
-          <a:noFill/>
-        </p:spPr>
-        <p:txBody>
-          <a:bodyPr wrap="square" lIns="0" rIns="0" tIns="0" bIns="0" anchor="t">
-            <a:spAutoFit/>
-          </a:bodyPr>
-          <a:lstStyle/>
-          <a:p>
-            <a:pPr algn="l"/>
-            <a:r>
-              <a:rPr sz="1600" b="1">
-                <a:solidFill>
-                  <a:srgbClr val="0F6BFF"/>
-                </a:solidFill>
-                <a:latin typeface="Aptos"/>
-              </a:rPr>
-              <a:t>access:  by reference</a:t>
-            </a:r>
-          </a:p>
-          <a:p>
-            <a:pPr algn="l">
-              <a:spcBef>
-                <a:spcPts val="400"/>
-              </a:spcBef>
-            </a:pPr>
-            <a:r>
-              <a:rPr sz="1500">
-                <a:solidFill>
-                  <a:srgbClr val="6B7280"/>
-                </a:solidFill>
-                <a:latin typeface="Aptos"/>
-              </a:rPr>
-              <a:t>Resolve external artifact at pack time.</a:t>
-            </a:r>
-          </a:p>
-        </p:txBody>
-      </p:sp>
     </p:spTree>
   </p:cSld>
   <p:clrMapOvr>
@@ -10756,7 +12204,7 @@
         <p:spPr>
           <a:xfrm>
             <a:off x="1143000" y="2667000"/>
-            <a:ext cx="11239500" cy="5905500"/>
+            <a:ext cx="14287500" cy="6477000"/>
           </a:xfrm>
           <a:prstGeom prst="roundRect">
             <a:avLst/>
@@ -10800,13 +12248,13 @@
               </a:spcAft>
             </a:pPr>
             <a:r>
-              <a:rPr sz="1600">
+              <a:rPr sz="1400">
                 <a:solidFill>
                   <a:srgbClr val="6B7280"/>
                 </a:solidFill>
                 <a:latin typeface="Consolas"/>
               </a:rPr>
-              <a:t>component:                                  # (fields trimmed)</a:t>
+              <a:t>component:                              # (fields trimmed)</a:t>
             </a:r>
           </a:p>
           <a:p>
@@ -10822,7 +12270,7 @@
               </a:spcAft>
             </a:pPr>
             <a:r>
-              <a:rPr sz="1600">
+              <a:rPr sz="1400">
                 <a:solidFill>
                   <a:srgbClr val="000000"/>
                 </a:solidFill>
@@ -10844,7 +12292,7 @@
               </a:spcAft>
             </a:pPr>
             <a:r>
-              <a:rPr sz="1600">
+              <a:rPr sz="1400">
                 <a:solidFill>
                   <a:srgbClr val="000000"/>
                 </a:solidFill>
@@ -10866,7 +12314,7 @@
               </a:spcAft>
             </a:pPr>
             <a:r>
-              <a:rPr sz="1600">
+              <a:rPr sz="1400">
                 <a:solidFill>
                   <a:srgbClr val="0A3A99"/>
                 </a:solidFill>
@@ -10888,7 +12336,7 @@
               </a:spcAft>
             </a:pPr>
             <a:r>
-              <a:rPr sz="1600">
+              <a:rPr sz="1400">
                 <a:solidFill>
                   <a:srgbClr val="000000"/>
                 </a:solidFill>
@@ -10910,7 +12358,7 @@
               </a:spcAft>
             </a:pPr>
             <a:r>
-              <a:rPr sz="1600">
+              <a:rPr sz="1400">
                 <a:solidFill>
                   <a:srgbClr val="000000"/>
                 </a:solidFill>
@@ -10932,13 +12380,13 @@
               </a:spcAft>
             </a:pPr>
             <a:r>
-              <a:rPr sz="1600">
+              <a:rPr sz="1400">
                 <a:solidFill>
                   <a:srgbClr val="6B7280"/>
                 </a:solidFill>
                 <a:latin typeface="Consolas"/>
               </a:rPr>
-              <a:t>      access:                                  # excluded from signature</a:t>
+              <a:t>      access:                          # excluded — rewritten on transfer</a:t>
             </a:r>
           </a:p>
           <a:p>
@@ -10954,7 +12402,7 @@
               </a:spcAft>
             </a:pPr>
             <a:r>
-              <a:rPr sz="1600">
+              <a:rPr sz="1400">
                 <a:solidFill>
                   <a:srgbClr val="000000"/>
                 </a:solidFill>
@@ -10976,7 +12424,7 @@
               </a:spcAft>
             </a:pPr>
             <a:r>
-              <a:rPr sz="1600">
+              <a:rPr sz="1400">
                 <a:solidFill>
                   <a:srgbClr val="000000"/>
                 </a:solidFill>
@@ -10998,13 +12446,13 @@
               </a:spcAft>
             </a:pPr>
             <a:r>
-              <a:rPr sz="1600">
-                <a:solidFill>
-                  <a:srgbClr val="6B7280"/>
+              <a:rPr sz="1400">
+                <a:solidFill>
+                  <a:srgbClr val="000000"/>
                 </a:solidFill>
                 <a:latin typeface="Consolas"/>
               </a:rPr>
-              <a:t>      digest:                                  # input to hash</a:t>
+              <a:t> </a:t>
             </a:r>
           </a:p>
           <a:p>
@@ -11020,13 +12468,13 @@
               </a:spcAft>
             </a:pPr>
             <a:r>
-              <a:rPr sz="1600">
-                <a:solidFill>
-                  <a:srgbClr val="000000"/>
+              <a:rPr sz="1400">
+                <a:solidFill>
+                  <a:srgbClr val="6B7280"/>
                 </a:solidFill>
                 <a:latin typeface="Consolas"/>
               </a:rPr>
-              <a:t>        hashAlgorithm: SHA-256</a:t>
+              <a:t>      digest:                          # content identity — input to descriptor hash</a:t>
             </a:r>
           </a:p>
           <a:p>
@@ -11042,13 +12490,13 @@
               </a:spcAft>
             </a:pPr>
             <a:r>
-              <a:rPr sz="1600">
-                <a:solidFill>
-                  <a:srgbClr val="000000"/>
+              <a:rPr sz="1400">
+                <a:solidFill>
+                  <a:srgbClr val="0F6BFF"/>
                 </a:solidFill>
                 <a:latin typeface="Consolas"/>
               </a:rPr>
-              <a:t>        value: 262578cde928d5c9eba3bce0...</a:t>
+              <a:t>        hashAlgorithm: SHA-256</a:t>
             </a:r>
           </a:p>
           <a:p>
@@ -11064,13 +12512,13 @@
               </a:spcAft>
             </a:pPr>
             <a:r>
-              <a:rPr sz="1600">
-                <a:solidFill>
-                  <a:srgbClr val="6B7280"/>
+              <a:rPr sz="1400">
+                <a:solidFill>
+                  <a:srgbClr val="0F6BFF"/>
                 </a:solidFill>
                 <a:latin typeface="Consolas"/>
               </a:rPr>
-              <a:t>    - ...                                     # more resources, references</a:t>
+              <a:t>        value: 262578cde928d5c9eba3bce0...</a:t>
             </a:r>
           </a:p>
           <a:p>
@@ -11086,13 +12534,13 @@
               </a:spcAft>
             </a:pPr>
             <a:r>
-              <a:rPr sz="1600">
-                <a:solidFill>
-                  <a:srgbClr val="0F6BFF"/>
+              <a:rPr sz="1400">
+                <a:solidFill>
+                  <a:srgbClr val="000000"/>
                 </a:solidFill>
                 <a:latin typeface="Consolas"/>
               </a:rPr>
-              <a:t>signatures:</a:t>
+              <a:t> </a:t>
             </a:r>
           </a:p>
           <a:p>
@@ -11108,13 +12556,13 @@
               </a:spcAft>
             </a:pPr>
             <a:r>
-              <a:rPr sz="1600">
-                <a:solidFill>
-                  <a:srgbClr val="000000"/>
+              <a:rPr sz="1400">
+                <a:solidFill>
+                  <a:srgbClr val="6B7280"/>
                 </a:solidFill>
                 <a:latin typeface="Consolas"/>
               </a:rPr>
-              <a:t>  - name: acme-release-key</a:t>
+              <a:t>signatures:                            # one hash over the canonicalized descriptor</a:t>
             </a:r>
           </a:p>
           <a:p>
@@ -11130,13 +12578,13 @@
               </a:spcAft>
             </a:pPr>
             <a:r>
-              <a:rPr sz="1600">
-                <a:solidFill>
-                  <a:srgbClr val="6B7280"/>
+              <a:rPr sz="1400">
+                <a:solidFill>
+                  <a:srgbClr val="0F6BFF"/>
                 </a:solidFill>
                 <a:latin typeface="Consolas"/>
               </a:rPr>
-              <a:t>    digest:                                  # of the descriptor</a:t>
+              <a:t>  - name: acme-release-key</a:t>
             </a:r>
           </a:p>
           <a:p>
@@ -11152,13 +12600,13 @@
               </a:spcAft>
             </a:pPr>
             <a:r>
-              <a:rPr sz="1600">
-                <a:solidFill>
-                  <a:srgbClr val="000000"/>
+              <a:rPr sz="1400">
+                <a:solidFill>
+                  <a:srgbClr val="6B7280"/>
                 </a:solidFill>
                 <a:latin typeface="Consolas"/>
               </a:rPr>
-              <a:t>      hashAlgorithm: SHA-256</a:t>
+              <a:t>    digest:                            # of the descriptor</a:t>
             </a:r>
           </a:p>
           <a:p>
@@ -11174,13 +12622,13 @@
               </a:spcAft>
             </a:pPr>
             <a:r>
-              <a:rPr sz="1600">
-                <a:solidFill>
-                  <a:srgbClr val="000000"/>
+              <a:rPr sz="1400">
+                <a:solidFill>
+                  <a:srgbClr val="0F6BFF"/>
                 </a:solidFill>
                 <a:latin typeface="Consolas"/>
               </a:rPr>
-              <a:t>      value: a4b1c2d3e4f5...</a:t>
+              <a:t>      hashAlgorithm: SHA-256</a:t>
             </a:r>
           </a:p>
           <a:p>
@@ -11196,13 +12644,13 @@
               </a:spcAft>
             </a:pPr>
             <a:r>
-              <a:rPr sz="1600">
-                <a:solidFill>
-                  <a:srgbClr val="0A3A99"/>
+              <a:rPr sz="1400">
+                <a:solidFill>
+                  <a:srgbClr val="0F6BFF"/>
                 </a:solidFill>
                 <a:latin typeface="Consolas"/>
               </a:rPr>
-              <a:t>    signature:</a:t>
+              <a:t>      value: a4b1c2d3e4f5...</a:t>
             </a:r>
           </a:p>
           <a:p>
@@ -11218,13 +12666,13 @@
               </a:spcAft>
             </a:pPr>
             <a:r>
-              <a:rPr sz="1600">
-                <a:solidFill>
-                  <a:srgbClr val="000000"/>
+              <a:rPr sz="1400">
+                <a:solidFill>
+                  <a:srgbClr val="0A3A99"/>
                 </a:solidFill>
                 <a:latin typeface="Consolas"/>
               </a:rPr>
-              <a:t>      algorithm: RSASSA-PSS</a:t>
+              <a:t>    signature:</a:t>
             </a:r>
           </a:p>
           <a:p>
@@ -11240,295 +12688,35 @@
               </a:spcAft>
             </a:pPr>
             <a:r>
-              <a:rPr sz="1600">
-                <a:solidFill>
-                  <a:srgbClr val="000000"/>
+              <a:rPr sz="1400">
+                <a:solidFill>
+                  <a:srgbClr val="0F6BFF"/>
                 </a:solidFill>
                 <a:latin typeface="Consolas"/>
               </a:rPr>
+              <a:t>      algorithm: RSASSA-PSS</a:t>
+            </a:r>
+          </a:p>
+          <a:p>
+            <a:pPr algn="l">
+              <a:lnSpc>
+                <a:spcPct val="115000"/>
+              </a:lnSpc>
+              <a:spcBef>
+                <a:spcPts val="0"/>
+              </a:spcBef>
+              <a:spcAft>
+                <a:spcPts val="0"/>
+              </a:spcAft>
+            </a:pPr>
+            <a:r>
+              <a:rPr sz="1400">
+                <a:solidFill>
+                  <a:srgbClr val="0F6BFF"/>
+                </a:solidFill>
+                <a:latin typeface="Consolas"/>
+              </a:rPr>
               <a:t>      value: &lt;hex-encoded signature&gt;</a:t>
-            </a:r>
-          </a:p>
-        </p:txBody>
-      </p:sp>
-      <p:sp>
-        <p:nvSpPr>
-          <p:cNvPr id="5" name="Rectangle 4"/>
-          <p:cNvSpPr/>
-          <p:nvPr/>
-        </p:nvSpPr>
-        <p:spPr>
-          <a:xfrm>
-            <a:off x="12763500" y="4333875"/>
-            <a:ext cx="57150" cy="666750"/>
-          </a:xfrm>
-          <a:prstGeom prst="rect">
-            <a:avLst/>
-          </a:prstGeom>
-          <a:solidFill>
-            <a:srgbClr val="0F6BFF"/>
-          </a:solidFill>
-          <a:ln>
-            <a:noFill/>
-          </a:ln>
-        </p:spPr>
-        <p:style>
-          <a:lnRef idx="1">
-            <a:schemeClr val="accent1"/>
-          </a:lnRef>
-          <a:fillRef idx="3">
-            <a:schemeClr val="accent1"/>
-          </a:fillRef>
-          <a:effectRef idx="2">
-            <a:schemeClr val="accent1"/>
-          </a:effectRef>
-          <a:fontRef idx="minor">
-            <a:schemeClr val="lt1"/>
-          </a:fontRef>
-        </p:style>
-        <p:txBody>
-          <a:bodyPr rtlCol="0" anchor="ctr"/>
-          <a:lstStyle/>
-          <a:p>
-            <a:pPr algn="ctr"/>
-          </a:p>
-        </p:txBody>
-      </p:sp>
-      <p:sp>
-        <p:nvSpPr>
-          <p:cNvPr id="6" name="TextBox 5"/>
-          <p:cNvSpPr txBox="1"/>
-          <p:nvPr/>
-        </p:nvSpPr>
-        <p:spPr>
-          <a:xfrm>
-            <a:off x="12934950" y="4333875"/>
-            <a:ext cx="4210050" cy="666750"/>
-          </a:xfrm>
-          <a:prstGeom prst="rect">
-            <a:avLst/>
-          </a:prstGeom>
-          <a:noFill/>
-        </p:spPr>
-        <p:txBody>
-          <a:bodyPr wrap="square" lIns="0" rIns="0" tIns="0" bIns="0" anchor="t">
-            <a:spAutoFit/>
-          </a:bodyPr>
-          <a:lstStyle/>
-          <a:p>
-            <a:pPr algn="l"/>
-            <a:r>
-              <a:rPr sz="1600" b="1">
-                <a:solidFill>
-                  <a:srgbClr val="0F6BFF"/>
-                </a:solidFill>
-                <a:latin typeface="Aptos"/>
-              </a:rPr>
-              <a:t>access:  excluded</a:t>
-            </a:r>
-          </a:p>
-          <a:p>
-            <a:pPr algn="l">
-              <a:spcBef>
-                <a:spcPts val="400"/>
-              </a:spcBef>
-            </a:pPr>
-            <a:r>
-              <a:rPr sz="1500">
-                <a:solidFill>
-                  <a:srgbClr val="6B7280"/>
-                </a:solidFill>
-                <a:latin typeface="Aptos"/>
-              </a:rPr>
-              <a:t>Rewritten on every transfer.</a:t>
-            </a:r>
-          </a:p>
-        </p:txBody>
-      </p:sp>
-      <p:sp>
-        <p:nvSpPr>
-          <p:cNvPr id="7" name="Rectangle 6"/>
-          <p:cNvSpPr/>
-          <p:nvPr/>
-        </p:nvSpPr>
-        <p:spPr>
-          <a:xfrm>
-            <a:off x="12763500" y="5048250"/>
-            <a:ext cx="57150" cy="666750"/>
-          </a:xfrm>
-          <a:prstGeom prst="rect">
-            <a:avLst/>
-          </a:prstGeom>
-          <a:solidFill>
-            <a:srgbClr val="0F6BFF"/>
-          </a:solidFill>
-          <a:ln>
-            <a:noFill/>
-          </a:ln>
-        </p:spPr>
-        <p:style>
-          <a:lnRef idx="1">
-            <a:schemeClr val="accent1"/>
-          </a:lnRef>
-          <a:fillRef idx="3">
-            <a:schemeClr val="accent1"/>
-          </a:fillRef>
-          <a:effectRef idx="2">
-            <a:schemeClr val="accent1"/>
-          </a:effectRef>
-          <a:fontRef idx="minor">
-            <a:schemeClr val="lt1"/>
-          </a:fontRef>
-        </p:style>
-        <p:txBody>
-          <a:bodyPr rtlCol="0" anchor="ctr"/>
-          <a:lstStyle/>
-          <a:p>
-            <a:pPr algn="ctr"/>
-          </a:p>
-        </p:txBody>
-      </p:sp>
-      <p:sp>
-        <p:nvSpPr>
-          <p:cNvPr id="8" name="TextBox 7"/>
-          <p:cNvSpPr txBox="1"/>
-          <p:nvPr/>
-        </p:nvSpPr>
-        <p:spPr>
-          <a:xfrm>
-            <a:off x="12934950" y="5048250"/>
-            <a:ext cx="4210050" cy="666750"/>
-          </a:xfrm>
-          <a:prstGeom prst="rect">
-            <a:avLst/>
-          </a:prstGeom>
-          <a:noFill/>
-        </p:spPr>
-        <p:txBody>
-          <a:bodyPr wrap="square" lIns="0" rIns="0" tIns="0" bIns="0" anchor="t">
-            <a:spAutoFit/>
-          </a:bodyPr>
-          <a:lstStyle/>
-          <a:p>
-            <a:pPr algn="l"/>
-            <a:r>
-              <a:rPr sz="1600" b="1">
-                <a:solidFill>
-                  <a:srgbClr val="0F6BFF"/>
-                </a:solidFill>
-                <a:latin typeface="Aptos"/>
-              </a:rPr>
-              <a:t>digest:  content identity</a:t>
-            </a:r>
-          </a:p>
-          <a:p>
-            <a:pPr algn="l">
-              <a:spcBef>
-                <a:spcPts val="400"/>
-              </a:spcBef>
-            </a:pPr>
-            <a:r>
-              <a:rPr sz="1500">
-                <a:solidFill>
-                  <a:srgbClr val="6B7280"/>
-                </a:solidFill>
-                <a:latin typeface="Aptos"/>
-              </a:rPr>
-              <a:t>Input to the descriptor hash.</a:t>
-            </a:r>
-          </a:p>
-        </p:txBody>
-      </p:sp>
-      <p:sp>
-        <p:nvSpPr>
-          <p:cNvPr id="9" name="Rectangle 8"/>
-          <p:cNvSpPr/>
-          <p:nvPr/>
-        </p:nvSpPr>
-        <p:spPr>
-          <a:xfrm>
-            <a:off x="12763500" y="6048375"/>
-            <a:ext cx="57150" cy="857250"/>
-          </a:xfrm>
-          <a:prstGeom prst="rect">
-            <a:avLst/>
-          </a:prstGeom>
-          <a:solidFill>
-            <a:srgbClr val="0F6BFF"/>
-          </a:solidFill>
-          <a:ln>
-            <a:noFill/>
-          </a:ln>
-        </p:spPr>
-        <p:style>
-          <a:lnRef idx="1">
-            <a:schemeClr val="accent1"/>
-          </a:lnRef>
-          <a:fillRef idx="3">
-            <a:schemeClr val="accent1"/>
-          </a:fillRef>
-          <a:effectRef idx="2">
-            <a:schemeClr val="accent1"/>
-          </a:effectRef>
-          <a:fontRef idx="minor">
-            <a:schemeClr val="lt1"/>
-          </a:fontRef>
-        </p:style>
-        <p:txBody>
-          <a:bodyPr rtlCol="0" anchor="ctr"/>
-          <a:lstStyle/>
-          <a:p>
-            <a:pPr algn="ctr"/>
-          </a:p>
-        </p:txBody>
-      </p:sp>
-      <p:sp>
-        <p:nvSpPr>
-          <p:cNvPr id="10" name="TextBox 9"/>
-          <p:cNvSpPr txBox="1"/>
-          <p:nvPr/>
-        </p:nvSpPr>
-        <p:spPr>
-          <a:xfrm>
-            <a:off x="12934950" y="6048375"/>
-            <a:ext cx="4210050" cy="857250"/>
-          </a:xfrm>
-          <a:prstGeom prst="rect">
-            <a:avLst/>
-          </a:prstGeom>
-          <a:noFill/>
-        </p:spPr>
-        <p:txBody>
-          <a:bodyPr wrap="square" lIns="0" rIns="0" tIns="0" bIns="0" anchor="t">
-            <a:spAutoFit/>
-          </a:bodyPr>
-          <a:lstStyle/>
-          <a:p>
-            <a:pPr algn="l"/>
-            <a:r>
-              <a:rPr sz="1600" b="1">
-                <a:solidFill>
-                  <a:srgbClr val="0F6BFF"/>
-                </a:solidFill>
-                <a:latin typeface="Aptos"/>
-              </a:rPr>
-              <a:t>signature:  one hash</a:t>
-            </a:r>
-          </a:p>
-          <a:p>
-            <a:pPr algn="l">
-              <a:spcBef>
-                <a:spcPts val="400"/>
-              </a:spcBef>
-            </a:pPr>
-            <a:r>
-              <a:rPr sz="1500">
-                <a:solidFill>
-                  <a:srgbClr val="6B7280"/>
-                </a:solidFill>
-                <a:latin typeface="Aptos"/>
-              </a:rPr>
-              <a:t>Over the canonicalized descriptor.</a:t>
             </a:r>
           </a:p>
         </p:txBody>
@@ -11593,9 +12781,116 @@
           </a:p>
         </p:txBody>
       </p:sp>
+      <p:sp>
+        <p:nvSpPr>
+          <p:cNvPr id="4" name="Picture Placeholder 3"/>
+          <p:cNvSpPr>
+            <a:spLocks noGrp="1"/>
+          </p:cNvSpPr>
+          <p:nvPr>
+            <p:ph type="pic" idx="10"/>
+          </p:nvPr>
+        </p:nvSpPr>
+        <p:spPr/>
+      </p:sp>
+      <p:sp>
+        <p:nvSpPr>
+          <p:cNvPr id="5" name="Rounded Rectangle 4"/>
+          <p:cNvSpPr/>
+          <p:nvPr/>
+        </p:nvSpPr>
+        <p:spPr>
+          <a:xfrm>
+            <a:off x="660796" y="4214812"/>
+            <a:ext cx="3214687" cy="3571875"/>
+          </a:xfrm>
+          <a:prstGeom prst="roundRect">
+            <a:avLst>
+              <a:gd name="adj" fmla="val 3888"/>
+            </a:avLst>
+          </a:prstGeom>
+          <a:solidFill>
+            <a:srgbClr val="F3F4F6"/>
+          </a:solidFill>
+          <a:ln>
+            <a:noFill/>
+          </a:ln>
+          <a:effectLst>
+            <a:outerShdw blurRad="28575" dist="28575" dir="5400000" rotWithShape="0">
+              <a:srgbClr val="000000">
+                <a:alpha val="30000"/>
+              </a:srgbClr>
+            </a:outerShdw>
+          </a:effectLst>
+        </p:spPr>
+        <p:style>
+          <a:lnRef idx="1">
+            <a:schemeClr val="accent1"/>
+          </a:lnRef>
+          <a:fillRef idx="3">
+            <a:schemeClr val="accent1"/>
+          </a:fillRef>
+          <a:effectRef idx="2">
+            <a:schemeClr val="accent1"/>
+          </a:effectRef>
+          <a:fontRef idx="minor">
+            <a:schemeClr val="lt1"/>
+          </a:fontRef>
+        </p:style>
+        <p:txBody>
+          <a:bodyPr rtlCol="0" anchor="ctr"/>
+          <a:lstStyle/>
+          <a:p>
+            <a:pPr algn="ctr"/>
+          </a:p>
+        </p:txBody>
+      </p:sp>
+      <p:sp>
+        <p:nvSpPr>
+          <p:cNvPr id="6" name="Rectangle 5"/>
+          <p:cNvSpPr/>
+          <p:nvPr/>
+        </p:nvSpPr>
+        <p:spPr>
+          <a:xfrm>
+            <a:off x="660796" y="4214812"/>
+            <a:ext cx="3214687" cy="35718"/>
+          </a:xfrm>
+          <a:prstGeom prst="rect">
+            <a:avLst/>
+          </a:prstGeom>
+          <a:solidFill>
+            <a:srgbClr val="0F6BFF"/>
+          </a:solidFill>
+          <a:ln>
+            <a:noFill/>
+          </a:ln>
+        </p:spPr>
+        <p:style>
+          <a:lnRef idx="1">
+            <a:schemeClr val="accent1"/>
+          </a:lnRef>
+          <a:fillRef idx="3">
+            <a:schemeClr val="accent1"/>
+          </a:fillRef>
+          <a:effectRef idx="2">
+            <a:schemeClr val="accent1"/>
+          </a:effectRef>
+          <a:fontRef idx="minor">
+            <a:schemeClr val="lt1"/>
+          </a:fontRef>
+        </p:style>
+        <p:txBody>
+          <a:bodyPr rtlCol="0" anchor="ctr"/>
+          <a:lstStyle/>
+          <a:p>
+            <a:pPr algn="ctr"/>
+          </a:p>
+        </p:txBody>
+      </p:sp>
       <p:pic>
         <p:nvPicPr>
-          <p:cNvPr id="4" name="Picture 3" descr="05-pack-sign-transport-deploy-v2_1800.png"/>
+          <p:cNvPr id="7" name="Picture 6" descr="package_192_0F6BFF_sw1.png"/>
           <p:cNvPicPr>
             <a:picLocks noChangeAspect="1"/>
           </p:cNvPicPr>
@@ -11609,14 +12904,1354 @@
         </p:blipFill>
         <p:spPr>
           <a:xfrm>
-            <a:off x="571500" y="3586162"/>
-            <a:ext cx="17145000" cy="4829175"/>
+            <a:off x="946546" y="4536281"/>
+            <a:ext cx="535781" cy="535781"/>
           </a:xfrm>
           <a:prstGeom prst="rect">
             <a:avLst/>
           </a:prstGeom>
         </p:spPr>
       </p:pic>
+      <p:sp>
+        <p:nvSpPr>
+          <p:cNvPr id="8" name="TextBox 7"/>
+          <p:cNvSpPr txBox="1"/>
+          <p:nvPr/>
+        </p:nvSpPr>
+        <p:spPr>
+          <a:xfrm>
+            <a:off x="946546" y="5429250"/>
+            <a:ext cx="2643187" cy="392906"/>
+          </a:xfrm>
+          <a:prstGeom prst="rect">
+            <a:avLst/>
+          </a:prstGeom>
+          <a:noFill/>
+        </p:spPr>
+        <p:txBody>
+          <a:bodyPr wrap="square" lIns="0" rIns="0" tIns="0" bIns="0" anchor="ctr">
+            <a:spAutoFit/>
+          </a:bodyPr>
+          <a:lstStyle/>
+          <a:p>
+            <a:r>
+              <a:rPr sz="3000" b="1" i="0">
+                <a:solidFill>
+                  <a:srgbClr val="0A3A99"/>
+                </a:solidFill>
+                <a:latin typeface="Aptos"/>
+              </a:rPr>
+              <a:t>PACK</a:t>
+            </a:r>
+          </a:p>
+        </p:txBody>
+      </p:sp>
+      <p:sp>
+        <p:nvSpPr>
+          <p:cNvPr id="9" name="TextBox 8"/>
+          <p:cNvSpPr txBox="1"/>
+          <p:nvPr/>
+        </p:nvSpPr>
+        <p:spPr>
+          <a:xfrm>
+            <a:off x="946546" y="5911453"/>
+            <a:ext cx="2643187" cy="892968"/>
+          </a:xfrm>
+          <a:prstGeom prst="rect">
+            <a:avLst/>
+          </a:prstGeom>
+          <a:noFill/>
+        </p:spPr>
+        <p:txBody>
+          <a:bodyPr wrap="square" lIns="0" rIns="0" tIns="0" bIns="0">
+            <a:spAutoFit/>
+          </a:bodyPr>
+          <a:lstStyle/>
+          <a:p>
+            <a:pPr>
+              <a:lnSpc>
+                <a:spcPct val="125000"/>
+              </a:lnSpc>
+            </a:pPr>
+            <a:r>
+              <a:rPr sz="2200" b="0" i="0">
+                <a:solidFill>
+                  <a:srgbClr val="333333"/>
+                </a:solidFill>
+                <a:latin typeface="Aptos"/>
+              </a:rPr>
+              <a:t>Bundle your software</a:t>
+            </a:r>
+          </a:p>
+          <a:p>
+            <a:pPr>
+              <a:lnSpc>
+                <a:spcPct val="125000"/>
+              </a:lnSpc>
+            </a:pPr>
+            <a:r>
+              <a:rPr sz="2200" b="0" i="0">
+                <a:solidFill>
+                  <a:srgbClr val="333333"/>
+                </a:solidFill>
+                <a:latin typeface="Aptos"/>
+              </a:rPr>
+              <a:t>One source of truth.</a:t>
+            </a:r>
+          </a:p>
+        </p:txBody>
+      </p:sp>
+      <p:sp>
+        <p:nvSpPr>
+          <p:cNvPr id="10" name="Rounded Rectangle 9"/>
+          <p:cNvSpPr/>
+          <p:nvPr/>
+        </p:nvSpPr>
+        <p:spPr>
+          <a:xfrm>
+            <a:off x="4321968" y="4214812"/>
+            <a:ext cx="3214687" cy="3571875"/>
+          </a:xfrm>
+          <a:prstGeom prst="roundRect">
+            <a:avLst>
+              <a:gd name="adj" fmla="val 3888"/>
+            </a:avLst>
+          </a:prstGeom>
+          <a:solidFill>
+            <a:srgbClr val="F3F4F6"/>
+          </a:solidFill>
+          <a:ln>
+            <a:noFill/>
+          </a:ln>
+          <a:effectLst>
+            <a:outerShdw blurRad="28575" dist="28575" dir="5400000" rotWithShape="0">
+              <a:srgbClr val="000000">
+                <a:alpha val="30000"/>
+              </a:srgbClr>
+            </a:outerShdw>
+          </a:effectLst>
+        </p:spPr>
+        <p:style>
+          <a:lnRef idx="1">
+            <a:schemeClr val="accent1"/>
+          </a:lnRef>
+          <a:fillRef idx="3">
+            <a:schemeClr val="accent1"/>
+          </a:fillRef>
+          <a:effectRef idx="2">
+            <a:schemeClr val="accent1"/>
+          </a:effectRef>
+          <a:fontRef idx="minor">
+            <a:schemeClr val="lt1"/>
+          </a:fontRef>
+        </p:style>
+        <p:txBody>
+          <a:bodyPr rtlCol="0" anchor="ctr"/>
+          <a:lstStyle/>
+          <a:p>
+            <a:pPr algn="ctr"/>
+          </a:p>
+        </p:txBody>
+      </p:sp>
+      <p:sp>
+        <p:nvSpPr>
+          <p:cNvPr id="11" name="Rectangle 10"/>
+          <p:cNvSpPr/>
+          <p:nvPr/>
+        </p:nvSpPr>
+        <p:spPr>
+          <a:xfrm>
+            <a:off x="4321968" y="4214812"/>
+            <a:ext cx="3214687" cy="35718"/>
+          </a:xfrm>
+          <a:prstGeom prst="rect">
+            <a:avLst/>
+          </a:prstGeom>
+          <a:solidFill>
+            <a:srgbClr val="0F6BFF"/>
+          </a:solidFill>
+          <a:ln>
+            <a:noFill/>
+          </a:ln>
+        </p:spPr>
+        <p:style>
+          <a:lnRef idx="1">
+            <a:schemeClr val="accent1"/>
+          </a:lnRef>
+          <a:fillRef idx="3">
+            <a:schemeClr val="accent1"/>
+          </a:fillRef>
+          <a:effectRef idx="2">
+            <a:schemeClr val="accent1"/>
+          </a:effectRef>
+          <a:fontRef idx="minor">
+            <a:schemeClr val="lt1"/>
+          </a:fontRef>
+        </p:style>
+        <p:txBody>
+          <a:bodyPr rtlCol="0" anchor="ctr"/>
+          <a:lstStyle/>
+          <a:p>
+            <a:pPr algn="ctr"/>
+          </a:p>
+        </p:txBody>
+      </p:sp>
+      <p:pic>
+        <p:nvPicPr>
+          <p:cNvPr id="12" name="Picture 11" descr="shield-check_192_0F6BFF_sw1.png"/>
+          <p:cNvPicPr>
+            <a:picLocks noChangeAspect="1"/>
+          </p:cNvPicPr>
+          <p:nvPr/>
+        </p:nvPicPr>
+        <p:blipFill>
+          <a:blip r:embed="rId3"/>
+          <a:stretch>
+            <a:fillRect/>
+          </a:stretch>
+        </p:blipFill>
+        <p:spPr>
+          <a:xfrm>
+            <a:off x="4607718" y="4536281"/>
+            <a:ext cx="535781" cy="535781"/>
+          </a:xfrm>
+          <a:prstGeom prst="rect">
+            <a:avLst/>
+          </a:prstGeom>
+        </p:spPr>
+      </p:pic>
+      <p:sp>
+        <p:nvSpPr>
+          <p:cNvPr id="13" name="TextBox 12"/>
+          <p:cNvSpPr txBox="1"/>
+          <p:nvPr/>
+        </p:nvSpPr>
+        <p:spPr>
+          <a:xfrm>
+            <a:off x="4607718" y="5429250"/>
+            <a:ext cx="2643187" cy="392906"/>
+          </a:xfrm>
+          <a:prstGeom prst="rect">
+            <a:avLst/>
+          </a:prstGeom>
+          <a:noFill/>
+        </p:spPr>
+        <p:txBody>
+          <a:bodyPr wrap="square" lIns="0" rIns="0" tIns="0" bIns="0" anchor="ctr">
+            <a:spAutoFit/>
+          </a:bodyPr>
+          <a:lstStyle/>
+          <a:p>
+            <a:r>
+              <a:rPr sz="3000" b="1" i="0">
+                <a:solidFill>
+                  <a:srgbClr val="0A3A99"/>
+                </a:solidFill>
+                <a:latin typeface="Aptos"/>
+              </a:rPr>
+              <a:t>SIGN</a:t>
+            </a:r>
+          </a:p>
+        </p:txBody>
+      </p:sp>
+      <p:sp>
+        <p:nvSpPr>
+          <p:cNvPr id="14" name="TextBox 13"/>
+          <p:cNvSpPr txBox="1"/>
+          <p:nvPr/>
+        </p:nvSpPr>
+        <p:spPr>
+          <a:xfrm>
+            <a:off x="4607718" y="5911453"/>
+            <a:ext cx="2643187" cy="892968"/>
+          </a:xfrm>
+          <a:prstGeom prst="rect">
+            <a:avLst/>
+          </a:prstGeom>
+          <a:noFill/>
+        </p:spPr>
+        <p:txBody>
+          <a:bodyPr wrap="square" lIns="0" rIns="0" tIns="0" bIns="0">
+            <a:spAutoFit/>
+          </a:bodyPr>
+          <a:lstStyle/>
+          <a:p>
+            <a:pPr>
+              <a:lnSpc>
+                <a:spcPct val="125000"/>
+              </a:lnSpc>
+            </a:pPr>
+            <a:r>
+              <a:rPr sz="2200" b="0" i="0">
+                <a:solidFill>
+                  <a:srgbClr val="333333"/>
+                </a:solidFill>
+                <a:latin typeface="Aptos"/>
+              </a:rPr>
+              <a:t>One signature covers</a:t>
+            </a:r>
+          </a:p>
+          <a:p>
+            <a:pPr>
+              <a:lnSpc>
+                <a:spcPct val="125000"/>
+              </a:lnSpc>
+            </a:pPr>
+            <a:r>
+              <a:rPr sz="2200" b="0" i="0">
+                <a:solidFill>
+                  <a:srgbClr val="333333"/>
+                </a:solidFill>
+                <a:latin typeface="Aptos"/>
+              </a:rPr>
+              <a:t>all artifacts.</a:t>
+            </a:r>
+          </a:p>
+        </p:txBody>
+      </p:sp>
+      <p:sp>
+        <p:nvSpPr>
+          <p:cNvPr id="15" name="Rounded Rectangle 14"/>
+          <p:cNvSpPr/>
+          <p:nvPr/>
+        </p:nvSpPr>
+        <p:spPr>
+          <a:xfrm>
+            <a:off x="7983140" y="4214812"/>
+            <a:ext cx="3214687" cy="3571875"/>
+          </a:xfrm>
+          <a:prstGeom prst="roundRect">
+            <a:avLst>
+              <a:gd name="adj" fmla="val 3888"/>
+            </a:avLst>
+          </a:prstGeom>
+          <a:solidFill>
+            <a:srgbClr val="F3F4F6"/>
+          </a:solidFill>
+          <a:ln>
+            <a:noFill/>
+          </a:ln>
+          <a:effectLst>
+            <a:outerShdw blurRad="28575" dist="28575" dir="5400000" rotWithShape="0">
+              <a:srgbClr val="000000">
+                <a:alpha val="30000"/>
+              </a:srgbClr>
+            </a:outerShdw>
+          </a:effectLst>
+        </p:spPr>
+        <p:style>
+          <a:lnRef idx="1">
+            <a:schemeClr val="accent1"/>
+          </a:lnRef>
+          <a:fillRef idx="3">
+            <a:schemeClr val="accent1"/>
+          </a:fillRef>
+          <a:effectRef idx="2">
+            <a:schemeClr val="accent1"/>
+          </a:effectRef>
+          <a:fontRef idx="minor">
+            <a:schemeClr val="lt1"/>
+          </a:fontRef>
+        </p:style>
+        <p:txBody>
+          <a:bodyPr rtlCol="0" anchor="ctr"/>
+          <a:lstStyle/>
+          <a:p>
+            <a:pPr algn="ctr"/>
+          </a:p>
+        </p:txBody>
+      </p:sp>
+      <p:sp>
+        <p:nvSpPr>
+          <p:cNvPr id="16" name="Rectangle 15"/>
+          <p:cNvSpPr/>
+          <p:nvPr/>
+        </p:nvSpPr>
+        <p:spPr>
+          <a:xfrm>
+            <a:off x="7983140" y="4214812"/>
+            <a:ext cx="3214687" cy="35718"/>
+          </a:xfrm>
+          <a:prstGeom prst="rect">
+            <a:avLst/>
+          </a:prstGeom>
+          <a:solidFill>
+            <a:srgbClr val="0F6BFF"/>
+          </a:solidFill>
+          <a:ln>
+            <a:noFill/>
+          </a:ln>
+        </p:spPr>
+        <p:style>
+          <a:lnRef idx="1">
+            <a:schemeClr val="accent1"/>
+          </a:lnRef>
+          <a:fillRef idx="3">
+            <a:schemeClr val="accent1"/>
+          </a:fillRef>
+          <a:effectRef idx="2">
+            <a:schemeClr val="accent1"/>
+          </a:effectRef>
+          <a:fontRef idx="minor">
+            <a:schemeClr val="lt1"/>
+          </a:fontRef>
+        </p:style>
+        <p:txBody>
+          <a:bodyPr rtlCol="0" anchor="ctr"/>
+          <a:lstStyle/>
+          <a:p>
+            <a:pPr algn="ctr"/>
+          </a:p>
+        </p:txBody>
+      </p:sp>
+      <p:pic>
+        <p:nvPicPr>
+          <p:cNvPr id="17" name="Picture 16" descr="world_192_0F6BFF_sw1.png"/>
+          <p:cNvPicPr>
+            <a:picLocks noChangeAspect="1"/>
+          </p:cNvPicPr>
+          <p:nvPr/>
+        </p:nvPicPr>
+        <p:blipFill>
+          <a:blip r:embed="rId4"/>
+          <a:stretch>
+            <a:fillRect/>
+          </a:stretch>
+        </p:blipFill>
+        <p:spPr>
+          <a:xfrm>
+            <a:off x="8268890" y="4536281"/>
+            <a:ext cx="535781" cy="535781"/>
+          </a:xfrm>
+          <a:prstGeom prst="rect">
+            <a:avLst/>
+          </a:prstGeom>
+        </p:spPr>
+      </p:pic>
+      <p:sp>
+        <p:nvSpPr>
+          <p:cNvPr id="18" name="TextBox 17"/>
+          <p:cNvSpPr txBox="1"/>
+          <p:nvPr/>
+        </p:nvSpPr>
+        <p:spPr>
+          <a:xfrm>
+            <a:off x="8268890" y="5429250"/>
+            <a:ext cx="2643187" cy="392906"/>
+          </a:xfrm>
+          <a:prstGeom prst="rect">
+            <a:avLst/>
+          </a:prstGeom>
+          <a:noFill/>
+        </p:spPr>
+        <p:txBody>
+          <a:bodyPr wrap="square" lIns="0" rIns="0" tIns="0" bIns="0" anchor="ctr">
+            <a:spAutoFit/>
+          </a:bodyPr>
+          <a:lstStyle/>
+          <a:p>
+            <a:r>
+              <a:rPr sz="3000" b="1" i="0">
+                <a:solidFill>
+                  <a:srgbClr val="0A3A99"/>
+                </a:solidFill>
+                <a:latin typeface="Aptos"/>
+              </a:rPr>
+              <a:t>TRANSPORT</a:t>
+            </a:r>
+          </a:p>
+        </p:txBody>
+      </p:sp>
+      <p:sp>
+        <p:nvSpPr>
+          <p:cNvPr id="19" name="TextBox 18"/>
+          <p:cNvSpPr txBox="1"/>
+          <p:nvPr/>
+        </p:nvSpPr>
+        <p:spPr>
+          <a:xfrm>
+            <a:off x="8268890" y="5911453"/>
+            <a:ext cx="2643187" cy="892968"/>
+          </a:xfrm>
+          <a:prstGeom prst="rect">
+            <a:avLst/>
+          </a:prstGeom>
+          <a:noFill/>
+        </p:spPr>
+        <p:txBody>
+          <a:bodyPr wrap="square" lIns="0" rIns="0" tIns="0" bIns="0">
+            <a:spAutoFit/>
+          </a:bodyPr>
+          <a:lstStyle/>
+          <a:p>
+            <a:pPr>
+              <a:lnSpc>
+                <a:spcPct val="125000"/>
+              </a:lnSpc>
+            </a:pPr>
+            <a:r>
+              <a:rPr sz="2200" b="0" i="0">
+                <a:solidFill>
+                  <a:srgbClr val="333333"/>
+                </a:solidFill>
+                <a:latin typeface="Aptos"/>
+              </a:rPr>
+              <a:t>Across any boundary.</a:t>
+            </a:r>
+          </a:p>
+          <a:p>
+            <a:pPr>
+              <a:lnSpc>
+                <a:spcPct val="125000"/>
+              </a:lnSpc>
+            </a:pPr>
+            <a:r>
+              <a:rPr sz="2200" b="0" i="0">
+                <a:solidFill>
+                  <a:srgbClr val="333333"/>
+                </a:solidFill>
+                <a:latin typeface="Aptos"/>
+              </a:rPr>
+              <a:t>Even air-gapped.</a:t>
+            </a:r>
+          </a:p>
+        </p:txBody>
+      </p:sp>
+      <p:sp>
+        <p:nvSpPr>
+          <p:cNvPr id="20" name="Rounded Rectangle 19"/>
+          <p:cNvSpPr/>
+          <p:nvPr/>
+        </p:nvSpPr>
+        <p:spPr>
+          <a:xfrm>
+            <a:off x="11644312" y="4214812"/>
+            <a:ext cx="3214687" cy="3571875"/>
+          </a:xfrm>
+          <a:prstGeom prst="roundRect">
+            <a:avLst>
+              <a:gd name="adj" fmla="val 3888"/>
+            </a:avLst>
+          </a:prstGeom>
+          <a:solidFill>
+            <a:srgbClr val="F3F4F6"/>
+          </a:solidFill>
+          <a:ln>
+            <a:noFill/>
+          </a:ln>
+          <a:effectLst>
+            <a:outerShdw blurRad="28575" dist="28575" dir="5400000" rotWithShape="0">
+              <a:srgbClr val="000000">
+                <a:alpha val="30000"/>
+              </a:srgbClr>
+            </a:outerShdw>
+          </a:effectLst>
+        </p:spPr>
+        <p:style>
+          <a:lnRef idx="1">
+            <a:schemeClr val="accent1"/>
+          </a:lnRef>
+          <a:fillRef idx="3">
+            <a:schemeClr val="accent1"/>
+          </a:fillRef>
+          <a:effectRef idx="2">
+            <a:schemeClr val="accent1"/>
+          </a:effectRef>
+          <a:fontRef idx="minor">
+            <a:schemeClr val="lt1"/>
+          </a:fontRef>
+        </p:style>
+        <p:txBody>
+          <a:bodyPr rtlCol="0" anchor="ctr"/>
+          <a:lstStyle/>
+          <a:p>
+            <a:pPr algn="ctr"/>
+          </a:p>
+        </p:txBody>
+      </p:sp>
+      <p:sp>
+        <p:nvSpPr>
+          <p:cNvPr id="21" name="Rectangle 20"/>
+          <p:cNvSpPr/>
+          <p:nvPr/>
+        </p:nvSpPr>
+        <p:spPr>
+          <a:xfrm>
+            <a:off x="11644312" y="4214812"/>
+            <a:ext cx="3214687" cy="35718"/>
+          </a:xfrm>
+          <a:prstGeom prst="rect">
+            <a:avLst/>
+          </a:prstGeom>
+          <a:solidFill>
+            <a:srgbClr val="0F6BFF"/>
+          </a:solidFill>
+          <a:ln>
+            <a:noFill/>
+          </a:ln>
+        </p:spPr>
+        <p:style>
+          <a:lnRef idx="1">
+            <a:schemeClr val="accent1"/>
+          </a:lnRef>
+          <a:fillRef idx="3">
+            <a:schemeClr val="accent1"/>
+          </a:fillRef>
+          <a:effectRef idx="2">
+            <a:schemeClr val="accent1"/>
+          </a:effectRef>
+          <a:fontRef idx="minor">
+            <a:schemeClr val="lt1"/>
+          </a:fontRef>
+        </p:style>
+        <p:txBody>
+          <a:bodyPr rtlCol="0" anchor="ctr"/>
+          <a:lstStyle/>
+          <a:p>
+            <a:pPr algn="ctr"/>
+          </a:p>
+        </p:txBody>
+      </p:sp>
+      <p:pic>
+        <p:nvPicPr>
+          <p:cNvPr id="22" name="Picture 21" descr="rocket_192_0F6BFF_sw1.png"/>
+          <p:cNvPicPr>
+            <a:picLocks noChangeAspect="1"/>
+          </p:cNvPicPr>
+          <p:nvPr/>
+        </p:nvPicPr>
+        <p:blipFill>
+          <a:blip r:embed="rId5"/>
+          <a:stretch>
+            <a:fillRect/>
+          </a:stretch>
+        </p:blipFill>
+        <p:spPr>
+          <a:xfrm>
+            <a:off x="11930062" y="4536281"/>
+            <a:ext cx="535781" cy="535781"/>
+          </a:xfrm>
+          <a:prstGeom prst="rect">
+            <a:avLst/>
+          </a:prstGeom>
+        </p:spPr>
+      </p:pic>
+      <p:sp>
+        <p:nvSpPr>
+          <p:cNvPr id="23" name="TextBox 22"/>
+          <p:cNvSpPr txBox="1"/>
+          <p:nvPr/>
+        </p:nvSpPr>
+        <p:spPr>
+          <a:xfrm>
+            <a:off x="11930062" y="5429250"/>
+            <a:ext cx="2643187" cy="392906"/>
+          </a:xfrm>
+          <a:prstGeom prst="rect">
+            <a:avLst/>
+          </a:prstGeom>
+          <a:noFill/>
+        </p:spPr>
+        <p:txBody>
+          <a:bodyPr wrap="square" lIns="0" rIns="0" tIns="0" bIns="0" anchor="ctr">
+            <a:spAutoFit/>
+          </a:bodyPr>
+          <a:lstStyle/>
+          <a:p>
+            <a:r>
+              <a:rPr sz="3000" b="1" i="0">
+                <a:solidFill>
+                  <a:srgbClr val="0A3A99"/>
+                </a:solidFill>
+                <a:latin typeface="Aptos"/>
+              </a:rPr>
+              <a:t>DEPLOY</a:t>
+            </a:r>
+          </a:p>
+        </p:txBody>
+      </p:sp>
+      <p:sp>
+        <p:nvSpPr>
+          <p:cNvPr id="24" name="TextBox 23"/>
+          <p:cNvSpPr txBox="1"/>
+          <p:nvPr/>
+        </p:nvSpPr>
+        <p:spPr>
+          <a:xfrm>
+            <a:off x="11930062" y="5911453"/>
+            <a:ext cx="2643187" cy="892968"/>
+          </a:xfrm>
+          <a:prstGeom prst="rect">
+            <a:avLst/>
+          </a:prstGeom>
+          <a:noFill/>
+        </p:spPr>
+        <p:txBody>
+          <a:bodyPr wrap="square" lIns="0" rIns="0" tIns="0" bIns="0">
+            <a:spAutoFit/>
+          </a:bodyPr>
+          <a:lstStyle/>
+          <a:p>
+            <a:pPr>
+              <a:lnSpc>
+                <a:spcPct val="125000"/>
+              </a:lnSpc>
+            </a:pPr>
+            <a:r>
+              <a:rPr sz="2200" b="0" i="0">
+                <a:solidFill>
+                  <a:srgbClr val="333333"/>
+                </a:solidFill>
+                <a:latin typeface="Aptos"/>
+              </a:rPr>
+              <a:t>Bring your own GitOps.</a:t>
+            </a:r>
+          </a:p>
+          <a:p>
+            <a:pPr>
+              <a:lnSpc>
+                <a:spcPct val="125000"/>
+              </a:lnSpc>
+            </a:pPr>
+            <a:r>
+              <a:rPr sz="2200" b="0" i="0">
+                <a:solidFill>
+                  <a:srgbClr val="333333"/>
+                </a:solidFill>
+                <a:latin typeface="Aptos"/>
+              </a:rPr>
+              <a:t>Use OCM's K8s Controllers</a:t>
+            </a:r>
+          </a:p>
+        </p:txBody>
+      </p:sp>
+      <p:sp>
+        <p:nvSpPr>
+          <p:cNvPr id="25" name="Rectangle 24"/>
+          <p:cNvSpPr/>
+          <p:nvPr/>
+        </p:nvSpPr>
+        <p:spPr>
+          <a:xfrm>
+            <a:off x="3964781" y="5990034"/>
+            <a:ext cx="134540" cy="21431"/>
+          </a:xfrm>
+          <a:prstGeom prst="rect">
+            <a:avLst/>
+          </a:prstGeom>
+          <a:solidFill>
+            <a:srgbClr val="6B7280"/>
+          </a:solidFill>
+          <a:ln>
+            <a:noFill/>
+          </a:ln>
+        </p:spPr>
+        <p:style>
+          <a:lnRef idx="1">
+            <a:schemeClr val="accent1"/>
+          </a:lnRef>
+          <a:fillRef idx="3">
+            <a:schemeClr val="accent1"/>
+          </a:fillRef>
+          <a:effectRef idx="2">
+            <a:schemeClr val="accent1"/>
+          </a:effectRef>
+          <a:fontRef idx="minor">
+            <a:schemeClr val="lt1"/>
+          </a:fontRef>
+        </p:style>
+        <p:txBody>
+          <a:bodyPr rtlCol="0" anchor="ctr"/>
+          <a:lstStyle/>
+          <a:p>
+            <a:pPr algn="ctr"/>
+          </a:p>
+        </p:txBody>
+      </p:sp>
+      <p:sp>
+        <p:nvSpPr>
+          <p:cNvPr id="26" name="Freeform 25"/>
+          <p:cNvSpPr/>
+          <p:nvPr/>
+        </p:nvSpPr>
+        <p:spPr>
+          <a:xfrm>
+            <a:off x="4089796" y="5956101"/>
+            <a:ext cx="107157" cy="89297"/>
+          </a:xfrm>
+          <a:custGeom>
+            <a:avLst/>
+            <a:gdLst/>
+            <a:ahLst/>
+            <a:cxnLst/>
+            <a:rect l="l" t="t" r="r" b="b"/>
+            <a:pathLst>
+              <a:path w="107157" h="89297">
+                <a:moveTo>
+                  <a:pt x="0" y="44649"/>
+                </a:moveTo>
+                <a:lnTo>
+                  <a:pt x="107157" y="0"/>
+                </a:lnTo>
+                <a:lnTo>
+                  <a:pt x="107157" y="89297"/>
+                </a:lnTo>
+                <a:close/>
+              </a:path>
+            </a:pathLst>
+          </a:custGeom>
+          <a:solidFill>
+            <a:srgbClr val="6B7280"/>
+          </a:solidFill>
+          <a:ln>
+            <a:noFill/>
+          </a:ln>
+        </p:spPr>
+        <p:style>
+          <a:lnRef idx="1">
+            <a:schemeClr val="accent1"/>
+          </a:lnRef>
+          <a:fillRef idx="3">
+            <a:schemeClr val="accent1"/>
+          </a:fillRef>
+          <a:effectRef idx="2">
+            <a:schemeClr val="accent1"/>
+          </a:effectRef>
+          <a:fontRef idx="minor">
+            <a:schemeClr val="lt1"/>
+          </a:fontRef>
+        </p:style>
+        <p:txBody>
+          <a:bodyPr rtlCol="0" anchor="ctr"/>
+          <a:lstStyle/>
+          <a:p>
+            <a:pPr algn="ctr"/>
+          </a:p>
+        </p:txBody>
+      </p:sp>
+      <p:sp>
+        <p:nvSpPr>
+          <p:cNvPr id="27" name="Rectangle 26"/>
+          <p:cNvSpPr/>
+          <p:nvPr/>
+        </p:nvSpPr>
+        <p:spPr>
+          <a:xfrm>
+            <a:off x="7625953" y="5990034"/>
+            <a:ext cx="134540" cy="21431"/>
+          </a:xfrm>
+          <a:prstGeom prst="rect">
+            <a:avLst/>
+          </a:prstGeom>
+          <a:solidFill>
+            <a:srgbClr val="6B7280"/>
+          </a:solidFill>
+          <a:ln>
+            <a:noFill/>
+          </a:ln>
+        </p:spPr>
+        <p:style>
+          <a:lnRef idx="1">
+            <a:schemeClr val="accent1"/>
+          </a:lnRef>
+          <a:fillRef idx="3">
+            <a:schemeClr val="accent1"/>
+          </a:fillRef>
+          <a:effectRef idx="2">
+            <a:schemeClr val="accent1"/>
+          </a:effectRef>
+          <a:fontRef idx="minor">
+            <a:schemeClr val="lt1"/>
+          </a:fontRef>
+        </p:style>
+        <p:txBody>
+          <a:bodyPr rtlCol="0" anchor="ctr"/>
+          <a:lstStyle/>
+          <a:p>
+            <a:pPr algn="ctr"/>
+          </a:p>
+        </p:txBody>
+      </p:sp>
+      <p:sp>
+        <p:nvSpPr>
+          <p:cNvPr id="28" name="Freeform 27"/>
+          <p:cNvSpPr/>
+          <p:nvPr/>
+        </p:nvSpPr>
+        <p:spPr>
+          <a:xfrm>
+            <a:off x="7750968" y="5956101"/>
+            <a:ext cx="107157" cy="89297"/>
+          </a:xfrm>
+          <a:custGeom>
+            <a:avLst/>
+            <a:gdLst/>
+            <a:ahLst/>
+            <a:cxnLst/>
+            <a:rect l="l" t="t" r="r" b="b"/>
+            <a:pathLst>
+              <a:path w="107157" h="89297">
+                <a:moveTo>
+                  <a:pt x="0" y="44649"/>
+                </a:moveTo>
+                <a:lnTo>
+                  <a:pt x="107157" y="0"/>
+                </a:lnTo>
+                <a:lnTo>
+                  <a:pt x="107157" y="89297"/>
+                </a:lnTo>
+                <a:close/>
+              </a:path>
+            </a:pathLst>
+          </a:custGeom>
+          <a:solidFill>
+            <a:srgbClr val="6B7280"/>
+          </a:solidFill>
+          <a:ln>
+            <a:noFill/>
+          </a:ln>
+        </p:spPr>
+        <p:style>
+          <a:lnRef idx="1">
+            <a:schemeClr val="accent1"/>
+          </a:lnRef>
+          <a:fillRef idx="3">
+            <a:schemeClr val="accent1"/>
+          </a:fillRef>
+          <a:effectRef idx="2">
+            <a:schemeClr val="accent1"/>
+          </a:effectRef>
+          <a:fontRef idx="minor">
+            <a:schemeClr val="lt1"/>
+          </a:fontRef>
+        </p:style>
+        <p:txBody>
+          <a:bodyPr rtlCol="0" anchor="ctr"/>
+          <a:lstStyle/>
+          <a:p>
+            <a:pPr algn="ctr"/>
+          </a:p>
+        </p:txBody>
+      </p:sp>
+      <p:sp>
+        <p:nvSpPr>
+          <p:cNvPr id="29" name="Rectangle 28"/>
+          <p:cNvSpPr/>
+          <p:nvPr/>
+        </p:nvSpPr>
+        <p:spPr>
+          <a:xfrm>
+            <a:off x="11287125" y="5990034"/>
+            <a:ext cx="134540" cy="21431"/>
+          </a:xfrm>
+          <a:prstGeom prst="rect">
+            <a:avLst/>
+          </a:prstGeom>
+          <a:solidFill>
+            <a:srgbClr val="6B7280"/>
+          </a:solidFill>
+          <a:ln>
+            <a:noFill/>
+          </a:ln>
+        </p:spPr>
+        <p:style>
+          <a:lnRef idx="1">
+            <a:schemeClr val="accent1"/>
+          </a:lnRef>
+          <a:fillRef idx="3">
+            <a:schemeClr val="accent1"/>
+          </a:fillRef>
+          <a:effectRef idx="2">
+            <a:schemeClr val="accent1"/>
+          </a:effectRef>
+          <a:fontRef idx="minor">
+            <a:schemeClr val="lt1"/>
+          </a:fontRef>
+        </p:style>
+        <p:txBody>
+          <a:bodyPr rtlCol="0" anchor="ctr"/>
+          <a:lstStyle/>
+          <a:p>
+            <a:pPr algn="ctr"/>
+          </a:p>
+        </p:txBody>
+      </p:sp>
+      <p:sp>
+        <p:nvSpPr>
+          <p:cNvPr id="30" name="Freeform 29"/>
+          <p:cNvSpPr/>
+          <p:nvPr/>
+        </p:nvSpPr>
+        <p:spPr>
+          <a:xfrm>
+            <a:off x="11412140" y="5956101"/>
+            <a:ext cx="107156" cy="89297"/>
+          </a:xfrm>
+          <a:custGeom>
+            <a:avLst/>
+            <a:gdLst/>
+            <a:ahLst/>
+            <a:cxnLst/>
+            <a:rect l="l" t="t" r="r" b="b"/>
+            <a:pathLst>
+              <a:path w="107156" h="89297">
+                <a:moveTo>
+                  <a:pt x="0" y="44649"/>
+                </a:moveTo>
+                <a:lnTo>
+                  <a:pt x="107156" y="0"/>
+                </a:lnTo>
+                <a:lnTo>
+                  <a:pt x="107156" y="89297"/>
+                </a:lnTo>
+                <a:close/>
+              </a:path>
+            </a:pathLst>
+          </a:custGeom>
+          <a:solidFill>
+            <a:srgbClr val="6B7280"/>
+          </a:solidFill>
+          <a:ln>
+            <a:noFill/>
+          </a:ln>
+        </p:spPr>
+        <p:style>
+          <a:lnRef idx="1">
+            <a:schemeClr val="accent1"/>
+          </a:lnRef>
+          <a:fillRef idx="3">
+            <a:schemeClr val="accent1"/>
+          </a:fillRef>
+          <a:effectRef idx="2">
+            <a:schemeClr val="accent1"/>
+          </a:effectRef>
+          <a:fontRef idx="minor">
+            <a:schemeClr val="lt1"/>
+          </a:fontRef>
+        </p:style>
+        <p:txBody>
+          <a:bodyPr rtlCol="0" anchor="ctr"/>
+          <a:lstStyle/>
+          <a:p>
+            <a:pPr algn="ctr"/>
+          </a:p>
+        </p:txBody>
+      </p:sp>
+      <p:sp>
+        <p:nvSpPr>
+          <p:cNvPr id="31" name="Rectangle 30"/>
+          <p:cNvSpPr/>
+          <p:nvPr/>
+        </p:nvSpPr>
+        <p:spPr>
+          <a:xfrm>
+            <a:off x="14948296" y="5987891"/>
+            <a:ext cx="330993" cy="25717"/>
+          </a:xfrm>
+          <a:prstGeom prst="rect">
+            <a:avLst/>
+          </a:prstGeom>
+          <a:solidFill>
+            <a:srgbClr val="6B7280"/>
+          </a:solidFill>
+          <a:ln>
+            <a:noFill/>
+          </a:ln>
+        </p:spPr>
+        <p:style>
+          <a:lnRef idx="1">
+            <a:schemeClr val="accent1"/>
+          </a:lnRef>
+          <a:fillRef idx="3">
+            <a:schemeClr val="accent1"/>
+          </a:fillRef>
+          <a:effectRef idx="2">
+            <a:schemeClr val="accent1"/>
+          </a:effectRef>
+          <a:fontRef idx="minor">
+            <a:schemeClr val="lt1"/>
+          </a:fontRef>
+        </p:style>
+        <p:txBody>
+          <a:bodyPr rtlCol="0" anchor="ctr"/>
+          <a:lstStyle/>
+          <a:p>
+            <a:pPr algn="ctr"/>
+          </a:p>
+        </p:txBody>
+      </p:sp>
+      <p:sp>
+        <p:nvSpPr>
+          <p:cNvPr id="32" name="Freeform 31"/>
+          <p:cNvSpPr/>
+          <p:nvPr/>
+        </p:nvSpPr>
+        <p:spPr>
+          <a:xfrm>
+            <a:off x="15269765" y="5947171"/>
+            <a:ext cx="125016" cy="107157"/>
+          </a:xfrm>
+          <a:custGeom>
+            <a:avLst/>
+            <a:gdLst/>
+            <a:ahLst/>
+            <a:cxnLst/>
+            <a:rect l="l" t="t" r="r" b="b"/>
+            <a:pathLst>
+              <a:path w="125016" h="107157">
+                <a:moveTo>
+                  <a:pt x="0" y="53579"/>
+                </a:moveTo>
+                <a:lnTo>
+                  <a:pt x="125016" y="0"/>
+                </a:lnTo>
+                <a:lnTo>
+                  <a:pt x="125016" y="107157"/>
+                </a:lnTo>
+                <a:close/>
+              </a:path>
+            </a:pathLst>
+          </a:custGeom>
+          <a:solidFill>
+            <a:srgbClr val="6B7280"/>
+          </a:solidFill>
+          <a:ln>
+            <a:noFill/>
+          </a:ln>
+        </p:spPr>
+        <p:style>
+          <a:lnRef idx="1">
+            <a:schemeClr val="accent1"/>
+          </a:lnRef>
+          <a:fillRef idx="3">
+            <a:schemeClr val="accent1"/>
+          </a:fillRef>
+          <a:effectRef idx="2">
+            <a:schemeClr val="accent1"/>
+          </a:effectRef>
+          <a:fontRef idx="minor">
+            <a:schemeClr val="lt1"/>
+          </a:fontRef>
+        </p:style>
+        <p:txBody>
+          <a:bodyPr rtlCol="0" anchor="ctr"/>
+          <a:lstStyle/>
+          <a:p>
+            <a:pPr algn="ctr"/>
+          </a:p>
+        </p:txBody>
+      </p:sp>
+      <p:sp>
+        <p:nvSpPr>
+          <p:cNvPr id="33" name="Freeform 32"/>
+          <p:cNvSpPr/>
+          <p:nvPr/>
+        </p:nvSpPr>
+        <p:spPr>
+          <a:xfrm>
+            <a:off x="15591234" y="4625578"/>
+            <a:ext cx="1946671" cy="1107281"/>
+          </a:xfrm>
+          <a:custGeom>
+            <a:avLst/>
+            <a:gdLst/>
+            <a:ahLst/>
+            <a:cxnLst/>
+            <a:rect l="l" t="t" r="r" b="b"/>
+            <a:pathLst>
+              <a:path w="1946671" h="1107281">
+                <a:moveTo>
+                  <a:pt x="464343" y="1107281"/>
+                </a:moveTo>
+                <a:cubicBezTo>
+                  <a:pt x="214312" y="1107281"/>
+                  <a:pt x="0" y="928687"/>
+                  <a:pt x="0" y="660796"/>
+                </a:cubicBezTo>
+                <a:cubicBezTo>
+                  <a:pt x="0" y="428625"/>
+                  <a:pt x="196453" y="232171"/>
+                  <a:pt x="446484" y="267890"/>
+                </a:cubicBezTo>
+                <a:cubicBezTo>
+                  <a:pt x="535781" y="71437"/>
+                  <a:pt x="785812" y="0"/>
+                  <a:pt x="964406" y="142875"/>
+                </a:cubicBezTo>
+                <a:cubicBezTo>
+                  <a:pt x="1143000" y="0"/>
+                  <a:pt x="1410890" y="71437"/>
+                  <a:pt x="1518046" y="285750"/>
+                </a:cubicBezTo>
+                <a:cubicBezTo>
+                  <a:pt x="1750218" y="267890"/>
+                  <a:pt x="1946671" y="446484"/>
+                  <a:pt x="1946671" y="660796"/>
+                </a:cubicBezTo>
+                <a:cubicBezTo>
+                  <a:pt x="1946671" y="910828"/>
+                  <a:pt x="1732359" y="1107281"/>
+                  <a:pt x="1518046" y="1107281"/>
+                </a:cubicBezTo>
+                <a:close/>
+              </a:path>
+            </a:pathLst>
+          </a:custGeom>
+          <a:solidFill>
+            <a:srgbClr val="0F6BFF"/>
+          </a:solidFill>
+          <a:ln>
+            <a:noFill/>
+          </a:ln>
+        </p:spPr>
+        <p:style>
+          <a:lnRef idx="1">
+            <a:schemeClr val="accent1"/>
+          </a:lnRef>
+          <a:fillRef idx="3">
+            <a:schemeClr val="accent1"/>
+          </a:fillRef>
+          <a:effectRef idx="2">
+            <a:schemeClr val="accent1"/>
+          </a:effectRef>
+          <a:fontRef idx="minor">
+            <a:schemeClr val="lt1"/>
+          </a:fontRef>
+        </p:style>
+        <p:txBody>
+          <a:bodyPr rtlCol="0" anchor="ctr"/>
+          <a:lstStyle/>
+          <a:p>
+            <a:pPr algn="ctr"/>
+          </a:p>
+        </p:txBody>
+      </p:sp>
+      <p:pic>
+        <p:nvPicPr>
+          <p:cNvPr id="34" name="Picture 33" descr="lock_192_FFFFFF_sw1.png"/>
+          <p:cNvPicPr>
+            <a:picLocks noChangeAspect="1"/>
+          </p:cNvPicPr>
+          <p:nvPr/>
+        </p:nvPicPr>
+        <p:blipFill>
+          <a:blip r:embed="rId6"/>
+          <a:stretch>
+            <a:fillRect/>
+          </a:stretch>
+        </p:blipFill>
+        <p:spPr>
+          <a:xfrm>
+            <a:off x="16314539" y="4920257"/>
+            <a:ext cx="500062" cy="500062"/>
+          </a:xfrm>
+          <a:prstGeom prst="rect">
+            <a:avLst/>
+          </a:prstGeom>
+        </p:spPr>
+      </p:pic>
+      <p:sp>
+        <p:nvSpPr>
+          <p:cNvPr id="35" name="TextBox 34"/>
+          <p:cNvSpPr txBox="1"/>
+          <p:nvPr/>
+        </p:nvSpPr>
+        <p:spPr>
+          <a:xfrm>
+            <a:off x="15341203" y="6072187"/>
+            <a:ext cx="2500312" cy="714375"/>
+          </a:xfrm>
+          <a:prstGeom prst="rect">
+            <a:avLst/>
+          </a:prstGeom>
+          <a:noFill/>
+        </p:spPr>
+        <p:txBody>
+          <a:bodyPr wrap="square" lIns="0" rIns="0" tIns="0" bIns="0">
+            <a:spAutoFit/>
+          </a:bodyPr>
+          <a:lstStyle/>
+          <a:p>
+            <a:pPr algn="ctr"/>
+            <a:r>
+              <a:rPr sz="3000" b="1" i="0">
+                <a:solidFill>
+                  <a:srgbClr val="0A3A99"/>
+                </a:solidFill>
+                <a:latin typeface="Aptos"/>
+              </a:rPr>
+              <a:t>SOVEREIGN</a:t>
+            </a:r>
+          </a:p>
+          <a:p>
+            <a:pPr algn="ctr"/>
+            <a:r>
+              <a:rPr sz="3000" b="1" i="0">
+                <a:solidFill>
+                  <a:srgbClr val="0A3A99"/>
+                </a:solidFill>
+                <a:latin typeface="Aptos"/>
+              </a:rPr>
+              <a:t>CLOUD</a:t>
+            </a:r>
+          </a:p>
+        </p:txBody>
+      </p:sp>
+      <p:sp>
+        <p:nvSpPr>
+          <p:cNvPr id="36" name="TextBox 35"/>
+          <p:cNvSpPr txBox="1"/>
+          <p:nvPr/>
+        </p:nvSpPr>
+        <p:spPr>
+          <a:xfrm>
+            <a:off x="15073312" y="6750843"/>
+            <a:ext cx="3036093" cy="803671"/>
+          </a:xfrm>
+          <a:prstGeom prst="rect">
+            <a:avLst/>
+          </a:prstGeom>
+          <a:noFill/>
+        </p:spPr>
+        <p:txBody>
+          <a:bodyPr wrap="square" lIns="0" rIns="0" tIns="0" bIns="0">
+            <a:spAutoFit/>
+          </a:bodyPr>
+          <a:lstStyle/>
+          <a:p>
+            <a:pPr algn="ctr">
+              <a:lnSpc>
+                <a:spcPct val="125000"/>
+              </a:lnSpc>
+            </a:pPr>
+            <a:r>
+              <a:rPr sz="2200" b="0" i="0">
+                <a:solidFill>
+                  <a:srgbClr val="333333"/>
+                </a:solidFill>
+                <a:latin typeface="Aptos"/>
+              </a:rPr>
+              <a:t>Verify at destination.</a:t>
+            </a:r>
+          </a:p>
+          <a:p>
+            <a:pPr algn="ctr">
+              <a:lnSpc>
+                <a:spcPct val="125000"/>
+              </a:lnSpc>
+            </a:pPr>
+            <a:r>
+              <a:rPr sz="2200" b="0" i="0">
+                <a:solidFill>
+                  <a:srgbClr val="333333"/>
+                </a:solidFill>
+                <a:latin typeface="Aptos"/>
+              </a:rPr>
+              <a:t>No callback upstream.</a:t>
+            </a:r>
+          </a:p>
+        </p:txBody>
+      </p:sp>
     </p:spTree>
   </p:cSld>
   <p:clrMapOvr>
@@ -11720,7 +14355,7 @@
                 </a:solidFill>
                 <a:latin typeface="Aptos"/>
               </a:rPr>
-              <a:t>carry resources — images, charts, configs, SBOMs.
+              <a:t>carry resources — images, charts, configs, SBOMs, …
 </a:t>
             </a:r>
             <a:r>
@@ -11739,25 +14374,16 @@
                 </a:solidFill>
                 <a:latin typeface="Aptos"/>
               </a:rPr>
-              <a:t>composes other components by </a:t>
-            </a:r>
-            <a:r>
-              <a:rPr sz="2200" b="1">
-                <a:solidFill>
-                  <a:srgbClr val="0F6BFF"/>
+              <a:t>composes other components.</a:t>
+            </a:r>
+            <a:r>
+              <a:rPr sz="2200">
+                <a:solidFill>
+                  <a:srgbClr val="000000"/>
                 </a:solidFill>
                 <a:latin typeface="Aptos"/>
               </a:rPr>
-              <a:t>name and version</a:t>
-            </a:r>
-            <a:r>
-              <a:rPr sz="2200">
-                <a:solidFill>
-                  <a:srgbClr val="000000"/>
-                </a:solidFill>
-                <a:latin typeface="Aptos"/>
-              </a:rPr>
-              <a:t>. One release unit, transferable, signable end-to-end.</a:t>
+              <a:t> One release unit, transferable, signable end-to-end.</a:t>
             </a:r>
           </a:p>
         </p:txBody>
@@ -11817,11 +14443,11 @@
             <a:r>
               <a:rPr sz="1700">
                 <a:solidFill>
-                  <a:srgbClr val="6B7280"/>
+                  <a:srgbClr val="0A3A99"/>
                 </a:solidFill>
                 <a:latin typeface="Consolas"/>
               </a:rPr>
-              <a:t># service components — carry the artifacts</a:t>
+              <a:t>components:</a:t>
             </a:r>
           </a:p>
           <a:p>
@@ -11839,11 +14465,11 @@
             <a:r>
               <a:rPr sz="1700">
                 <a:solidFill>
-                  <a:srgbClr val="0A3A99"/>
+                  <a:srgbClr val="000000"/>
                 </a:solidFill>
                 <a:latin typeface="Consolas"/>
               </a:rPr>
-              <a:t>components:</a:t>
+              <a:t>  - name: acme.org/sovereign/notes</a:t>
             </a:r>
           </a:p>
           <a:p>
@@ -11865,7 +14491,7 @@
                 </a:solidFill>
                 <a:latin typeface="Consolas"/>
               </a:rPr>
-              <a:t>  - name: acme.org/sovereign/notes</a:t>
+              <a:t>    version: 1.0.0</a:t>
             </a:r>
           </a:p>
           <a:p>
@@ -11883,11 +14509,11 @@
             <a:r>
               <a:rPr sz="1700">
                 <a:solidFill>
-                  <a:srgbClr val="000000"/>
+                  <a:srgbClr val="0A3A99"/>
                 </a:solidFill>
                 <a:latin typeface="Consolas"/>
               </a:rPr>
-              <a:t>    version: 1.0.0</a:t>
+              <a:t>    resources:</a:t>
             </a:r>
           </a:p>
           <a:p>
@@ -11905,11 +14531,11 @@
             <a:r>
               <a:rPr sz="1700">
                 <a:solidFill>
-                  <a:srgbClr val="0A3A99"/>
+                  <a:srgbClr val="000000"/>
                 </a:solidFill>
                 <a:latin typeface="Consolas"/>
               </a:rPr>
-              <a:t>    resources:</a:t>
+              <a:t>      - name: image       # OCI image</a:t>
             </a:r>
           </a:p>
           <a:p>
@@ -11927,11 +14553,11 @@
             <a:r>
               <a:rPr sz="1700">
                 <a:solidFill>
-                  <a:srgbClr val="000000"/>
+                  <a:srgbClr val="6B7280"/>
                 </a:solidFill>
                 <a:latin typeface="Consolas"/>
               </a:rPr>
-              <a:t>      - name: image       # OCI image</a:t>
+              <a:t>        # type, input/access, digest trimmed</a:t>
             </a:r>
           </a:p>
           <a:p>
@@ -11971,11 +14597,11 @@
             <a:r>
               <a:rPr sz="1700">
                 <a:solidFill>
-                  <a:srgbClr val="000000"/>
+                  <a:srgbClr val="6B7280"/>
                 </a:solidFill>
                 <a:latin typeface="Consolas"/>
               </a:rPr>
-              <a:t>      - ...</a:t>
+              <a:t>        ...</a:t>
             </a:r>
           </a:p>
           <a:p>
@@ -12081,11 +14707,11 @@
             <a:r>
               <a:rPr sz="1700">
                 <a:solidFill>
-                  <a:srgbClr val="000000"/>
+                  <a:srgbClr val="6B7280"/>
                 </a:solidFill>
                 <a:latin typeface="Consolas"/>
               </a:rPr>
-              <a:t>      - name: chart       # Helm chart</a:t>
+              <a:t>        ...</a:t>
             </a:r>
           </a:p>
           <a:p>
@@ -12107,7 +14733,29 @@
                 </a:solidFill>
                 <a:latin typeface="Consolas"/>
               </a:rPr>
-              <a:t>      - ...</a:t>
+              <a:t>      - name: chart       # Helm chart</a:t>
+            </a:r>
+          </a:p>
+          <a:p>
+            <a:pPr algn="l">
+              <a:lnSpc>
+                <a:spcPct val="115000"/>
+              </a:lnSpc>
+              <a:spcBef>
+                <a:spcPts val="0"/>
+              </a:spcBef>
+              <a:spcAft>
+                <a:spcPts val="0"/>
+              </a:spcAft>
+            </a:pPr>
+            <a:r>
+              <a:rPr sz="1700">
+                <a:solidFill>
+                  <a:srgbClr val="6B7280"/>
+                </a:solidFill>
+                <a:latin typeface="Consolas"/>
+              </a:rPr>
+              <a:t>        ...</a:t>
             </a:r>
           </a:p>
           <a:p>
@@ -12174,28 +14822,6 @@
         <p:txBody>
           <a:bodyPr rtlCol="0" anchor="t" lIns="140000" rIns="140000" tIns="120000" bIns="120000" wrap="none"/>
           <a:lstStyle/>
-          <a:p>
-            <a:pPr algn="l">
-              <a:lnSpc>
-                <a:spcPct val="115000"/>
-              </a:lnSpc>
-              <a:spcBef>
-                <a:spcPts val="0"/>
-              </a:spcBef>
-              <a:spcAft>
-                <a:spcPts val="0"/>
-              </a:spcAft>
-            </a:pPr>
-            <a:r>
-              <a:rPr sz="1700">
-                <a:solidFill>
-                  <a:srgbClr val="6B7280"/>
-                </a:solidFill>
-                <a:latin typeface="Consolas"/>
-              </a:rPr>
-              <a:t># product / release component</a:t>
-            </a:r>
-          </a:p>
           <a:p>
             <a:pPr algn="l">
               <a:lnSpc>
@@ -12608,7 +15234,7 @@
           <a:lstStyle/>
           <a:p>
             <a:r>
-              <a:t>Same signed object. Three trust models.</a:t>
+              <a:t>Same signed object. Three signing options.</a:t>
             </a:r>
           </a:p>
         </p:txBody>
@@ -12655,7 +15281,7 @@
           </a:p>
           <a:p>
             <a:r>
-              <a:t>The key you already rotate.</a:t>
+              <a:t>If you already rotate a signing key.</a:t>
             </a:r>
           </a:p>
         </p:txBody>
@@ -12697,12 +15323,12 @@
           <a:lstStyle/>
           <a:p>
             <a:r>
-              <a:t>OpenPGP keys.</a:t>
-            </a:r>
-          </a:p>
-          <a:p>
-            <a:r>
-              <a:t>Familiar trust model, ASCII-armored.</a:t>
+              <a:t>OpenPGP keys, ASCII-armored.</a:t>
+            </a:r>
+          </a:p>
+          <a:p>
+            <a:r>
+              <a:t>If your team runs a keyring.</a:t>
             </a:r>
           </a:p>
         </p:txBody>
@@ -12744,12 +15370,12 @@
           <a:lstStyle/>
           <a:p>
             <a:r>
-              <a:t>Keyless via OIDC.</a:t>
-            </a:r>
-          </a:p>
-          <a:p>
-            <a:r>
-              <a:t>Identity, not long-lived keys.</a:t>
+              <a:t>Keyless via OIDC + Rekor.</a:t>
+            </a:r>
+          </a:p>
+          <a:p>
+            <a:r>
+              <a:t>If you already trust your identity provider.</a:t>
             </a:r>
           </a:p>
         </p:txBody>

--- a/docs/community/marketing/decks/architect-phase2a/OCM-Story-Architect-External.pptx
+++ b/docs/community/marketing/decks/architect-phase2a/OCM-Story-Architect-External.pptx
@@ -532,7 +532,7 @@
           </a:p>
           <a:p>
             <a:r>
-              <a:t>That is the gap to close in the next thirty minutes.</a:t>
+              <a:t>Thread the arc: by the end of the deck you'll have a thirty-minute path to your first OCM component on a laptop - and an afternoon to one running on a cluster. Until then, here's why that matters.</a:t>
             </a:r>
           </a:p>
           <a:p>
@@ -630,6 +630,16 @@
               <a:t>Same command in all three: `ocm transfer cv &lt;src&gt; &lt;dst&gt;`. Access changes; digests do not. Signature covers digests, so it survives every hop. Verification is purely local at the destination - that is the air-gap property.</a:t>
             </a:r>
           </a:p>
+          <a:p>
+            <a:r>
+              <a:t>Q&amp;A backup on the air-gap default footgun: default `ocm transfer` copies only the component descriptor - the access fields still point back at the source registry. For air-gap (CTF -&gt; Registry) you MUST pass `--copy-resources` so the bytes travel with the descriptor. Slide 14 names this as one of the three honest edges. Worth catching in a CI step the first time someone runs an air-gap export.</a:t>
+            </a:r>
+          </a:p>
+          <a:p>
+            <a:r>
+              <a:t>Q&amp;A backup on Sigstore air-gap specifically: Sigstore verification at the destination is offline IF the trusted-root file (Fulcio CA + Rekor public key for the configured issuer) has been distributed into the destination once, out of band. After that, `ocm verify cv` runs without contacting Rekor or Fulcio. RSA and OpenPGP need only their pinned public keys - no trusted-root file.</a:t>
+            </a:r>
+          </a:p>
         </p:txBody>
       </p:sp>
       <p:sp>
@@ -707,7 +717,7 @@
           </a:p>
           <a:p>
             <a:r>
-              <a:t>• Component - names a specific component version. Pulls the descriptor and verifies its signature. If verification fails, nothing downstream sees a verified descriptor - the chain stops here.</a:t>
+              <a:t>• Component - names a specific component version. Pulls the descriptor and verifies its signature against the trust anchor configured on the Component CR. Verification is OPT-IN: without a `verify:` entry referencing a key/secret, the controller resolves and pulls but does not check signatures. Production installs should require verification via admission policy.</a:t>
             </a:r>
           </a:p>
           <a:p>
@@ -722,12 +732,12 @@
           </a:p>
           <a:p>
             <a:r>
-              <a:t>For the Helm-deploy reference flow, the chain feeds a `ResourceGraphDefinition` that kro reconciles, with Flux applying the resulting `HelmRelease`. The OCM controllers DON'T ship kro or Flux - bring your own. Slide 14 flags this as one of the three honest edges.</a:t>
-            </a:r>
-          </a:p>
-          <a:p>
-            <a:r>
-              <a:t>Q&amp;A backup if asked about Argo: Argo as an alternative to Flux is in flight (docs PR landing soon). Until merged, the documented Helm-deploy path is kro + Flux.</a:t>
+              <a:t>Foreshadow the dependency now so slide 14 doesn't feel retroactive: the four-card chain on its own deploys raw Kubernetes manifests. For the Helm-deploy reference flow, the chain feeds a `ResourceGraphDefinition` that kro reconciles, with Flux (or Argo CD) applying the resulting `HelmRelease`. The OCM controllers DON'T ship kro, Flux, or Argo CD - bring your own. Slide 14 names this as one of the three honest edges.</a:t>
+            </a:r>
+          </a:p>
+          <a:p>
+            <a:r>
+              <a:t>Q&amp;A backup on Argo CD: tabs for Argo CD are landing in the website how-tos before the deck ships. Until then, the documented Helm-deploy path is kro + Flux; the Argo CD path is symmetrical.</a:t>
             </a:r>
           </a:p>
           <a:p>
@@ -897,22 +907,27 @@
           <a:lstStyle/>
           <a:p>
             <a:r>
-              <a:t>Two paths to a first OCM component. Both tested in conformance on every release. Both fit an afternoon on a laptop.</a:t>
-            </a:r>
-          </a:p>
-          <a:p>
-            <a:r>
-              <a:t>• From zero - CLI. No cluster needed. Install CLI. Take one component you already ship. Write the constructor. Pack. Sign with RSA. Export as CTF. Carry to a second machine. Import. Verify. Round trip in 30 minutes. Recommend this first.</a:t>
-            </a:r>
-          </a:p>
-          <a:p>
-            <a:r>
-              <a:t>• On your cluster - controllers. Four K8s deployments, helm-install on any cluster. Point at your registry. Apply a Component resource - verified and reconciling.</a:t>
-            </a:r>
-          </a:p>
-          <a:p>
-            <a:r>
-              <a:t>Both paths coexist with what you already run - cosign, Argo, Flux, Kyverno. OCM signs the descriptor; your existing controls stay in place.</a:t>
+              <a:t>Two paths to a first OCM component. Both tested in conformance on every release.</a:t>
+            </a:r>
+          </a:p>
+          <a:p>
+            <a:r>
+              <a:t>• From zero - CLI. No cluster needed. Install CLI. Write a constructor for one component. Pack. Sign with RSA. Export as CTF. Carry to a second machine. Import. Verify. Cold-start budget: about thirty minutes - CLI install plus the simple `helloworld` pack/sign/verify walked in the website tutorial. Recommend this path first.</a:t>
+            </a:r>
+          </a:p>
+          <a:p>
+            <a:r>
+              <a:t>• On your cluster - controllers. Spin up a kind cluster. Helm-install the OCM controllers, plus kro, plus your deployer of choice (Flux or Argo CD). Point them at your registry. Apply a Component resource - verified and reconciling. Cold-start budget: an afternoon - includes the bootstrap (kind + controllers + kro + Flux/Argo CD) and a Helm-deploy of the simple component documented in the getting-started tutorial.</a:t>
+            </a:r>
+          </a:p>
+          <a:p>
+            <a:r>
+              <a:t>On the slide: no marketing minutes. The honest numbers live here so the speaker can land them when asked.</a:t>
+            </a:r>
+          </a:p>
+          <a:p>
+            <a:r>
+              <a:t>Both paths coexist with what you already run - cosign, Argo CD, Flux, Kyverno. OCM signs the descriptor; your existing controls stay in place.</a:t>
             </a:r>
           </a:p>
         </p:txBody>
@@ -997,7 +1012,7 @@
           </a:p>
           <a:p>
             <a:r>
-              <a:t>• Helm-deploy adds kro + Flux - the OCM controllers don't ship them. The reference Helm-deploy flow is OCM Controllers -&gt; ResourceGraphDefinition -&gt; kro -&gt; Flux/HelmRelease. Three installs, not one. Plan for it.</a:t>
+              <a:t>• Helm-deploy adds kro + Flux or Argo CD - the OCM controllers don't ship them. Bring your existing GitOps engine. Nuance for Q&amp;A: kro is required for ALL documented deploy paths (it reconciles the ResourceGraphDefinition the Deployer feeds it), not only Helm-deploy. The GitOps engine - Flux today, Argo CD path landing in the docs before this deck ships - is the Helm-deploy-specific add. Three installs total for Helm-deploy.</a:t>
             </a:r>
           </a:p>
           <a:p>
@@ -1262,17 +1277,17 @@
           </a:p>
           <a:p>
             <a:r>
-              <a:t>• OCI image - `repo:tag` or `repo@sha256:…`. Mirror it, every downstream reference must be rewritten.</a:t>
-            </a:r>
-          </a:p>
-          <a:p>
-            <a:r>
-              <a:t>• Helm chart - repo URL + chart name + version. Move the repo, every `helm install` breaks.</a:t>
-            </a:r>
-          </a:p>
-          <a:p>
-            <a:r>
-              <a:t>• SBOM - no stable identifier of its own. Tied by filename or referrer; repackage and it dangles.</a:t>
+              <a:t>• OCI image - digest pins the bytes. Nothing pins the release the image belongs to.</a:t>
+            </a:r>
+          </a:p>
+          <a:p>
+            <a:r>
+              <a:t>• Helm chart - version pins the chart. Nothing pins it to the image, config, and SBOM it ships with.</a:t>
+            </a:r>
+          </a:p>
+          <a:p>
+            <a:r>
+              <a:t>• SBOM - referrer attaches to one digest. No referrer spans the whole release.</a:t>
             </a:r>
           </a:p>
           <a:p>
@@ -1380,6 +1395,16 @@
               <a:t>Move the artifact. The digest stays. Only the access changes. That is the whole trick.</a:t>
             </a:r>
           </a:p>
+          <a:p>
+            <a:r>
+              <a:t>Q&amp;A backup on 'globally unique': inherits from DNS-prefix naming - same model as Go import paths. We don't run a registry that arbitrates conflicts; uniqueness is delegated to DNS. Two parties claiming `acme.org/helloworld` is prevented the same way two parties claiming `acme.org` is prevented.</a:t>
+            </a:r>
+          </a:p>
+          <a:p>
+            <a:r>
+              <a:t>Q&amp;A backup on squatting: trust is per-component - the verifier knows what trust anchor to apply to the descriptor in front of it. A regulated environment relies on (a) controlling which registry the controllers are configured to pull from, and (b) per-component verifier config. Per-name-prefix trust-anchor binding is not in the spec or the controllers today.</a:t>
+            </a:r>
+          </a:p>
         </p:txBody>
       </p:sp>
       <p:sp>
@@ -1477,6 +1502,11 @@
           </a:p>
           <a:p>
             <a:r>
+              <a:t>Q&amp;A backup on SBOD vocabulary: if the audience knows OCM at all, they may have heard 'Software Bill of Delivery' - SBOD - in earlier presentations or on the website. It's our positioning term against SBOM. Technically an SBOD is the same object architects call the component descriptor - the serialized form of an OCM component version. Different words, one object.</a:t>
+            </a:r>
+          </a:p>
+          <a:p>
+            <a:r>
               <a:t>A component is the unit you sign, transport, and deploy. Hold the noun.</a:t>
             </a:r>
           </a:p>
@@ -1685,6 +1715,21 @@
               <a:t>Sign the descriptor hash, not the access. Seven words; whole transport story.</a:t>
             </a:r>
           </a:p>
+          <a:p>
+            <a:r>
+              <a:t>Q&amp;A backup on the trust model (one per scheme, all configurable): RSA-PSS uses bare public-key pinning - operator pins the public key. Sigstore uses OIDC issuer + Fulcio short-lived cert + Rekor transparency log - operator pins the issuer. GPG uses an OpenPGP keyring - operator pins the key fingerprint. Algorithm is configurable per signature; the signed object is the canonicalized descriptor regardless of algorithm.</a:t>
+            </a:r>
+          </a:p>
+          <a:p>
+            <a:r>
+              <a:t>Q&amp;A backup on composition: the signature transitively pins `componentReferences` (introduced on slide 8). The product signature covers every reference's descriptor digest - so re-signing or re-publishing a referenced component breaks the product signature. Verifier policy is per-component: a referenced component is verified against its own trust anchor at deploy time; the product is verified against the product's anchor.</a:t>
+            </a:r>
+          </a:p>
+          <a:p>
+            <a:r>
+              <a:t>Q&amp;A backup on canonicalization: the canonical form of the descriptor is spec'd at `ocm-spec/04-extensions/01-artifact-types/`. Signatures are over canonical bytes - so JSON/YAML field ordering and whitespace can't break verification.</a:t>
+            </a:r>
+          </a:p>
         </p:txBody>
       </p:sp>
       <p:sp>
@@ -1885,6 +1930,11 @@
               <a:t>Real releases are not one big component - they are one product component referencing several services. This is the shape day-2 (slide 12) operates on.</a:t>
             </a:r>
           </a:p>
+          <a:p>
+            <a:r>
+              <a:t>Q&amp;A backup on transitive trust: `componentReferences` are pinned by the digest of the referenced component's descriptor. The product signature covers each reference's digest - re-signing a referenced component breaks the product signature. At deploy time the verifier checks each component against its own trust anchor: notes against the notes team's anchor, postgres against the postgres team's anchor, product against the product team's anchor. Without an explicit per-component policy, the controller applies whatever trust anchor was configured on the Component CR for that name.</a:t>
+            </a:r>
+          </a:p>
         </p:txBody>
       </p:sp>
       <p:sp>
@@ -1952,7 +2002,7 @@
           <a:lstStyle/>
           <a:p>
             <a:r>
-              <a:t>Same signed object - the canonical descriptor digest - in all three. How you prove the key is what varies. All three are stable on the v1alpha1 API surface today:</a:t>
+              <a:t>Same signed object - the canonical descriptor digest - in all three. How you prove the key is what varies. All three schemes are stable in the CLI on the v1alpha1 API surface today:</a:t>
             </a:r>
           </a:p>
           <a:p>
@@ -1962,7 +2012,7 @@
           </a:p>
           <a:p>
             <a:r>
-              <a:t>• GPG - OpenPGP key material; trust model is the same as RSA Plain (key pinning), just with a different key format. Fits orgs already running web-of-trust keyrings.</a:t>
+              <a:t>• OpenPGP - OpenPGP key material; trust model is the same as RSA Plain (key pinning), just with a different key format. Fits orgs already running web-of-trust keyrings. (Slide header says 'OpenPGP' - GPG is one implementation; Sequoia and RNP produce compatible signatures.)</a:t>
             </a:r>
           </a:p>
           <a:p>
@@ -1973,6 +2023,21 @@
           <a:p>
             <a:r>
               <a:t>Three things to land. Same signed object - the canonical descriptor digest. Verifiers can require multiple in parallel (RSA from release team + Sigstore from CI). Pick what your org already runs.</a:t>
+            </a:r>
+          </a:p>
+          <a:p>
+            <a:r>
+              <a:t>Q&amp;A backup on verifier policy on the Kubernetes Component CR: the Component CR has an optional `verify:` field - a list of {signature-name, public-key} pairs. Verification is opt-in: with NO `verify:` entries the controller resolves and pulls but does not check signatures. With `verify:` entries the controller looks for signatures with those names in the descriptor and verifies them against the provided keys. There is no scheme-pinning on the CR; the scheme is derived from each signature's algorithm field in the descriptor itself.</a:t>
+            </a:r>
+          </a:p>
+          <a:p>
+            <a:r>
+              <a:t>Honest scope note (the question a security architect actually asks): the v1alpha1 Kubernetes controller TODAY implements RSA (RSASSA-PSS, RSASSA-PKCS1V15) only. OpenPGP and Sigstore verification work in the CLI - the three columns on this slide are the CLI surface. The controller will reject a non-RSA signature with an 'unsupported signature algorithm' error rather than fall through silently, so the safety property holds, but the practical answer for an audience running the controllers in production today is: RSA on the CR, CLI for the broader scheme set, OpenPGP and Sigstore controller support on the roadmap.</a:t>
+            </a:r>
+          </a:p>
+          <a:p>
+            <a:r>
+              <a:t>Q&amp;A backup on global enforcement: there is no admission webhook shipping with the OCM controllers. Verification policy lives on each Component CR. Production installs that want global enforcement bring their own admission policy - Kyverno, Gatekeeper, or a custom webhook against the Component resource.</a:t>
             </a:r>
           </a:p>
           <a:p>
